--- a/WELLORA_Project_Presentation.pptx
+++ b/WELLORA_Project_Presentation.pptx
@@ -2904,7 +2904,7 @@
     <p:bg>
       <p:bgPr>
         <a:solidFill>
-          <a:srgbClr val="C2410C"/>
+          <a:srgbClr val="0B0F19"/>
         </a:solidFill>
       </p:bgPr>
     </p:bg>
@@ -2931,13 +2931,13 @@
         <p:spPr>
           <a:xfrm>
             <a:off x="0" y="0"/>
-            <a:ext cx="12191695" cy="109728"/>
+            <a:ext cx="12191695" cy="91440"/>
           </a:xfrm>
           <a:prstGeom prst="rect">
             <a:avLst/>
           </a:prstGeom>
           <a:solidFill>
-            <a:srgbClr val="FFFFFF"/>
+            <a:srgbClr val="FF6B00"/>
           </a:solidFill>
           <a:ln/>
         </p:spPr>
@@ -2959,11 +2959,11 @@
             </a:avLst>
           </a:prstGeom>
           <a:solidFill>
-            <a:srgbClr val="541804"/>
+            <a:srgbClr val="121826"/>
           </a:solidFill>
-          <a:ln w="25400">
+          <a:ln w="19050">
             <a:solidFill>
-              <a:srgbClr val="FFFFFF"/>
+              <a:srgbClr val="FF6B00"/>
             </a:solidFill>
             <a:prstDash val="solid"/>
           </a:ln>
@@ -2986,11 +2986,11 @@
             </a:avLst>
           </a:prstGeom>
           <a:solidFill>
-            <a:srgbClr val="360E02"/>
+            <a:srgbClr val="2A1708"/>
           </a:solidFill>
           <a:ln w="15240">
             <a:solidFill>
-              <a:srgbClr val="FDE047"/>
+              <a:srgbClr val="FF6B00"/>
             </a:solidFill>
             <a:prstDash val="solid"/>
           </a:ln>
@@ -3023,7 +3023,7 @@
             <a:r>
               <a:rPr lang="en-US" sz="950" b="1" dirty="0">
                 <a:solidFill>
-                  <a:srgbClr val="FDE047"/>
+                  <a:srgbClr val="FFA726"/>
                 </a:solidFill>
               </a:rPr>
               <a:t>⚡ DUAL-PHYSICS DIGITAL TWIN &amp; AI OPTIMIZATION</a:t>
@@ -3098,7 +3098,7 @@
             <a:r>
               <a:rPr lang="en-US" sz="1800" b="1" dirty="0">
                 <a:solidFill>
-                  <a:srgbClr val="FFF7ED"/>
+                  <a:srgbClr val="F1F5F9"/>
                 </a:solidFill>
                 <a:latin typeface="Segoe UI" pitchFamily="34" charset="0"/>
                 <a:ea typeface="Segoe UI" pitchFamily="34" charset="-122"/>
@@ -3137,7 +3137,7 @@
             <a:r>
               <a:rPr lang="en-US" sz="1250" dirty="0">
                 <a:solidFill>
-                  <a:srgbClr val="FED7AA"/>
+                  <a:srgbClr val="94A3B8"/>
                 </a:solidFill>
                 <a:latin typeface="Segoe UI" pitchFamily="34" charset="0"/>
                 <a:ea typeface="Segoe UI" pitchFamily="34" charset="-122"/>
@@ -3166,11 +3166,11 @@
             </a:avLst>
           </a:prstGeom>
           <a:solidFill>
-            <a:srgbClr val="3B1002"/>
+            <a:srgbClr val="2A1708"/>
           </a:solidFill>
           <a:ln w="12700">
             <a:solidFill>
-              <a:srgbClr val="FFFFFF"/>
+              <a:srgbClr val="FF6B00"/>
             </a:solidFill>
             <a:prstDash val="solid"/>
           </a:ln>
@@ -3203,7 +3203,7 @@
             <a:r>
               <a:rPr lang="en-US" sz="850" b="1" dirty="0">
                 <a:solidFill>
-                  <a:srgbClr val="FFFFFF"/>
+                  <a:srgbClr val="FFA726"/>
                 </a:solidFill>
               </a:rPr>
               <a:t>React 18 + TS</a:t>
@@ -3229,11 +3229,11 @@
             </a:avLst>
           </a:prstGeom>
           <a:solidFill>
-            <a:srgbClr val="3B1002"/>
+            <a:srgbClr val="2A1708"/>
           </a:solidFill>
           <a:ln w="12700">
             <a:solidFill>
-              <a:srgbClr val="FFFFFF"/>
+              <a:srgbClr val="FF6B00"/>
             </a:solidFill>
             <a:prstDash val="solid"/>
           </a:ln>
@@ -3266,7 +3266,7 @@
             <a:r>
               <a:rPr lang="en-US" sz="850" b="1" dirty="0">
                 <a:solidFill>
-                  <a:srgbClr val="FFFFFF"/>
+                  <a:srgbClr val="FFA726"/>
                 </a:solidFill>
               </a:rPr>
               <a:t>Thermal EOR ODE Solver</a:t>
@@ -3292,11 +3292,11 @@
             </a:avLst>
           </a:prstGeom>
           <a:solidFill>
-            <a:srgbClr val="3B1002"/>
+            <a:srgbClr val="2A1708"/>
           </a:solidFill>
           <a:ln w="12700">
             <a:solidFill>
-              <a:srgbClr val="FFFFFF"/>
+              <a:srgbClr val="FF6B00"/>
             </a:solidFill>
             <a:prstDash val="solid"/>
           </a:ln>
@@ -3329,7 +3329,7 @@
             <a:r>
               <a:rPr lang="en-US" sz="850" b="1" dirty="0">
                 <a:solidFill>
-                  <a:srgbClr val="FFFFFF"/>
+                  <a:srgbClr val="FFA726"/>
                 </a:solidFill>
               </a:rPr>
               <a:t>2.0 Hz Real-Time SCADA</a:t>
@@ -3355,11 +3355,11 @@
             </a:avLst>
           </a:prstGeom>
           <a:solidFill>
-            <a:srgbClr val="3B1002"/>
+            <a:srgbClr val="2A1708"/>
           </a:solidFill>
           <a:ln w="12700">
             <a:solidFill>
-              <a:srgbClr val="FFFFFF"/>
+              <a:srgbClr val="FF6B00"/>
             </a:solidFill>
             <a:prstDash val="solid"/>
           </a:ln>
@@ -3392,7 +3392,7 @@
             <a:r>
               <a:rPr lang="en-US" sz="850" b="1" dirty="0">
                 <a:solidFill>
-                  <a:srgbClr val="FFFFFF"/>
+                  <a:srgbClr val="FFA726"/>
                 </a:solidFill>
               </a:rPr>
               <a:t>Laser Dynamometer</a:t>
@@ -3418,11 +3418,11 @@
             </a:avLst>
           </a:prstGeom>
           <a:solidFill>
-            <a:srgbClr val="3B1002"/>
+            <a:srgbClr val="2A1708"/>
           </a:solidFill>
           <a:ln w="12700">
             <a:solidFill>
-              <a:srgbClr val="FFFFFF"/>
+              <a:srgbClr val="FF6B00"/>
             </a:solidFill>
             <a:prstDash val="solid"/>
           </a:ln>
@@ -3455,7 +3455,7 @@
             <a:r>
               <a:rPr lang="en-US" sz="850" b="1" dirty="0">
                 <a:solidFill>
-                  <a:srgbClr val="FFFFFF"/>
+                  <a:srgbClr val="FFA726"/>
                 </a:solidFill>
               </a:rPr>
               <a:t>Conversational AI Copilot</a:t>
@@ -3547,7 +3547,7 @@
             <a:r>
               <a:rPr lang="en-US" sz="1000" dirty="0">
                 <a:solidFill>
-                  <a:srgbClr val="FED7AA"/>
+                  <a:srgbClr val="94A3B8"/>
                 </a:solidFill>
                 <a:latin typeface="Segoe UI" pitchFamily="34" charset="0"/>
                 <a:ea typeface="Segoe UI" pitchFamily="34" charset="-122"/>
@@ -3564,7 +3564,7 @@
             <a:r>
               <a:rPr lang="en-US" sz="1000" dirty="0">
                 <a:solidFill>
-                  <a:srgbClr val="FED7AA"/>
+                  <a:srgbClr val="94A3B8"/>
                 </a:solidFill>
                 <a:latin typeface="Segoe UI" pitchFamily="34" charset="0"/>
                 <a:ea typeface="Segoe UI" pitchFamily="34" charset="-122"/>
@@ -3590,7 +3590,7 @@
     <p:bg>
       <p:bgPr>
         <a:solidFill>
-          <a:srgbClr val="C2410C"/>
+          <a:srgbClr val="0B0F19"/>
         </a:solidFill>
       </p:bgPr>
     </p:bg>
@@ -3617,17 +3617,17 @@
         <p:spPr>
           <a:xfrm>
             <a:off x="0" y="0"/>
-            <a:ext cx="12191695" cy="91440"/>
+            <a:ext cx="12191695" cy="73152"/>
           </a:xfrm>
           <a:prstGeom prst="rect">
             <a:avLst/>
           </a:prstGeom>
           <a:solidFill>
-            <a:srgbClr val="FFFFFF"/>
+            <a:srgbClr val="FF6B00"/>
           </a:solidFill>
           <a:ln w="12700">
             <a:solidFill>
-              <a:srgbClr val="FFFFFF"/>
+              <a:srgbClr val="FF6B00"/>
             </a:solidFill>
             <a:prstDash val="solid"/>
           </a:ln>
@@ -3650,11 +3650,11 @@
             </a:avLst>
           </a:prstGeom>
           <a:solidFill>
-            <a:srgbClr val="451203"/>
+            <a:srgbClr val="2A1708"/>
           </a:solidFill>
           <a:ln w="15240">
             <a:solidFill>
-              <a:srgbClr val="FFFFFF"/>
+              <a:srgbClr val="FF6B00"/>
             </a:solidFill>
             <a:prstDash val="solid"/>
           </a:ln>
@@ -3687,7 +3687,7 @@
             <a:r>
               <a:rPr lang="en-US" sz="950" b="1" dirty="0">
                 <a:solidFill>
-                  <a:srgbClr val="FDE047"/>
+                  <a:srgbClr val="FFA726"/>
                 </a:solidFill>
               </a:rPr>
               <a:t>⚙  USER INTERFACE ENGINEERING</a:t>
@@ -3752,7 +3752,7 @@
           <a:noFill/>
           <a:ln w="19050">
             <a:solidFill>
-              <a:srgbClr val="E06528"/>
+              <a:srgbClr val="1E293B"/>
             </a:solidFill>
             <a:prstDash val="solid"/>
           </a:ln>
@@ -3767,7 +3767,7 @@
         <p:spPr>
           <a:xfrm>
             <a:off x="731520" y="1234440"/>
-            <a:ext cx="2560320" cy="0"/>
+            <a:ext cx="2286000" cy="0"/>
           </a:xfrm>
           <a:prstGeom prst="line">
             <a:avLst/>
@@ -3775,7 +3775,7 @@
           <a:noFill/>
           <a:ln w="31750">
             <a:solidFill>
-              <a:srgbClr val="FFFFFF"/>
+              <a:srgbClr val="FF6B00"/>
             </a:solidFill>
             <a:prstDash val="solid"/>
           </a:ln>
@@ -3798,7 +3798,7 @@
           <a:noFill/>
           <a:ln w="12700">
             <a:solidFill>
-              <a:srgbClr val="E06528"/>
+              <a:srgbClr val="1E293B"/>
             </a:solidFill>
             <a:prstDash val="solid"/>
           </a:ln>
@@ -3831,7 +3831,7 @@
             <a:r>
               <a:rPr lang="en-US" sz="900" dirty="0">
                 <a:solidFill>
-                  <a:srgbClr val="FED7AA"/>
+                  <a:srgbClr val="94A3B8"/>
                 </a:solidFill>
                 <a:latin typeface="Segoe UI" pitchFamily="34" charset="0"/>
                 <a:ea typeface="Segoe UI" pitchFamily="34" charset="-122"/>
@@ -3870,7 +3870,7 @@
             <a:r>
               <a:rPr lang="en-US" sz="950" b="1" dirty="0">
                 <a:solidFill>
-                  <a:srgbClr val="FFFFFF"/>
+                  <a:srgbClr val="FF6B00"/>
                 </a:solidFill>
                 <a:latin typeface="Segoe UI" pitchFamily="34" charset="0"/>
                 <a:ea typeface="Segoe UI" pitchFamily="34" charset="-122"/>
@@ -3899,11 +3899,11 @@
             </a:avLst>
           </a:prstGeom>
           <a:solidFill>
-            <a:srgbClr val="6B2006"/>
+            <a:srgbClr val="121826"/>
           </a:solidFill>
           <a:ln w="15240">
             <a:solidFill>
-              <a:srgbClr val="E06528"/>
+              <a:srgbClr val="1E293B"/>
             </a:solidFill>
             <a:prstDash val="solid"/>
           </a:ln>
@@ -3936,10 +3936,10 @@
             <a:r>
               <a:rPr lang="en-US" sz="1200" b="1" dirty="0">
                 <a:solidFill>
-                  <a:srgbClr val="FDE047"/>
-                </a:solidFill>
-              </a:rPr>
-              <a:t>Industrial Orange Palette &amp; Tokens</a:t>
+                  <a:srgbClr val="FF8C38"/>
+                </a:solidFill>
+              </a:rPr>
+              <a:t>Industrial Design System &amp; Tokens</a:t>
             </a:r>
             <a:endParaRPr lang="en-US" sz="1200" dirty="0"/>
           </a:p>
@@ -3972,13 +3972,13 @@
             <a:r>
               <a:rPr lang="en-US" sz="1000" dirty="0">
                 <a:solidFill>
-                  <a:srgbClr val="FFF7ED"/>
+                  <a:srgbClr val="F1F5F9"/>
                 </a:solidFill>
                 <a:latin typeface="Segoe UI" pitchFamily="34" charset="0"/>
                 <a:ea typeface="Segoe UI" pitchFamily="34" charset="-122"/>
                 <a:cs typeface="Segoe UI" pitchFamily="34" charset="-120"/>
               </a:rPr>
-              <a:t>• High-Contrast Industrial Theme: Deep vibrant orange background (#C2410C) with pure white text (#FFFFFF) for 24/7 control room readability.</a:t>
+              <a:t>• High-Contrast Theme: Clean dark slate canvas (#0B0F19) with tasteful Cyber-Orange accents (#FF6B00) and crisp white text (#FFFFFF).</a:t>
             </a:r>
             <a:endParaRPr lang="en-US" sz="1000" dirty="0"/>
           </a:p>
@@ -4011,13 +4011,13 @@
             <a:r>
               <a:rPr lang="en-US" sz="1000" dirty="0">
                 <a:solidFill>
-                  <a:srgbClr val="FFF7ED"/>
+                  <a:srgbClr val="F1F5F9"/>
                 </a:solidFill>
                 <a:latin typeface="Segoe UI" pitchFamily="34" charset="0"/>
                 <a:ea typeface="Segoe UI" pitchFamily="34" charset="-122"/>
                 <a:cs typeface="Segoe UI" pitchFamily="34" charset="-120"/>
               </a:rPr>
-              <a:t>• Status Semantic Colors: Green (#4ADE80) for Normal, Yellow (#FDE047) for Warning, Red (#F87171) for Alarms, Cyan (#67E8F9) for Steam Injection.</a:t>
+              <a:t>• Status Semantic Colors: Green (#34D399) for Normal, Amber (#FFA726) for Warning, Red (#F87171) for Alarms, Cyan (#38BDF8) for Steam Injection.</a:t>
             </a:r>
             <a:endParaRPr lang="en-US" sz="1000" dirty="0"/>
           </a:p>
@@ -4050,13 +4050,13 @@
             <a:r>
               <a:rPr lang="en-US" sz="1000" dirty="0">
                 <a:solidFill>
-                  <a:srgbClr val="FFF7ED"/>
+                  <a:srgbClr val="F1F5F9"/>
                 </a:solidFill>
                 <a:latin typeface="Segoe UI" pitchFamily="34" charset="0"/>
                 <a:ea typeface="Segoe UI" pitchFamily="34" charset="-122"/>
                 <a:cs typeface="Segoe UI" pitchFamily="34" charset="-120"/>
               </a:rPr>
-              <a:t>• Typography: Space Grotesk / Plus Jakarta Sans for headings + JetBrains Mono for telemetry numerals.</a:t>
+              <a:t>• Typography: Space Grotesk for headings + JetBrains Mono for telemetry numerals.</a:t>
             </a:r>
             <a:endParaRPr lang="en-US" sz="1000" dirty="0"/>
           </a:p>
@@ -4079,11 +4079,11 @@
             </a:avLst>
           </a:prstGeom>
           <a:solidFill>
-            <a:srgbClr val="6B2006"/>
+            <a:srgbClr val="121826"/>
           </a:solidFill>
           <a:ln w="15240">
             <a:solidFill>
-              <a:srgbClr val="E06528"/>
+              <a:srgbClr val="1E293B"/>
             </a:solidFill>
             <a:prstDash val="solid"/>
           </a:ln>
@@ -4116,7 +4116,7 @@
             <a:r>
               <a:rPr lang="en-US" sz="1200" b="1" dirty="0">
                 <a:solidFill>
-                  <a:srgbClr val="FDE047"/>
+                  <a:srgbClr val="FF8C38"/>
                 </a:solidFill>
               </a:rPr>
               <a:t>Reactive Component Tree &amp; State Flow</a:t>
@@ -4152,13 +4152,13 @@
             <a:r>
               <a:rPr lang="en-US" sz="1000" dirty="0">
                 <a:solidFill>
-                  <a:srgbClr val="FFF7ED"/>
+                  <a:srgbClr val="F1F5F9"/>
                 </a:solidFill>
                 <a:latin typeface="Segoe UI" pitchFamily="34" charset="0"/>
                 <a:ea typeface="Segoe UI" pitchFamily="34" charset="-122"/>
                 <a:cs typeface="Segoe UI" pitchFamily="34" charset="-120"/>
               </a:rPr>
-              <a:t>• App.tsx: Central telemetry state coordinator managing 2.0 Hz telemetry ticks, active well ID, and simulation parameters.</a:t>
+              <a:t>• App.tsx: Central telemetry coordinator managing 2.0 Hz telemetry ticks, active well selection, and simulation parameters.</a:t>
             </a:r>
             <a:endParaRPr lang="en-US" sz="1000" dirty="0"/>
           </a:p>
@@ -4191,7 +4191,7 @@
             <a:r>
               <a:rPr lang="en-US" sz="1000" dirty="0">
                 <a:solidFill>
-                  <a:srgbClr val="FFF7ED"/>
+                  <a:srgbClr val="F1F5F9"/>
                 </a:solidFill>
                 <a:latin typeface="Segoe UI" pitchFamily="34" charset="0"/>
                 <a:ea typeface="Segoe UI" pitchFamily="34" charset="-122"/>
@@ -4230,7 +4230,7 @@
             <a:r>
               <a:rPr lang="en-US" sz="1000" dirty="0">
                 <a:solidFill>
-                  <a:srgbClr val="FFF7ED"/>
+                  <a:srgbClr val="F1F5F9"/>
                 </a:solidFill>
                 <a:latin typeface="Segoe UI" pitchFamily="34" charset="0"/>
                 <a:ea typeface="Segoe UI" pitchFamily="34" charset="-122"/>
@@ -4269,7 +4269,7 @@
             <a:r>
               <a:rPr lang="en-US" sz="1000" dirty="0">
                 <a:solidFill>
-                  <a:srgbClr val="FFF7ED"/>
+                  <a:srgbClr val="F1F5F9"/>
                 </a:solidFill>
                 <a:latin typeface="Segoe UI" pitchFamily="34" charset="0"/>
                 <a:ea typeface="Segoe UI" pitchFamily="34" charset="-122"/>
@@ -4295,7 +4295,7 @@
     <p:bg>
       <p:bgPr>
         <a:solidFill>
-          <a:srgbClr val="C2410C"/>
+          <a:srgbClr val="0B0F19"/>
         </a:solidFill>
       </p:bgPr>
     </p:bg>
@@ -4322,17 +4322,17 @@
         <p:spPr>
           <a:xfrm>
             <a:off x="0" y="0"/>
-            <a:ext cx="12191695" cy="91440"/>
+            <a:ext cx="12191695" cy="73152"/>
           </a:xfrm>
           <a:prstGeom prst="rect">
             <a:avLst/>
           </a:prstGeom>
           <a:solidFill>
-            <a:srgbClr val="FFFFFF"/>
+            <a:srgbClr val="FF6B00"/>
           </a:solidFill>
           <a:ln w="12700">
             <a:solidFill>
-              <a:srgbClr val="FFFFFF"/>
+              <a:srgbClr val="FF6B00"/>
             </a:solidFill>
             <a:prstDash val="solid"/>
           </a:ln>
@@ -4355,11 +4355,11 @@
             </a:avLst>
           </a:prstGeom>
           <a:solidFill>
-            <a:srgbClr val="451203"/>
+            <a:srgbClr val="2A1708"/>
           </a:solidFill>
           <a:ln w="15240">
             <a:solidFill>
-              <a:srgbClr val="FFFFFF"/>
+              <a:srgbClr val="FF6B00"/>
             </a:solidFill>
             <a:prstDash val="solid"/>
           </a:ln>
@@ -4392,7 +4392,7 @@
             <a:r>
               <a:rPr lang="en-US" sz="950" b="1" dirty="0">
                 <a:solidFill>
-                  <a:srgbClr val="FDE047"/>
+                  <a:srgbClr val="FFA726"/>
                 </a:solidFill>
               </a:rPr>
               <a:t>⚙  UI SCREENSHOT 01</a:t>
@@ -4457,7 +4457,7 @@
           <a:noFill/>
           <a:ln w="19050">
             <a:solidFill>
-              <a:srgbClr val="E06528"/>
+              <a:srgbClr val="1E293B"/>
             </a:solidFill>
             <a:prstDash val="solid"/>
           </a:ln>
@@ -4472,7 +4472,7 @@
         <p:spPr>
           <a:xfrm>
             <a:off x="731520" y="1234440"/>
-            <a:ext cx="2560320" cy="0"/>
+            <a:ext cx="2286000" cy="0"/>
           </a:xfrm>
           <a:prstGeom prst="line">
             <a:avLst/>
@@ -4480,7 +4480,7 @@
           <a:noFill/>
           <a:ln w="31750">
             <a:solidFill>
-              <a:srgbClr val="FFFFFF"/>
+              <a:srgbClr val="FF6B00"/>
             </a:solidFill>
             <a:prstDash val="solid"/>
           </a:ln>
@@ -4503,7 +4503,7 @@
           <a:noFill/>
           <a:ln w="12700">
             <a:solidFill>
-              <a:srgbClr val="E06528"/>
+              <a:srgbClr val="1E293B"/>
             </a:solidFill>
             <a:prstDash val="solid"/>
           </a:ln>
@@ -4536,7 +4536,7 @@
             <a:r>
               <a:rPr lang="en-US" sz="900" dirty="0">
                 <a:solidFill>
-                  <a:srgbClr val="FED7AA"/>
+                  <a:srgbClr val="94A3B8"/>
                 </a:solidFill>
                 <a:latin typeface="Segoe UI" pitchFamily="34" charset="0"/>
                 <a:ea typeface="Segoe UI" pitchFamily="34" charset="-122"/>
@@ -4575,7 +4575,7 @@
             <a:r>
               <a:rPr lang="en-US" sz="950" b="1" dirty="0">
                 <a:solidFill>
-                  <a:srgbClr val="FFFFFF"/>
+                  <a:srgbClr val="FF6B00"/>
                 </a:solidFill>
                 <a:latin typeface="Segoe UI" pitchFamily="34" charset="0"/>
                 <a:ea typeface="Segoe UI" pitchFamily="34" charset="-122"/>
@@ -4604,11 +4604,11 @@
             </a:avLst>
           </a:prstGeom>
           <a:solidFill>
-            <a:srgbClr val="2B0901"/>
+            <a:srgbClr val="06090F"/>
           </a:solidFill>
-          <a:ln w="19050">
+          <a:ln w="15240">
             <a:solidFill>
-              <a:srgbClr val="FFFFFF"/>
+              <a:srgbClr val="E06528"/>
             </a:solidFill>
             <a:prstDash val="solid"/>
           </a:ln>
@@ -4655,11 +4655,11 @@
             </a:avLst>
           </a:prstGeom>
           <a:solidFill>
-            <a:srgbClr val="872808"/>
+            <a:srgbClr val="121826"/>
           </a:solidFill>
           <a:ln w="15240">
             <a:solidFill>
-              <a:srgbClr val="FFFFFF"/>
+              <a:srgbClr val="1E293B"/>
             </a:solidFill>
             <a:prstDash val="solid"/>
           </a:ln>
@@ -4692,7 +4692,7 @@
             <a:r>
               <a:rPr lang="en-US" sz="1150" b="1" dirty="0">
                 <a:solidFill>
-                  <a:srgbClr val="FDE047"/>
+                  <a:srgbClr val="FF8C38"/>
                 </a:solidFill>
               </a:rPr>
               <a:t>Component Analysis &amp; Walkthrough</a:t>
@@ -4728,7 +4728,7 @@
             <a:r>
               <a:rPr lang="en-US" sz="950" dirty="0">
                 <a:solidFill>
-                  <a:srgbClr val="FFF7ED"/>
+                  <a:srgbClr val="F1F5F9"/>
                 </a:solidFill>
                 <a:latin typeface="Segoe UI" pitchFamily="34" charset="0"/>
                 <a:ea typeface="Segoe UI" pitchFamily="34" charset="-122"/>
@@ -4767,7 +4767,7 @@
             <a:r>
               <a:rPr lang="en-US" sz="950" dirty="0">
                 <a:solidFill>
-                  <a:srgbClr val="FFF7ED"/>
+                  <a:srgbClr val="F1F5F9"/>
                 </a:solidFill>
                 <a:latin typeface="Segoe UI" pitchFamily="34" charset="0"/>
                 <a:ea typeface="Segoe UI" pitchFamily="34" charset="-122"/>
@@ -4806,7 +4806,7 @@
             <a:r>
               <a:rPr lang="en-US" sz="950" dirty="0">
                 <a:solidFill>
-                  <a:srgbClr val="FFF7ED"/>
+                  <a:srgbClr val="F1F5F9"/>
                 </a:solidFill>
                 <a:latin typeface="Segoe UI" pitchFamily="34" charset="0"/>
                 <a:ea typeface="Segoe UI" pitchFamily="34" charset="-122"/>
@@ -4845,7 +4845,7 @@
             <a:r>
               <a:rPr lang="en-US" sz="950" dirty="0">
                 <a:solidFill>
-                  <a:srgbClr val="FFF7ED"/>
+                  <a:srgbClr val="F1F5F9"/>
                 </a:solidFill>
                 <a:latin typeface="Segoe UI" pitchFamily="34" charset="0"/>
                 <a:ea typeface="Segoe UI" pitchFamily="34" charset="-122"/>
@@ -4871,7 +4871,7 @@
     <p:bg>
       <p:bgPr>
         <a:solidFill>
-          <a:srgbClr val="C2410C"/>
+          <a:srgbClr val="0B0F19"/>
         </a:solidFill>
       </p:bgPr>
     </p:bg>
@@ -4898,17 +4898,17 @@
         <p:spPr>
           <a:xfrm>
             <a:off x="0" y="0"/>
-            <a:ext cx="12191695" cy="91440"/>
+            <a:ext cx="12191695" cy="73152"/>
           </a:xfrm>
           <a:prstGeom prst="rect">
             <a:avLst/>
           </a:prstGeom>
           <a:solidFill>
-            <a:srgbClr val="FFFFFF"/>
+            <a:srgbClr val="FF6B00"/>
           </a:solidFill>
           <a:ln w="12700">
             <a:solidFill>
-              <a:srgbClr val="FFFFFF"/>
+              <a:srgbClr val="FF6B00"/>
             </a:solidFill>
             <a:prstDash val="solid"/>
           </a:ln>
@@ -4931,11 +4931,11 @@
             </a:avLst>
           </a:prstGeom>
           <a:solidFill>
-            <a:srgbClr val="451203"/>
+            <a:srgbClr val="2A1708"/>
           </a:solidFill>
           <a:ln w="15240">
             <a:solidFill>
-              <a:srgbClr val="FFFFFF"/>
+              <a:srgbClr val="FF6B00"/>
             </a:solidFill>
             <a:prstDash val="solid"/>
           </a:ln>
@@ -4968,7 +4968,7 @@
             <a:r>
               <a:rPr lang="en-US" sz="950" b="1" dirty="0">
                 <a:solidFill>
-                  <a:srgbClr val="FDE047"/>
+                  <a:srgbClr val="FFA726"/>
                 </a:solidFill>
               </a:rPr>
               <a:t>⚙  UI SCREENSHOT 02</a:t>
@@ -5033,7 +5033,7 @@
           <a:noFill/>
           <a:ln w="19050">
             <a:solidFill>
-              <a:srgbClr val="E06528"/>
+              <a:srgbClr val="1E293B"/>
             </a:solidFill>
             <a:prstDash val="solid"/>
           </a:ln>
@@ -5048,7 +5048,7 @@
         <p:spPr>
           <a:xfrm>
             <a:off x="731520" y="1234440"/>
-            <a:ext cx="2560320" cy="0"/>
+            <a:ext cx="2286000" cy="0"/>
           </a:xfrm>
           <a:prstGeom prst="line">
             <a:avLst/>
@@ -5056,7 +5056,7 @@
           <a:noFill/>
           <a:ln w="31750">
             <a:solidFill>
-              <a:srgbClr val="FFFFFF"/>
+              <a:srgbClr val="FF6B00"/>
             </a:solidFill>
             <a:prstDash val="solid"/>
           </a:ln>
@@ -5079,7 +5079,7 @@
           <a:noFill/>
           <a:ln w="12700">
             <a:solidFill>
-              <a:srgbClr val="E06528"/>
+              <a:srgbClr val="1E293B"/>
             </a:solidFill>
             <a:prstDash val="solid"/>
           </a:ln>
@@ -5112,7 +5112,7 @@
             <a:r>
               <a:rPr lang="en-US" sz="900" dirty="0">
                 <a:solidFill>
-                  <a:srgbClr val="FED7AA"/>
+                  <a:srgbClr val="94A3B8"/>
                 </a:solidFill>
                 <a:latin typeface="Segoe UI" pitchFamily="34" charset="0"/>
                 <a:ea typeface="Segoe UI" pitchFamily="34" charset="-122"/>
@@ -5151,7 +5151,7 @@
             <a:r>
               <a:rPr lang="en-US" sz="950" b="1" dirty="0">
                 <a:solidFill>
-                  <a:srgbClr val="FFFFFF"/>
+                  <a:srgbClr val="FF6B00"/>
                 </a:solidFill>
                 <a:latin typeface="Segoe UI" pitchFamily="34" charset="0"/>
                 <a:ea typeface="Segoe UI" pitchFamily="34" charset="-122"/>
@@ -5180,11 +5180,11 @@
             </a:avLst>
           </a:prstGeom>
           <a:solidFill>
-            <a:srgbClr val="2B0901"/>
+            <a:srgbClr val="06090F"/>
           </a:solidFill>
-          <a:ln w="19050">
+          <a:ln w="15240">
             <a:solidFill>
-              <a:srgbClr val="FFFFFF"/>
+              <a:srgbClr val="E06528"/>
             </a:solidFill>
             <a:prstDash val="solid"/>
           </a:ln>
@@ -5231,11 +5231,11 @@
             </a:avLst>
           </a:prstGeom>
           <a:solidFill>
-            <a:srgbClr val="872808"/>
+            <a:srgbClr val="121826"/>
           </a:solidFill>
           <a:ln w="15240">
             <a:solidFill>
-              <a:srgbClr val="FFFFFF"/>
+              <a:srgbClr val="1E293B"/>
             </a:solidFill>
             <a:prstDash val="solid"/>
           </a:ln>
@@ -5268,7 +5268,7 @@
             <a:r>
               <a:rPr lang="en-US" sz="1150" b="1" dirty="0">
                 <a:solidFill>
-                  <a:srgbClr val="FDE047"/>
+                  <a:srgbClr val="FF8C38"/>
                 </a:solidFill>
               </a:rPr>
               <a:t>Signal Processing &amp; Oscilloscope Features</a:t>
@@ -5304,7 +5304,7 @@
             <a:r>
               <a:rPr lang="en-US" sz="950" dirty="0">
                 <a:solidFill>
-                  <a:srgbClr val="FFF7ED"/>
+                  <a:srgbClr val="F1F5F9"/>
                 </a:solidFill>
                 <a:latin typeface="Segoe UI" pitchFamily="34" charset="0"/>
                 <a:ea typeface="Segoe UI" pitchFamily="34" charset="-122"/>
@@ -5343,7 +5343,7 @@
             <a:r>
               <a:rPr lang="en-US" sz="950" dirty="0">
                 <a:solidFill>
-                  <a:srgbClr val="FFF7ED"/>
+                  <a:srgbClr val="F1F5F9"/>
                 </a:solidFill>
                 <a:latin typeface="Segoe UI" pitchFamily="34" charset="0"/>
                 <a:ea typeface="Segoe UI" pitchFamily="34" charset="-122"/>
@@ -5382,7 +5382,7 @@
             <a:r>
               <a:rPr lang="en-US" sz="950" dirty="0">
                 <a:solidFill>
-                  <a:srgbClr val="FFF7ED"/>
+                  <a:srgbClr val="F1F5F9"/>
                 </a:solidFill>
                 <a:latin typeface="Segoe UI" pitchFamily="34" charset="0"/>
                 <a:ea typeface="Segoe UI" pitchFamily="34" charset="-122"/>
@@ -5421,7 +5421,7 @@
             <a:r>
               <a:rPr lang="en-US" sz="950" dirty="0">
                 <a:solidFill>
-                  <a:srgbClr val="FFF7ED"/>
+                  <a:srgbClr val="F1F5F9"/>
                 </a:solidFill>
                 <a:latin typeface="Segoe UI" pitchFamily="34" charset="0"/>
                 <a:ea typeface="Segoe UI" pitchFamily="34" charset="-122"/>
@@ -5447,7 +5447,7 @@
     <p:bg>
       <p:bgPr>
         <a:solidFill>
-          <a:srgbClr val="C2410C"/>
+          <a:srgbClr val="0B0F19"/>
         </a:solidFill>
       </p:bgPr>
     </p:bg>
@@ -5474,17 +5474,17 @@
         <p:spPr>
           <a:xfrm>
             <a:off x="0" y="0"/>
-            <a:ext cx="12191695" cy="91440"/>
+            <a:ext cx="12191695" cy="73152"/>
           </a:xfrm>
           <a:prstGeom prst="rect">
             <a:avLst/>
           </a:prstGeom>
           <a:solidFill>
-            <a:srgbClr val="FFFFFF"/>
+            <a:srgbClr val="FF6B00"/>
           </a:solidFill>
           <a:ln w="12700">
             <a:solidFill>
-              <a:srgbClr val="FFFFFF"/>
+              <a:srgbClr val="FF6B00"/>
             </a:solidFill>
             <a:prstDash val="solid"/>
           </a:ln>
@@ -5507,11 +5507,11 @@
             </a:avLst>
           </a:prstGeom>
           <a:solidFill>
-            <a:srgbClr val="451203"/>
+            <a:srgbClr val="2A1708"/>
           </a:solidFill>
           <a:ln w="15240">
             <a:solidFill>
-              <a:srgbClr val="FFFFFF"/>
+              <a:srgbClr val="FF6B00"/>
             </a:solidFill>
             <a:prstDash val="solid"/>
           </a:ln>
@@ -5544,7 +5544,7 @@
             <a:r>
               <a:rPr lang="en-US" sz="950" b="1" dirty="0">
                 <a:solidFill>
-                  <a:srgbClr val="FDE047"/>
+                  <a:srgbClr val="FFA726"/>
                 </a:solidFill>
               </a:rPr>
               <a:t>⚙  UI SCREENSHOT 03</a:t>
@@ -5609,7 +5609,7 @@
           <a:noFill/>
           <a:ln w="19050">
             <a:solidFill>
-              <a:srgbClr val="E06528"/>
+              <a:srgbClr val="1E293B"/>
             </a:solidFill>
             <a:prstDash val="solid"/>
           </a:ln>
@@ -5624,7 +5624,7 @@
         <p:spPr>
           <a:xfrm>
             <a:off x="731520" y="1234440"/>
-            <a:ext cx="2560320" cy="0"/>
+            <a:ext cx="2286000" cy="0"/>
           </a:xfrm>
           <a:prstGeom prst="line">
             <a:avLst/>
@@ -5632,7 +5632,7 @@
           <a:noFill/>
           <a:ln w="31750">
             <a:solidFill>
-              <a:srgbClr val="FFFFFF"/>
+              <a:srgbClr val="FF6B00"/>
             </a:solidFill>
             <a:prstDash val="solid"/>
           </a:ln>
@@ -5655,7 +5655,7 @@
           <a:noFill/>
           <a:ln w="12700">
             <a:solidFill>
-              <a:srgbClr val="E06528"/>
+              <a:srgbClr val="1E293B"/>
             </a:solidFill>
             <a:prstDash val="solid"/>
           </a:ln>
@@ -5688,7 +5688,7 @@
             <a:r>
               <a:rPr lang="en-US" sz="900" dirty="0">
                 <a:solidFill>
-                  <a:srgbClr val="FED7AA"/>
+                  <a:srgbClr val="94A3B8"/>
                 </a:solidFill>
                 <a:latin typeface="Segoe UI" pitchFamily="34" charset="0"/>
                 <a:ea typeface="Segoe UI" pitchFamily="34" charset="-122"/>
@@ -5727,7 +5727,7 @@
             <a:r>
               <a:rPr lang="en-US" sz="950" b="1" dirty="0">
                 <a:solidFill>
-                  <a:srgbClr val="FFFFFF"/>
+                  <a:srgbClr val="FF6B00"/>
                 </a:solidFill>
                 <a:latin typeface="Segoe UI" pitchFamily="34" charset="0"/>
                 <a:ea typeface="Segoe UI" pitchFamily="34" charset="-122"/>
@@ -5756,11 +5756,11 @@
             </a:avLst>
           </a:prstGeom>
           <a:solidFill>
-            <a:srgbClr val="2B0901"/>
+            <a:srgbClr val="06090F"/>
           </a:solidFill>
-          <a:ln w="19050">
+          <a:ln w="15240">
             <a:solidFill>
-              <a:srgbClr val="FFFFFF"/>
+              <a:srgbClr val="E06528"/>
             </a:solidFill>
             <a:prstDash val="solid"/>
           </a:ln>
@@ -5807,11 +5807,11 @@
             </a:avLst>
           </a:prstGeom>
           <a:solidFill>
-            <a:srgbClr val="872808"/>
+            <a:srgbClr val="121826"/>
           </a:solidFill>
           <a:ln w="15240">
             <a:solidFill>
-              <a:srgbClr val="FFFFFF"/>
+              <a:srgbClr val="1E293B"/>
             </a:solidFill>
             <a:prstDash val="solid"/>
           </a:ln>
@@ -5844,7 +5844,7 @@
             <a:r>
               <a:rPr lang="en-US" sz="1150" b="1" dirty="0">
                 <a:solidFill>
-                  <a:srgbClr val="FDE047"/>
+                  <a:srgbClr val="FF8C38"/>
                 </a:solidFill>
               </a:rPr>
               <a:t>Dynamometer Analysis &amp; Mechanical Diagnosis</a:t>
@@ -5880,7 +5880,7 @@
             <a:r>
               <a:rPr lang="en-US" sz="950" dirty="0">
                 <a:solidFill>
-                  <a:srgbClr val="FFF7ED"/>
+                  <a:srgbClr val="F1F5F9"/>
                 </a:solidFill>
                 <a:latin typeface="Segoe UI" pitchFamily="34" charset="0"/>
                 <a:ea typeface="Segoe UI" pitchFamily="34" charset="-122"/>
@@ -5919,7 +5919,7 @@
             <a:r>
               <a:rPr lang="en-US" sz="950" dirty="0">
                 <a:solidFill>
-                  <a:srgbClr val="FFF7ED"/>
+                  <a:srgbClr val="F1F5F9"/>
                 </a:solidFill>
                 <a:latin typeface="Segoe UI" pitchFamily="34" charset="0"/>
                 <a:ea typeface="Segoe UI" pitchFamily="34" charset="-122"/>
@@ -5958,7 +5958,7 @@
             <a:r>
               <a:rPr lang="en-US" sz="950" dirty="0">
                 <a:solidFill>
-                  <a:srgbClr val="FFF7ED"/>
+                  <a:srgbClr val="F1F5F9"/>
                 </a:solidFill>
                 <a:latin typeface="Segoe UI" pitchFamily="34" charset="0"/>
                 <a:ea typeface="Segoe UI" pitchFamily="34" charset="-122"/>
@@ -5997,7 +5997,7 @@
             <a:r>
               <a:rPr lang="en-US" sz="950" dirty="0">
                 <a:solidFill>
-                  <a:srgbClr val="FFF7ED"/>
+                  <a:srgbClr val="F1F5F9"/>
                 </a:solidFill>
                 <a:latin typeface="Segoe UI" pitchFamily="34" charset="0"/>
                 <a:ea typeface="Segoe UI" pitchFamily="34" charset="-122"/>
@@ -6023,7 +6023,7 @@
     <p:bg>
       <p:bgPr>
         <a:solidFill>
-          <a:srgbClr val="C2410C"/>
+          <a:srgbClr val="0B0F19"/>
         </a:solidFill>
       </p:bgPr>
     </p:bg>
@@ -6050,17 +6050,17 @@
         <p:spPr>
           <a:xfrm>
             <a:off x="0" y="0"/>
-            <a:ext cx="12191695" cy="91440"/>
+            <a:ext cx="12191695" cy="73152"/>
           </a:xfrm>
           <a:prstGeom prst="rect">
             <a:avLst/>
           </a:prstGeom>
           <a:solidFill>
-            <a:srgbClr val="FFFFFF"/>
+            <a:srgbClr val="FF6B00"/>
           </a:solidFill>
           <a:ln w="12700">
             <a:solidFill>
-              <a:srgbClr val="FFFFFF"/>
+              <a:srgbClr val="FF6B00"/>
             </a:solidFill>
             <a:prstDash val="solid"/>
           </a:ln>
@@ -6083,11 +6083,11 @@
             </a:avLst>
           </a:prstGeom>
           <a:solidFill>
-            <a:srgbClr val="451203"/>
+            <a:srgbClr val="2A1708"/>
           </a:solidFill>
           <a:ln w="15240">
             <a:solidFill>
-              <a:srgbClr val="FFFFFF"/>
+              <a:srgbClr val="FF6B00"/>
             </a:solidFill>
             <a:prstDash val="solid"/>
           </a:ln>
@@ -6120,7 +6120,7 @@
             <a:r>
               <a:rPr lang="en-US" sz="950" b="1" dirty="0">
                 <a:solidFill>
-                  <a:srgbClr val="FDE047"/>
+                  <a:srgbClr val="FFA726"/>
                 </a:solidFill>
               </a:rPr>
               <a:t>⚙  UI SCREENSHOT 04</a:t>
@@ -6185,7 +6185,7 @@
           <a:noFill/>
           <a:ln w="19050">
             <a:solidFill>
-              <a:srgbClr val="E06528"/>
+              <a:srgbClr val="1E293B"/>
             </a:solidFill>
             <a:prstDash val="solid"/>
           </a:ln>
@@ -6200,7 +6200,7 @@
         <p:spPr>
           <a:xfrm>
             <a:off x="731520" y="1234440"/>
-            <a:ext cx="2560320" cy="0"/>
+            <a:ext cx="2286000" cy="0"/>
           </a:xfrm>
           <a:prstGeom prst="line">
             <a:avLst/>
@@ -6208,7 +6208,7 @@
           <a:noFill/>
           <a:ln w="31750">
             <a:solidFill>
-              <a:srgbClr val="FFFFFF"/>
+              <a:srgbClr val="FF6B00"/>
             </a:solidFill>
             <a:prstDash val="solid"/>
           </a:ln>
@@ -6231,7 +6231,7 @@
           <a:noFill/>
           <a:ln w="12700">
             <a:solidFill>
-              <a:srgbClr val="E06528"/>
+              <a:srgbClr val="1E293B"/>
             </a:solidFill>
             <a:prstDash val="solid"/>
           </a:ln>
@@ -6264,7 +6264,7 @@
             <a:r>
               <a:rPr lang="en-US" sz="900" dirty="0">
                 <a:solidFill>
-                  <a:srgbClr val="FED7AA"/>
+                  <a:srgbClr val="94A3B8"/>
                 </a:solidFill>
                 <a:latin typeface="Segoe UI" pitchFamily="34" charset="0"/>
                 <a:ea typeface="Segoe UI" pitchFamily="34" charset="-122"/>
@@ -6303,7 +6303,7 @@
             <a:r>
               <a:rPr lang="en-US" sz="950" b="1" dirty="0">
                 <a:solidFill>
-                  <a:srgbClr val="FFFFFF"/>
+                  <a:srgbClr val="FF6B00"/>
                 </a:solidFill>
                 <a:latin typeface="Segoe UI" pitchFamily="34" charset="0"/>
                 <a:ea typeface="Segoe UI" pitchFamily="34" charset="-122"/>
@@ -6332,11 +6332,11 @@
             </a:avLst>
           </a:prstGeom>
           <a:solidFill>
-            <a:srgbClr val="2B0901"/>
+            <a:srgbClr val="06090F"/>
           </a:solidFill>
-          <a:ln w="19050">
+          <a:ln w="15240">
             <a:solidFill>
-              <a:srgbClr val="FFFFFF"/>
+              <a:srgbClr val="E06528"/>
             </a:solidFill>
             <a:prstDash val="solid"/>
           </a:ln>
@@ -6383,11 +6383,11 @@
             </a:avLst>
           </a:prstGeom>
           <a:solidFill>
-            <a:srgbClr val="872808"/>
+            <a:srgbClr val="121826"/>
           </a:solidFill>
           <a:ln w="15240">
             <a:solidFill>
-              <a:srgbClr val="FFFFFF"/>
+              <a:srgbClr val="1E293B"/>
             </a:solidFill>
             <a:prstDash val="solid"/>
           </a:ln>
@@ -6420,7 +6420,7 @@
             <a:r>
               <a:rPr lang="en-US" sz="1150" b="1" dirty="0">
                 <a:solidFill>
-                  <a:srgbClr val="FDE047"/>
+                  <a:srgbClr val="FF8C38"/>
                 </a:solidFill>
               </a:rPr>
               <a:t>Synoptic Flow Architecture &amp; 3D Visualizer</a:t>
@@ -6456,7 +6456,7 @@
             <a:r>
               <a:rPr lang="en-US" sz="950" dirty="0">
                 <a:solidFill>
-                  <a:srgbClr val="FFF7ED"/>
+                  <a:srgbClr val="F1F5F9"/>
                 </a:solidFill>
                 <a:latin typeface="Segoe UI" pitchFamily="34" charset="0"/>
                 <a:ea typeface="Segoe UI" pitchFamily="34" charset="-122"/>
@@ -6495,7 +6495,7 @@
             <a:r>
               <a:rPr lang="en-US" sz="950" dirty="0">
                 <a:solidFill>
-                  <a:srgbClr val="FFF7ED"/>
+                  <a:srgbClr val="F1F5F9"/>
                 </a:solidFill>
                 <a:latin typeface="Segoe UI" pitchFamily="34" charset="0"/>
                 <a:ea typeface="Segoe UI" pitchFamily="34" charset="-122"/>
@@ -6534,7 +6534,7 @@
             <a:r>
               <a:rPr lang="en-US" sz="950" dirty="0">
                 <a:solidFill>
-                  <a:srgbClr val="FFF7ED"/>
+                  <a:srgbClr val="F1F5F9"/>
                 </a:solidFill>
                 <a:latin typeface="Segoe UI" pitchFamily="34" charset="0"/>
                 <a:ea typeface="Segoe UI" pitchFamily="34" charset="-122"/>
@@ -6573,7 +6573,7 @@
             <a:r>
               <a:rPr lang="en-US" sz="950" dirty="0">
                 <a:solidFill>
-                  <a:srgbClr val="FFF7ED"/>
+                  <a:srgbClr val="F1F5F9"/>
                 </a:solidFill>
                 <a:latin typeface="Segoe UI" pitchFamily="34" charset="0"/>
                 <a:ea typeface="Segoe UI" pitchFamily="34" charset="-122"/>
@@ -6599,7 +6599,7 @@
     <p:bg>
       <p:bgPr>
         <a:solidFill>
-          <a:srgbClr val="C2410C"/>
+          <a:srgbClr val="0B0F19"/>
         </a:solidFill>
       </p:bgPr>
     </p:bg>
@@ -6626,17 +6626,17 @@
         <p:spPr>
           <a:xfrm>
             <a:off x="0" y="0"/>
-            <a:ext cx="12191695" cy="91440"/>
+            <a:ext cx="12191695" cy="73152"/>
           </a:xfrm>
           <a:prstGeom prst="rect">
             <a:avLst/>
           </a:prstGeom>
           <a:solidFill>
-            <a:srgbClr val="FFFFFF"/>
+            <a:srgbClr val="FF6B00"/>
           </a:solidFill>
           <a:ln w="12700">
             <a:solidFill>
-              <a:srgbClr val="FFFFFF"/>
+              <a:srgbClr val="FF6B00"/>
             </a:solidFill>
             <a:prstDash val="solid"/>
           </a:ln>
@@ -6659,11 +6659,11 @@
             </a:avLst>
           </a:prstGeom>
           <a:solidFill>
-            <a:srgbClr val="451203"/>
+            <a:srgbClr val="2A1708"/>
           </a:solidFill>
           <a:ln w="15240">
             <a:solidFill>
-              <a:srgbClr val="FFFFFF"/>
+              <a:srgbClr val="FF6B00"/>
             </a:solidFill>
             <a:prstDash val="solid"/>
           </a:ln>
@@ -6696,7 +6696,7 @@
             <a:r>
               <a:rPr lang="en-US" sz="950" b="1" dirty="0">
                 <a:solidFill>
-                  <a:srgbClr val="FDE047"/>
+                  <a:srgbClr val="FFA726"/>
                 </a:solidFill>
               </a:rPr>
               <a:t>⚙  BACKEND CODE 01</a:t>
@@ -6761,7 +6761,7 @@
           <a:noFill/>
           <a:ln w="19050">
             <a:solidFill>
-              <a:srgbClr val="E06528"/>
+              <a:srgbClr val="1E293B"/>
             </a:solidFill>
             <a:prstDash val="solid"/>
           </a:ln>
@@ -6776,7 +6776,7 @@
         <p:spPr>
           <a:xfrm>
             <a:off x="731520" y="1234440"/>
-            <a:ext cx="2560320" cy="0"/>
+            <a:ext cx="2286000" cy="0"/>
           </a:xfrm>
           <a:prstGeom prst="line">
             <a:avLst/>
@@ -6784,7 +6784,7 @@
           <a:noFill/>
           <a:ln w="31750">
             <a:solidFill>
-              <a:srgbClr val="FFFFFF"/>
+              <a:srgbClr val="FF6B00"/>
             </a:solidFill>
             <a:prstDash val="solid"/>
           </a:ln>
@@ -6807,7 +6807,7 @@
           <a:noFill/>
           <a:ln w="12700">
             <a:solidFill>
-              <a:srgbClr val="E06528"/>
+              <a:srgbClr val="1E293B"/>
             </a:solidFill>
             <a:prstDash val="solid"/>
           </a:ln>
@@ -6840,7 +6840,7 @@
             <a:r>
               <a:rPr lang="en-US" sz="900" dirty="0">
                 <a:solidFill>
-                  <a:srgbClr val="FED7AA"/>
+                  <a:srgbClr val="94A3B8"/>
                 </a:solidFill>
                 <a:latin typeface="Segoe UI" pitchFamily="34" charset="0"/>
                 <a:ea typeface="Segoe UI" pitchFamily="34" charset="-122"/>
@@ -6879,7 +6879,7 @@
             <a:r>
               <a:rPr lang="en-US" sz="950" b="1" dirty="0">
                 <a:solidFill>
-                  <a:srgbClr val="FFFFFF"/>
+                  <a:srgbClr val="FF6B00"/>
                 </a:solidFill>
                 <a:latin typeface="Segoe UI" pitchFamily="34" charset="0"/>
                 <a:ea typeface="Segoe UI" pitchFamily="34" charset="-122"/>
@@ -6908,11 +6908,11 @@
             </a:avLst>
           </a:prstGeom>
           <a:solidFill>
-            <a:srgbClr val="140702"/>
+            <a:srgbClr val="07090E"/>
           </a:solidFill>
           <a:ln w="15240">
             <a:solidFill>
-              <a:srgbClr val="FFFFFF"/>
+              <a:srgbClr val="1E293B"/>
             </a:solidFill>
             <a:prstDash val="solid"/>
           </a:ln>
@@ -6945,7 +6945,7 @@
             <a:r>
               <a:rPr lang="en-US" sz="900" dirty="0">
                 <a:solidFill>
-                  <a:srgbClr val="FDE047"/>
+                  <a:srgbClr val="FFA726"/>
                 </a:solidFill>
                 <a:latin typeface="Consolas" pitchFamily="34" charset="0"/>
                 <a:ea typeface="Consolas" pitchFamily="34" charset="-122"/>
@@ -6984,7 +6984,7 @@
             <a:r>
               <a:rPr lang="en-US" sz="800" dirty="0">
                 <a:solidFill>
-                  <a:srgbClr val="FFFFFF"/>
+                  <a:srgbClr val="F1F5F9"/>
                 </a:solidFill>
                 <a:latin typeface="Consolas" pitchFamily="34" charset="0"/>
                 <a:ea typeface="Consolas" pitchFamily="34" charset="-122"/>
@@ -7001,7 +7001,7 @@
             <a:r>
               <a:rPr lang="en-US" sz="800" dirty="0">
                 <a:solidFill>
-                  <a:srgbClr val="FFFFFF"/>
+                  <a:srgbClr val="F1F5F9"/>
                 </a:solidFill>
                 <a:latin typeface="Consolas" pitchFamily="34" charset="0"/>
                 <a:ea typeface="Consolas" pitchFamily="34" charset="-122"/>
@@ -7018,7 +7018,7 @@
             <a:r>
               <a:rPr lang="en-US" sz="800" dirty="0">
                 <a:solidFill>
-                  <a:srgbClr val="FFFFFF"/>
+                  <a:srgbClr val="F1F5F9"/>
                 </a:solidFill>
                 <a:latin typeface="Consolas" pitchFamily="34" charset="0"/>
                 <a:ea typeface="Consolas" pitchFamily="34" charset="-122"/>
@@ -7035,7 +7035,7 @@
             <a:r>
               <a:rPr lang="en-US" sz="800" dirty="0">
                 <a:solidFill>
-                  <a:srgbClr val="FFFFFF"/>
+                  <a:srgbClr val="F1F5F9"/>
                 </a:solidFill>
                 <a:latin typeface="Consolas" pitchFamily="34" charset="0"/>
                 <a:ea typeface="Consolas" pitchFamily="34" charset="-122"/>
@@ -7052,7 +7052,7 @@
             <a:r>
               <a:rPr lang="en-US" sz="800" dirty="0">
                 <a:solidFill>
-                  <a:srgbClr val="FFFFFF"/>
+                  <a:srgbClr val="F1F5F9"/>
                 </a:solidFill>
                 <a:latin typeface="Consolas" pitchFamily="34" charset="0"/>
                 <a:ea typeface="Consolas" pitchFamily="34" charset="-122"/>
@@ -7069,7 +7069,7 @@
             <a:r>
               <a:rPr lang="en-US" sz="800" dirty="0">
                 <a:solidFill>
-                  <a:srgbClr val="FFFFFF"/>
+                  <a:srgbClr val="F1F5F9"/>
                 </a:solidFill>
                 <a:latin typeface="Consolas" pitchFamily="34" charset="0"/>
                 <a:ea typeface="Consolas" pitchFamily="34" charset="-122"/>
@@ -7086,7 +7086,7 @@
             <a:r>
               <a:rPr lang="en-US" sz="800" dirty="0">
                 <a:solidFill>
-                  <a:srgbClr val="FFFFFF"/>
+                  <a:srgbClr val="F1F5F9"/>
                 </a:solidFill>
                 <a:latin typeface="Consolas" pitchFamily="34" charset="0"/>
                 <a:ea typeface="Consolas" pitchFamily="34" charset="-122"/>
@@ -7109,7 +7109,7 @@
             <a:r>
               <a:rPr lang="en-US" sz="800" dirty="0">
                 <a:solidFill>
-                  <a:srgbClr val="FFFFFF"/>
+                  <a:srgbClr val="F1F5F9"/>
                 </a:solidFill>
                 <a:latin typeface="Consolas" pitchFamily="34" charset="0"/>
                 <a:ea typeface="Consolas" pitchFamily="34" charset="-122"/>
@@ -7126,7 +7126,7 @@
             <a:r>
               <a:rPr lang="en-US" sz="800" dirty="0">
                 <a:solidFill>
-                  <a:srgbClr val="FFFFFF"/>
+                  <a:srgbClr val="F1F5F9"/>
                 </a:solidFill>
                 <a:latin typeface="Consolas" pitchFamily="34" charset="0"/>
                 <a:ea typeface="Consolas" pitchFamily="34" charset="-122"/>
@@ -7143,7 +7143,7 @@
             <a:r>
               <a:rPr lang="en-US" sz="800" dirty="0">
                 <a:solidFill>
-                  <a:srgbClr val="FFFFFF"/>
+                  <a:srgbClr val="F1F5F9"/>
                 </a:solidFill>
                 <a:latin typeface="Consolas" pitchFamily="34" charset="0"/>
                 <a:ea typeface="Consolas" pitchFamily="34" charset="-122"/>
@@ -7160,7 +7160,7 @@
             <a:r>
               <a:rPr lang="en-US" sz="800" dirty="0">
                 <a:solidFill>
-                  <a:srgbClr val="FFFFFF"/>
+                  <a:srgbClr val="F1F5F9"/>
                 </a:solidFill>
                 <a:latin typeface="Consolas" pitchFamily="34" charset="0"/>
                 <a:ea typeface="Consolas" pitchFamily="34" charset="-122"/>
@@ -7177,7 +7177,7 @@
             <a:r>
               <a:rPr lang="en-US" sz="800" dirty="0">
                 <a:solidFill>
-                  <a:srgbClr val="FFFFFF"/>
+                  <a:srgbClr val="F1F5F9"/>
                 </a:solidFill>
                 <a:latin typeface="Consolas" pitchFamily="34" charset="0"/>
                 <a:ea typeface="Consolas" pitchFamily="34" charset="-122"/>
@@ -7194,7 +7194,7 @@
             <a:r>
               <a:rPr lang="en-US" sz="800" dirty="0">
                 <a:solidFill>
-                  <a:srgbClr val="FFFFFF"/>
+                  <a:srgbClr val="F1F5F9"/>
                 </a:solidFill>
                 <a:latin typeface="Consolas" pitchFamily="34" charset="0"/>
                 <a:ea typeface="Consolas" pitchFamily="34" charset="-122"/>
@@ -7211,7 +7211,7 @@
             <a:r>
               <a:rPr lang="en-US" sz="800" dirty="0">
                 <a:solidFill>
-                  <a:srgbClr val="FFFFFF"/>
+                  <a:srgbClr val="F1F5F9"/>
                 </a:solidFill>
                 <a:latin typeface="Consolas" pitchFamily="34" charset="0"/>
                 <a:ea typeface="Consolas" pitchFamily="34" charset="-122"/>
@@ -7228,7 +7228,7 @@
             <a:r>
               <a:rPr lang="en-US" sz="800" dirty="0">
                 <a:solidFill>
-                  <a:srgbClr val="FFFFFF"/>
+                  <a:srgbClr val="F1F5F9"/>
                 </a:solidFill>
                 <a:latin typeface="Consolas" pitchFamily="34" charset="0"/>
                 <a:ea typeface="Consolas" pitchFamily="34" charset="-122"/>
@@ -7245,7 +7245,7 @@
             <a:r>
               <a:rPr lang="en-US" sz="800" dirty="0">
                 <a:solidFill>
-                  <a:srgbClr val="FFFFFF"/>
+                  <a:srgbClr val="F1F5F9"/>
                 </a:solidFill>
                 <a:latin typeface="Consolas" pitchFamily="34" charset="0"/>
                 <a:ea typeface="Consolas" pitchFamily="34" charset="-122"/>
@@ -7262,7 +7262,7 @@
             <a:r>
               <a:rPr lang="en-US" sz="800" dirty="0">
                 <a:solidFill>
-                  <a:srgbClr val="FFFFFF"/>
+                  <a:srgbClr val="F1F5F9"/>
                 </a:solidFill>
                 <a:latin typeface="Consolas" pitchFamily="34" charset="0"/>
                 <a:ea typeface="Consolas" pitchFamily="34" charset="-122"/>
@@ -7279,7 +7279,7 @@
             <a:r>
               <a:rPr lang="en-US" sz="800" dirty="0">
                 <a:solidFill>
-                  <a:srgbClr val="FFFFFF"/>
+                  <a:srgbClr val="F1F5F9"/>
                 </a:solidFill>
                 <a:latin typeface="Consolas" pitchFamily="34" charset="0"/>
                 <a:ea typeface="Consolas" pitchFamily="34" charset="-122"/>
@@ -7296,7 +7296,7 @@
             <a:r>
               <a:rPr lang="en-US" sz="800" dirty="0">
                 <a:solidFill>
-                  <a:srgbClr val="FFFFFF"/>
+                  <a:srgbClr val="F1F5F9"/>
                 </a:solidFill>
                 <a:latin typeface="Consolas" pitchFamily="34" charset="0"/>
                 <a:ea typeface="Consolas" pitchFamily="34" charset="-122"/>
@@ -7313,7 +7313,7 @@
             <a:r>
               <a:rPr lang="en-US" sz="800" dirty="0">
                 <a:solidFill>
-                  <a:srgbClr val="FFFFFF"/>
+                  <a:srgbClr val="F1F5F9"/>
                 </a:solidFill>
                 <a:latin typeface="Consolas" pitchFamily="34" charset="0"/>
                 <a:ea typeface="Consolas" pitchFamily="34" charset="-122"/>
@@ -7330,7 +7330,7 @@
             <a:r>
               <a:rPr lang="en-US" sz="800" dirty="0">
                 <a:solidFill>
-                  <a:srgbClr val="FFFFFF"/>
+                  <a:srgbClr val="F1F5F9"/>
                 </a:solidFill>
                 <a:latin typeface="Consolas" pitchFamily="34" charset="0"/>
                 <a:ea typeface="Consolas" pitchFamily="34" charset="-122"/>
@@ -7347,7 +7347,7 @@
             <a:r>
               <a:rPr lang="en-US" sz="800" dirty="0">
                 <a:solidFill>
-                  <a:srgbClr val="FFFFFF"/>
+                  <a:srgbClr val="F1F5F9"/>
                 </a:solidFill>
                 <a:latin typeface="Consolas" pitchFamily="34" charset="0"/>
                 <a:ea typeface="Consolas" pitchFamily="34" charset="-122"/>
@@ -7364,7 +7364,7 @@
             <a:r>
               <a:rPr lang="en-US" sz="800" dirty="0">
                 <a:solidFill>
-                  <a:srgbClr val="FFFFFF"/>
+                  <a:srgbClr val="F1F5F9"/>
                 </a:solidFill>
                 <a:latin typeface="Consolas" pitchFamily="34" charset="0"/>
                 <a:ea typeface="Consolas" pitchFamily="34" charset="-122"/>
@@ -7381,7 +7381,7 @@
             <a:r>
               <a:rPr lang="en-US" sz="800" dirty="0">
                 <a:solidFill>
-                  <a:srgbClr val="FFFFFF"/>
+                  <a:srgbClr val="F1F5F9"/>
                 </a:solidFill>
                 <a:latin typeface="Consolas" pitchFamily="34" charset="0"/>
                 <a:ea typeface="Consolas" pitchFamily="34" charset="-122"/>
@@ -7410,11 +7410,11 @@
             </a:avLst>
           </a:prstGeom>
           <a:solidFill>
-            <a:srgbClr val="6B2006"/>
+            <a:srgbClr val="121826"/>
           </a:solidFill>
           <a:ln w="15240">
             <a:solidFill>
-              <a:srgbClr val="E06528"/>
+              <a:srgbClr val="1E293B"/>
             </a:solidFill>
             <a:prstDash val="solid"/>
           </a:ln>
@@ -7447,7 +7447,7 @@
             <a:r>
               <a:rPr lang="en-US" sz="1150" b="1" dirty="0">
                 <a:solidFill>
-                  <a:srgbClr val="FDE047"/>
+                  <a:srgbClr val="FF8C38"/>
                 </a:solidFill>
               </a:rPr>
               <a:t>Code Engineering Rationale</a:t>
@@ -7483,7 +7483,7 @@
             <a:r>
               <a:rPr lang="en-US" sz="950" dirty="0">
                 <a:solidFill>
-                  <a:srgbClr val="FFF7ED"/>
+                  <a:srgbClr val="F1F5F9"/>
                 </a:solidFill>
                 <a:latin typeface="Segoe UI" pitchFamily="34" charset="0"/>
                 <a:ea typeface="Segoe UI" pitchFamily="34" charset="-122"/>
@@ -7522,7 +7522,7 @@
             <a:r>
               <a:rPr lang="en-US" sz="950" dirty="0">
                 <a:solidFill>
-                  <a:srgbClr val="FFF7ED"/>
+                  <a:srgbClr val="F1F5F9"/>
                 </a:solidFill>
                 <a:latin typeface="Segoe UI" pitchFamily="34" charset="0"/>
                 <a:ea typeface="Segoe UI" pitchFamily="34" charset="-122"/>
@@ -7561,7 +7561,7 @@
             <a:r>
               <a:rPr lang="en-US" sz="950" dirty="0">
                 <a:solidFill>
-                  <a:srgbClr val="FFF7ED"/>
+                  <a:srgbClr val="F1F5F9"/>
                 </a:solidFill>
                 <a:latin typeface="Segoe UI" pitchFamily="34" charset="0"/>
                 <a:ea typeface="Segoe UI" pitchFamily="34" charset="-122"/>
@@ -7587,7 +7587,7 @@
     <p:bg>
       <p:bgPr>
         <a:solidFill>
-          <a:srgbClr val="C2410C"/>
+          <a:srgbClr val="0B0F19"/>
         </a:solidFill>
       </p:bgPr>
     </p:bg>
@@ -7614,17 +7614,17 @@
         <p:spPr>
           <a:xfrm>
             <a:off x="0" y="0"/>
-            <a:ext cx="12191695" cy="91440"/>
+            <a:ext cx="12191695" cy="73152"/>
           </a:xfrm>
           <a:prstGeom prst="rect">
             <a:avLst/>
           </a:prstGeom>
           <a:solidFill>
-            <a:srgbClr val="FFFFFF"/>
+            <a:srgbClr val="FF6B00"/>
           </a:solidFill>
           <a:ln w="12700">
             <a:solidFill>
-              <a:srgbClr val="FFFFFF"/>
+              <a:srgbClr val="FF6B00"/>
             </a:solidFill>
             <a:prstDash val="solid"/>
           </a:ln>
@@ -7647,11 +7647,11 @@
             </a:avLst>
           </a:prstGeom>
           <a:solidFill>
-            <a:srgbClr val="451203"/>
+            <a:srgbClr val="2A1708"/>
           </a:solidFill>
           <a:ln w="15240">
             <a:solidFill>
-              <a:srgbClr val="FFFFFF"/>
+              <a:srgbClr val="FF6B00"/>
             </a:solidFill>
             <a:prstDash val="solid"/>
           </a:ln>
@@ -7684,7 +7684,7 @@
             <a:r>
               <a:rPr lang="en-US" sz="950" b="1" dirty="0">
                 <a:solidFill>
-                  <a:srgbClr val="FDE047"/>
+                  <a:srgbClr val="FFA726"/>
                 </a:solidFill>
               </a:rPr>
               <a:t>⚙  BACKEND CODE 02</a:t>
@@ -7749,7 +7749,7 @@
           <a:noFill/>
           <a:ln w="19050">
             <a:solidFill>
-              <a:srgbClr val="E06528"/>
+              <a:srgbClr val="1E293B"/>
             </a:solidFill>
             <a:prstDash val="solid"/>
           </a:ln>
@@ -7764,7 +7764,7 @@
         <p:spPr>
           <a:xfrm>
             <a:off x="731520" y="1234440"/>
-            <a:ext cx="2560320" cy="0"/>
+            <a:ext cx="2286000" cy="0"/>
           </a:xfrm>
           <a:prstGeom prst="line">
             <a:avLst/>
@@ -7772,7 +7772,7 @@
           <a:noFill/>
           <a:ln w="31750">
             <a:solidFill>
-              <a:srgbClr val="FFFFFF"/>
+              <a:srgbClr val="FF6B00"/>
             </a:solidFill>
             <a:prstDash val="solid"/>
           </a:ln>
@@ -7795,7 +7795,7 @@
           <a:noFill/>
           <a:ln w="12700">
             <a:solidFill>
-              <a:srgbClr val="E06528"/>
+              <a:srgbClr val="1E293B"/>
             </a:solidFill>
             <a:prstDash val="solid"/>
           </a:ln>
@@ -7828,7 +7828,7 @@
             <a:r>
               <a:rPr lang="en-US" sz="900" dirty="0">
                 <a:solidFill>
-                  <a:srgbClr val="FED7AA"/>
+                  <a:srgbClr val="94A3B8"/>
                 </a:solidFill>
                 <a:latin typeface="Segoe UI" pitchFamily="34" charset="0"/>
                 <a:ea typeface="Segoe UI" pitchFamily="34" charset="-122"/>
@@ -7867,7 +7867,7 @@
             <a:r>
               <a:rPr lang="en-US" sz="950" b="1" dirty="0">
                 <a:solidFill>
-                  <a:srgbClr val="FFFFFF"/>
+                  <a:srgbClr val="FF6B00"/>
                 </a:solidFill>
                 <a:latin typeface="Segoe UI" pitchFamily="34" charset="0"/>
                 <a:ea typeface="Segoe UI" pitchFamily="34" charset="-122"/>
@@ -7896,11 +7896,11 @@
             </a:avLst>
           </a:prstGeom>
           <a:solidFill>
-            <a:srgbClr val="140702"/>
+            <a:srgbClr val="07090E"/>
           </a:solidFill>
           <a:ln w="15240">
             <a:solidFill>
-              <a:srgbClr val="FFFFFF"/>
+              <a:srgbClr val="1E293B"/>
             </a:solidFill>
             <a:prstDash val="solid"/>
           </a:ln>
@@ -7933,7 +7933,7 @@
             <a:r>
               <a:rPr lang="en-US" sz="900" dirty="0">
                 <a:solidFill>
-                  <a:srgbClr val="FDE047"/>
+                  <a:srgbClr val="FFA726"/>
                 </a:solidFill>
                 <a:latin typeface="Consolas" pitchFamily="34" charset="0"/>
                 <a:ea typeface="Consolas" pitchFamily="34" charset="-122"/>
@@ -7972,7 +7972,7 @@
             <a:r>
               <a:rPr lang="en-US" sz="800" dirty="0">
                 <a:solidFill>
-                  <a:srgbClr val="FFFFFF"/>
+                  <a:srgbClr val="F1F5F9"/>
                 </a:solidFill>
                 <a:latin typeface="Consolas" pitchFamily="34" charset="0"/>
                 <a:ea typeface="Consolas" pitchFamily="34" charset="-122"/>
@@ -7989,7 +7989,7 @@
             <a:r>
               <a:rPr lang="en-US" sz="800" dirty="0">
                 <a:solidFill>
-                  <a:srgbClr val="FFFFFF"/>
+                  <a:srgbClr val="F1F5F9"/>
                 </a:solidFill>
                 <a:latin typeface="Consolas" pitchFamily="34" charset="0"/>
                 <a:ea typeface="Consolas" pitchFamily="34" charset="-122"/>
@@ -8006,7 +8006,7 @@
             <a:r>
               <a:rPr lang="en-US" sz="800" dirty="0">
                 <a:solidFill>
-                  <a:srgbClr val="FFFFFF"/>
+                  <a:srgbClr val="F1F5F9"/>
                 </a:solidFill>
                 <a:latin typeface="Consolas" pitchFamily="34" charset="0"/>
                 <a:ea typeface="Consolas" pitchFamily="34" charset="-122"/>
@@ -8023,7 +8023,7 @@
             <a:r>
               <a:rPr lang="en-US" sz="800" dirty="0">
                 <a:solidFill>
-                  <a:srgbClr val="FFFFFF"/>
+                  <a:srgbClr val="F1F5F9"/>
                 </a:solidFill>
                 <a:latin typeface="Consolas" pitchFamily="34" charset="0"/>
                 <a:ea typeface="Consolas" pitchFamily="34" charset="-122"/>
@@ -8040,7 +8040,7 @@
             <a:r>
               <a:rPr lang="en-US" sz="800" dirty="0">
                 <a:solidFill>
-                  <a:srgbClr val="FFFFFF"/>
+                  <a:srgbClr val="F1F5F9"/>
                 </a:solidFill>
                 <a:latin typeface="Consolas" pitchFamily="34" charset="0"/>
                 <a:ea typeface="Consolas" pitchFamily="34" charset="-122"/>
@@ -8057,7 +8057,7 @@
             <a:r>
               <a:rPr lang="en-US" sz="800" dirty="0">
                 <a:solidFill>
-                  <a:srgbClr val="FFFFFF"/>
+                  <a:srgbClr val="F1F5F9"/>
                 </a:solidFill>
                 <a:latin typeface="Consolas" pitchFamily="34" charset="0"/>
                 <a:ea typeface="Consolas" pitchFamily="34" charset="-122"/>
@@ -8074,7 +8074,7 @@
             <a:r>
               <a:rPr lang="en-US" sz="800" dirty="0">
                 <a:solidFill>
-                  <a:srgbClr val="FFFFFF"/>
+                  <a:srgbClr val="F1F5F9"/>
                 </a:solidFill>
                 <a:latin typeface="Consolas" pitchFamily="34" charset="0"/>
                 <a:ea typeface="Consolas" pitchFamily="34" charset="-122"/>
@@ -8091,7 +8091,7 @@
             <a:r>
               <a:rPr lang="en-US" sz="800" dirty="0">
                 <a:solidFill>
-                  <a:srgbClr val="FFFFFF"/>
+                  <a:srgbClr val="F1F5F9"/>
                 </a:solidFill>
                 <a:latin typeface="Consolas" pitchFamily="34" charset="0"/>
                 <a:ea typeface="Consolas" pitchFamily="34" charset="-122"/>
@@ -8108,7 +8108,7 @@
             <a:r>
               <a:rPr lang="en-US" sz="800" dirty="0">
                 <a:solidFill>
-                  <a:srgbClr val="FFFFFF"/>
+                  <a:srgbClr val="F1F5F9"/>
                 </a:solidFill>
                 <a:latin typeface="Consolas" pitchFamily="34" charset="0"/>
                 <a:ea typeface="Consolas" pitchFamily="34" charset="-122"/>
@@ -8125,7 +8125,7 @@
             <a:r>
               <a:rPr lang="en-US" sz="800" dirty="0">
                 <a:solidFill>
-                  <a:srgbClr val="FFFFFF"/>
+                  <a:srgbClr val="F1F5F9"/>
                 </a:solidFill>
                 <a:latin typeface="Consolas" pitchFamily="34" charset="0"/>
                 <a:ea typeface="Consolas" pitchFamily="34" charset="-122"/>
@@ -8142,7 +8142,7 @@
             <a:r>
               <a:rPr lang="en-US" sz="800" dirty="0">
                 <a:solidFill>
-                  <a:srgbClr val="FFFFFF"/>
+                  <a:srgbClr val="F1F5F9"/>
                 </a:solidFill>
                 <a:latin typeface="Consolas" pitchFamily="34" charset="0"/>
                 <a:ea typeface="Consolas" pitchFamily="34" charset="-122"/>
@@ -8159,7 +8159,7 @@
             <a:r>
               <a:rPr lang="en-US" sz="800" dirty="0">
                 <a:solidFill>
-                  <a:srgbClr val="FFFFFF"/>
+                  <a:srgbClr val="F1F5F9"/>
                 </a:solidFill>
                 <a:latin typeface="Consolas" pitchFamily="34" charset="0"/>
                 <a:ea typeface="Consolas" pitchFamily="34" charset="-122"/>
@@ -8176,7 +8176,7 @@
             <a:r>
               <a:rPr lang="en-US" sz="800" dirty="0">
                 <a:solidFill>
-                  <a:srgbClr val="FFFFFF"/>
+                  <a:srgbClr val="F1F5F9"/>
                 </a:solidFill>
                 <a:latin typeface="Consolas" pitchFamily="34" charset="0"/>
                 <a:ea typeface="Consolas" pitchFamily="34" charset="-122"/>
@@ -8193,7 +8193,7 @@
             <a:r>
               <a:rPr lang="en-US" sz="800" dirty="0">
                 <a:solidFill>
-                  <a:srgbClr val="FFFFFF"/>
+                  <a:srgbClr val="F1F5F9"/>
                 </a:solidFill>
                 <a:latin typeface="Consolas" pitchFamily="34" charset="0"/>
                 <a:ea typeface="Consolas" pitchFamily="34" charset="-122"/>
@@ -8210,7 +8210,7 @@
             <a:r>
               <a:rPr lang="en-US" sz="800" dirty="0">
                 <a:solidFill>
-                  <a:srgbClr val="FFFFFF"/>
+                  <a:srgbClr val="F1F5F9"/>
                 </a:solidFill>
                 <a:latin typeface="Consolas" pitchFamily="34" charset="0"/>
                 <a:ea typeface="Consolas" pitchFamily="34" charset="-122"/>
@@ -8227,7 +8227,7 @@
             <a:r>
               <a:rPr lang="en-US" sz="800" dirty="0">
                 <a:solidFill>
-                  <a:srgbClr val="FFFFFF"/>
+                  <a:srgbClr val="F1F5F9"/>
                 </a:solidFill>
                 <a:latin typeface="Consolas" pitchFamily="34" charset="0"/>
                 <a:ea typeface="Consolas" pitchFamily="34" charset="-122"/>
@@ -8244,7 +8244,7 @@
             <a:r>
               <a:rPr lang="en-US" sz="800" dirty="0">
                 <a:solidFill>
-                  <a:srgbClr val="FFFFFF"/>
+                  <a:srgbClr val="F1F5F9"/>
                 </a:solidFill>
                 <a:latin typeface="Consolas" pitchFamily="34" charset="0"/>
                 <a:ea typeface="Consolas" pitchFamily="34" charset="-122"/>
@@ -8261,7 +8261,7 @@
             <a:r>
               <a:rPr lang="en-US" sz="800" dirty="0">
                 <a:solidFill>
-                  <a:srgbClr val="FFFFFF"/>
+                  <a:srgbClr val="F1F5F9"/>
                 </a:solidFill>
                 <a:latin typeface="Consolas" pitchFamily="34" charset="0"/>
                 <a:ea typeface="Consolas" pitchFamily="34" charset="-122"/>
@@ -8278,7 +8278,7 @@
             <a:r>
               <a:rPr lang="en-US" sz="800" dirty="0">
                 <a:solidFill>
-                  <a:srgbClr val="FFFFFF"/>
+                  <a:srgbClr val="F1F5F9"/>
                 </a:solidFill>
                 <a:latin typeface="Consolas" pitchFamily="34" charset="0"/>
                 <a:ea typeface="Consolas" pitchFamily="34" charset="-122"/>
@@ -8301,7 +8301,7 @@
             <a:r>
               <a:rPr lang="en-US" sz="800" dirty="0">
                 <a:solidFill>
-                  <a:srgbClr val="FFFFFF"/>
+                  <a:srgbClr val="F1F5F9"/>
                 </a:solidFill>
                 <a:latin typeface="Consolas" pitchFamily="34" charset="0"/>
                 <a:ea typeface="Consolas" pitchFamily="34" charset="-122"/>
@@ -8318,7 +8318,7 @@
             <a:r>
               <a:rPr lang="en-US" sz="800" dirty="0">
                 <a:solidFill>
-                  <a:srgbClr val="FFFFFF"/>
+                  <a:srgbClr val="F1F5F9"/>
                 </a:solidFill>
                 <a:latin typeface="Consolas" pitchFamily="34" charset="0"/>
                 <a:ea typeface="Consolas" pitchFamily="34" charset="-122"/>
@@ -8347,11 +8347,11 @@
             </a:avLst>
           </a:prstGeom>
           <a:solidFill>
-            <a:srgbClr val="6B2006"/>
+            <a:srgbClr val="121826"/>
           </a:solidFill>
           <a:ln w="15240">
             <a:solidFill>
-              <a:srgbClr val="E06528"/>
+              <a:srgbClr val="1E293B"/>
             </a:solidFill>
             <a:prstDash val="solid"/>
           </a:ln>
@@ -8384,7 +8384,7 @@
             <a:r>
               <a:rPr lang="en-US" sz="1150" b="1" dirty="0">
                 <a:solidFill>
-                  <a:srgbClr val="FDE047"/>
+                  <a:srgbClr val="FF8C38"/>
                 </a:solidFill>
               </a:rPr>
               <a:t>Mechanical Algorithm Highlights</a:t>
@@ -8420,7 +8420,7 @@
             <a:r>
               <a:rPr lang="en-US" sz="950" dirty="0">
                 <a:solidFill>
-                  <a:srgbClr val="FFF7ED"/>
+                  <a:srgbClr val="F1F5F9"/>
                 </a:solidFill>
                 <a:latin typeface="Segoe UI" pitchFamily="34" charset="0"/>
                 <a:ea typeface="Segoe UI" pitchFamily="34" charset="-122"/>
@@ -8459,7 +8459,7 @@
             <a:r>
               <a:rPr lang="en-US" sz="950" dirty="0">
                 <a:solidFill>
-                  <a:srgbClr val="FFF7ED"/>
+                  <a:srgbClr val="F1F5F9"/>
                 </a:solidFill>
                 <a:latin typeface="Segoe UI" pitchFamily="34" charset="0"/>
                 <a:ea typeface="Segoe UI" pitchFamily="34" charset="-122"/>
@@ -8498,7 +8498,7 @@
             <a:r>
               <a:rPr lang="en-US" sz="950" dirty="0">
                 <a:solidFill>
-                  <a:srgbClr val="FFF7ED"/>
+                  <a:srgbClr val="F1F5F9"/>
                 </a:solidFill>
                 <a:latin typeface="Segoe UI" pitchFamily="34" charset="0"/>
                 <a:ea typeface="Segoe UI" pitchFamily="34" charset="-122"/>
@@ -8524,7 +8524,7 @@
     <p:bg>
       <p:bgPr>
         <a:solidFill>
-          <a:srgbClr val="C2410C"/>
+          <a:srgbClr val="0B0F19"/>
         </a:solidFill>
       </p:bgPr>
     </p:bg>
@@ -8551,17 +8551,17 @@
         <p:spPr>
           <a:xfrm>
             <a:off x="0" y="0"/>
-            <a:ext cx="12191695" cy="91440"/>
+            <a:ext cx="12191695" cy="73152"/>
           </a:xfrm>
           <a:prstGeom prst="rect">
             <a:avLst/>
           </a:prstGeom>
           <a:solidFill>
-            <a:srgbClr val="FFFFFF"/>
+            <a:srgbClr val="FF6B00"/>
           </a:solidFill>
           <a:ln w="12700">
             <a:solidFill>
-              <a:srgbClr val="FFFFFF"/>
+              <a:srgbClr val="FF6B00"/>
             </a:solidFill>
             <a:prstDash val="solid"/>
           </a:ln>
@@ -8584,11 +8584,11 @@
             </a:avLst>
           </a:prstGeom>
           <a:solidFill>
-            <a:srgbClr val="451203"/>
+            <a:srgbClr val="2A1708"/>
           </a:solidFill>
           <a:ln w="15240">
             <a:solidFill>
-              <a:srgbClr val="FFFFFF"/>
+              <a:srgbClr val="FF6B00"/>
             </a:solidFill>
             <a:prstDash val="solid"/>
           </a:ln>
@@ -8621,7 +8621,7 @@
             <a:r>
               <a:rPr lang="en-US" sz="950" b="1" dirty="0">
                 <a:solidFill>
-                  <a:srgbClr val="FDE047"/>
+                  <a:srgbClr val="FFA726"/>
                 </a:solidFill>
               </a:rPr>
               <a:t>⚙  BACKEND CODE 03</a:t>
@@ -8686,7 +8686,7 @@
           <a:noFill/>
           <a:ln w="19050">
             <a:solidFill>
-              <a:srgbClr val="E06528"/>
+              <a:srgbClr val="1E293B"/>
             </a:solidFill>
             <a:prstDash val="solid"/>
           </a:ln>
@@ -8701,7 +8701,7 @@
         <p:spPr>
           <a:xfrm>
             <a:off x="731520" y="1234440"/>
-            <a:ext cx="2560320" cy="0"/>
+            <a:ext cx="2286000" cy="0"/>
           </a:xfrm>
           <a:prstGeom prst="line">
             <a:avLst/>
@@ -8709,7 +8709,7 @@
           <a:noFill/>
           <a:ln w="31750">
             <a:solidFill>
-              <a:srgbClr val="FFFFFF"/>
+              <a:srgbClr val="FF6B00"/>
             </a:solidFill>
             <a:prstDash val="solid"/>
           </a:ln>
@@ -8732,7 +8732,7 @@
           <a:noFill/>
           <a:ln w="12700">
             <a:solidFill>
-              <a:srgbClr val="E06528"/>
+              <a:srgbClr val="1E293B"/>
             </a:solidFill>
             <a:prstDash val="solid"/>
           </a:ln>
@@ -8765,7 +8765,7 @@
             <a:r>
               <a:rPr lang="en-US" sz="900" dirty="0">
                 <a:solidFill>
-                  <a:srgbClr val="FED7AA"/>
+                  <a:srgbClr val="94A3B8"/>
                 </a:solidFill>
                 <a:latin typeface="Segoe UI" pitchFamily="34" charset="0"/>
                 <a:ea typeface="Segoe UI" pitchFamily="34" charset="-122"/>
@@ -8804,7 +8804,7 @@
             <a:r>
               <a:rPr lang="en-US" sz="950" b="1" dirty="0">
                 <a:solidFill>
-                  <a:srgbClr val="FFFFFF"/>
+                  <a:srgbClr val="FF6B00"/>
                 </a:solidFill>
                 <a:latin typeface="Segoe UI" pitchFamily="34" charset="0"/>
                 <a:ea typeface="Segoe UI" pitchFamily="34" charset="-122"/>
@@ -8833,11 +8833,11 @@
             </a:avLst>
           </a:prstGeom>
           <a:solidFill>
-            <a:srgbClr val="140702"/>
+            <a:srgbClr val="07090E"/>
           </a:solidFill>
           <a:ln w="15240">
             <a:solidFill>
-              <a:srgbClr val="FFFFFF"/>
+              <a:srgbClr val="1E293B"/>
             </a:solidFill>
             <a:prstDash val="solid"/>
           </a:ln>
@@ -8870,7 +8870,7 @@
             <a:r>
               <a:rPr lang="en-US" sz="900" dirty="0">
                 <a:solidFill>
-                  <a:srgbClr val="FDE047"/>
+                  <a:srgbClr val="FFA726"/>
                 </a:solidFill>
                 <a:latin typeface="Consolas" pitchFamily="34" charset="0"/>
                 <a:ea typeface="Consolas" pitchFamily="34" charset="-122"/>
@@ -8909,7 +8909,7 @@
             <a:r>
               <a:rPr lang="en-US" sz="800" dirty="0">
                 <a:solidFill>
-                  <a:srgbClr val="FFFFFF"/>
+                  <a:srgbClr val="F1F5F9"/>
                 </a:solidFill>
                 <a:latin typeface="Consolas" pitchFamily="34" charset="0"/>
                 <a:ea typeface="Consolas" pitchFamily="34" charset="-122"/>
@@ -8926,7 +8926,7 @@
             <a:r>
               <a:rPr lang="en-US" sz="800" dirty="0">
                 <a:solidFill>
-                  <a:srgbClr val="FFFFFF"/>
+                  <a:srgbClr val="F1F5F9"/>
                 </a:solidFill>
                 <a:latin typeface="Consolas" pitchFamily="34" charset="0"/>
                 <a:ea typeface="Consolas" pitchFamily="34" charset="-122"/>
@@ -8943,7 +8943,7 @@
             <a:r>
               <a:rPr lang="en-US" sz="800" dirty="0">
                 <a:solidFill>
-                  <a:srgbClr val="FFFFFF"/>
+                  <a:srgbClr val="F1F5F9"/>
                 </a:solidFill>
                 <a:latin typeface="Consolas" pitchFamily="34" charset="0"/>
                 <a:ea typeface="Consolas" pitchFamily="34" charset="-122"/>
@@ -8960,7 +8960,7 @@
             <a:r>
               <a:rPr lang="en-US" sz="800" dirty="0">
                 <a:solidFill>
-                  <a:srgbClr val="FFFFFF"/>
+                  <a:srgbClr val="F1F5F9"/>
                 </a:solidFill>
                 <a:latin typeface="Consolas" pitchFamily="34" charset="0"/>
                 <a:ea typeface="Consolas" pitchFamily="34" charset="-122"/>
@@ -8977,7 +8977,7 @@
             <a:r>
               <a:rPr lang="en-US" sz="800" dirty="0">
                 <a:solidFill>
-                  <a:srgbClr val="FFFFFF"/>
+                  <a:srgbClr val="F1F5F9"/>
                 </a:solidFill>
                 <a:latin typeface="Consolas" pitchFamily="34" charset="0"/>
                 <a:ea typeface="Consolas" pitchFamily="34" charset="-122"/>
@@ -8994,7 +8994,7 @@
             <a:r>
               <a:rPr lang="en-US" sz="800" dirty="0">
                 <a:solidFill>
-                  <a:srgbClr val="FFFFFF"/>
+                  <a:srgbClr val="F1F5F9"/>
                 </a:solidFill>
                 <a:latin typeface="Consolas" pitchFamily="34" charset="0"/>
                 <a:ea typeface="Consolas" pitchFamily="34" charset="-122"/>
@@ -9011,7 +9011,7 @@
             <a:r>
               <a:rPr lang="en-US" sz="800" dirty="0">
                 <a:solidFill>
-                  <a:srgbClr val="FFFFFF"/>
+                  <a:srgbClr val="F1F5F9"/>
                 </a:solidFill>
                 <a:latin typeface="Consolas" pitchFamily="34" charset="0"/>
                 <a:ea typeface="Consolas" pitchFamily="34" charset="-122"/>
@@ -9028,7 +9028,7 @@
             <a:r>
               <a:rPr lang="en-US" sz="800" dirty="0">
                 <a:solidFill>
-                  <a:srgbClr val="FFFFFF"/>
+                  <a:srgbClr val="F1F5F9"/>
                 </a:solidFill>
                 <a:latin typeface="Consolas" pitchFamily="34" charset="0"/>
                 <a:ea typeface="Consolas" pitchFamily="34" charset="-122"/>
@@ -9045,7 +9045,7 @@
             <a:r>
               <a:rPr lang="en-US" sz="800" dirty="0">
                 <a:solidFill>
-                  <a:srgbClr val="FFFFFF"/>
+                  <a:srgbClr val="F1F5F9"/>
                 </a:solidFill>
                 <a:latin typeface="Consolas" pitchFamily="34" charset="0"/>
                 <a:ea typeface="Consolas" pitchFamily="34" charset="-122"/>
@@ -9062,7 +9062,7 @@
             <a:r>
               <a:rPr lang="en-US" sz="800" dirty="0">
                 <a:solidFill>
-                  <a:srgbClr val="FFFFFF"/>
+                  <a:srgbClr val="F1F5F9"/>
                 </a:solidFill>
                 <a:latin typeface="Consolas" pitchFamily="34" charset="0"/>
                 <a:ea typeface="Consolas" pitchFamily="34" charset="-122"/>
@@ -9079,7 +9079,7 @@
             <a:r>
               <a:rPr lang="en-US" sz="800" dirty="0">
                 <a:solidFill>
-                  <a:srgbClr val="FFFFFF"/>
+                  <a:srgbClr val="F1F5F9"/>
                 </a:solidFill>
                 <a:latin typeface="Consolas" pitchFamily="34" charset="0"/>
                 <a:ea typeface="Consolas" pitchFamily="34" charset="-122"/>
@@ -9096,7 +9096,7 @@
             <a:r>
               <a:rPr lang="en-US" sz="800" dirty="0">
                 <a:solidFill>
-                  <a:srgbClr val="FFFFFF"/>
+                  <a:srgbClr val="F1F5F9"/>
                 </a:solidFill>
                 <a:latin typeface="Consolas" pitchFamily="34" charset="0"/>
                 <a:ea typeface="Consolas" pitchFamily="34" charset="-122"/>
@@ -9113,7 +9113,7 @@
             <a:r>
               <a:rPr lang="en-US" sz="800" dirty="0">
                 <a:solidFill>
-                  <a:srgbClr val="FFFFFF"/>
+                  <a:srgbClr val="F1F5F9"/>
                 </a:solidFill>
                 <a:latin typeface="Consolas" pitchFamily="34" charset="0"/>
                 <a:ea typeface="Consolas" pitchFamily="34" charset="-122"/>
@@ -9130,7 +9130,7 @@
             <a:r>
               <a:rPr lang="en-US" sz="800" dirty="0">
                 <a:solidFill>
-                  <a:srgbClr val="FFFFFF"/>
+                  <a:srgbClr val="F1F5F9"/>
                 </a:solidFill>
                 <a:latin typeface="Consolas" pitchFamily="34" charset="0"/>
                 <a:ea typeface="Consolas" pitchFamily="34" charset="-122"/>
@@ -9147,7 +9147,7 @@
             <a:r>
               <a:rPr lang="en-US" sz="800" dirty="0">
                 <a:solidFill>
-                  <a:srgbClr val="FFFFFF"/>
+                  <a:srgbClr val="F1F5F9"/>
                 </a:solidFill>
                 <a:latin typeface="Consolas" pitchFamily="34" charset="0"/>
                 <a:ea typeface="Consolas" pitchFamily="34" charset="-122"/>
@@ -9170,7 +9170,7 @@
             <a:r>
               <a:rPr lang="en-US" sz="800" dirty="0">
                 <a:solidFill>
-                  <a:srgbClr val="FFFFFF"/>
+                  <a:srgbClr val="F1F5F9"/>
                 </a:solidFill>
                 <a:latin typeface="Consolas" pitchFamily="34" charset="0"/>
                 <a:ea typeface="Consolas" pitchFamily="34" charset="-122"/>
@@ -9187,7 +9187,7 @@
             <a:r>
               <a:rPr lang="en-US" sz="800" dirty="0">
                 <a:solidFill>
-                  <a:srgbClr val="FFFFFF"/>
+                  <a:srgbClr val="F1F5F9"/>
                 </a:solidFill>
                 <a:latin typeface="Consolas" pitchFamily="34" charset="0"/>
                 <a:ea typeface="Consolas" pitchFamily="34" charset="-122"/>
@@ -9204,7 +9204,7 @@
             <a:r>
               <a:rPr lang="en-US" sz="800" dirty="0">
                 <a:solidFill>
-                  <a:srgbClr val="FFFFFF"/>
+                  <a:srgbClr val="F1F5F9"/>
                 </a:solidFill>
                 <a:latin typeface="Consolas" pitchFamily="34" charset="0"/>
                 <a:ea typeface="Consolas" pitchFamily="34" charset="-122"/>
@@ -9221,7 +9221,7 @@
             <a:r>
               <a:rPr lang="en-US" sz="800" dirty="0">
                 <a:solidFill>
-                  <a:srgbClr val="FFFFFF"/>
+                  <a:srgbClr val="F1F5F9"/>
                 </a:solidFill>
                 <a:latin typeface="Consolas" pitchFamily="34" charset="0"/>
                 <a:ea typeface="Consolas" pitchFamily="34" charset="-122"/>
@@ -9238,7 +9238,7 @@
             <a:r>
               <a:rPr lang="en-US" sz="800" dirty="0">
                 <a:solidFill>
-                  <a:srgbClr val="FFFFFF"/>
+                  <a:srgbClr val="F1F5F9"/>
                 </a:solidFill>
                 <a:latin typeface="Consolas" pitchFamily="34" charset="0"/>
                 <a:ea typeface="Consolas" pitchFamily="34" charset="-122"/>
@@ -9255,7 +9255,7 @@
             <a:r>
               <a:rPr lang="en-US" sz="800" dirty="0">
                 <a:solidFill>
-                  <a:srgbClr val="FFFFFF"/>
+                  <a:srgbClr val="F1F5F9"/>
                 </a:solidFill>
                 <a:latin typeface="Consolas" pitchFamily="34" charset="0"/>
                 <a:ea typeface="Consolas" pitchFamily="34" charset="-122"/>
@@ -9272,7 +9272,7 @@
             <a:r>
               <a:rPr lang="en-US" sz="800" dirty="0">
                 <a:solidFill>
-                  <a:srgbClr val="FFFFFF"/>
+                  <a:srgbClr val="F1F5F9"/>
                 </a:solidFill>
                 <a:latin typeface="Consolas" pitchFamily="34" charset="0"/>
                 <a:ea typeface="Consolas" pitchFamily="34" charset="-122"/>
@@ -9289,7 +9289,7 @@
             <a:r>
               <a:rPr lang="en-US" sz="800" dirty="0">
                 <a:solidFill>
-                  <a:srgbClr val="FFFFFF"/>
+                  <a:srgbClr val="F1F5F9"/>
                 </a:solidFill>
                 <a:latin typeface="Consolas" pitchFamily="34" charset="0"/>
                 <a:ea typeface="Consolas" pitchFamily="34" charset="-122"/>
@@ -9306,7 +9306,7 @@
             <a:r>
               <a:rPr lang="en-US" sz="800" dirty="0">
                 <a:solidFill>
-                  <a:srgbClr val="FFFFFF"/>
+                  <a:srgbClr val="F1F5F9"/>
                 </a:solidFill>
                 <a:latin typeface="Consolas" pitchFamily="34" charset="0"/>
                 <a:ea typeface="Consolas" pitchFamily="34" charset="-122"/>
@@ -9323,7 +9323,7 @@
             <a:r>
               <a:rPr lang="en-US" sz="800" dirty="0">
                 <a:solidFill>
-                  <a:srgbClr val="FFFFFF"/>
+                  <a:srgbClr val="F1F5F9"/>
                 </a:solidFill>
                 <a:latin typeface="Consolas" pitchFamily="34" charset="0"/>
                 <a:ea typeface="Consolas" pitchFamily="34" charset="-122"/>
@@ -9340,7 +9340,7 @@
             <a:r>
               <a:rPr lang="en-US" sz="800" dirty="0">
                 <a:solidFill>
-                  <a:srgbClr val="FFFFFF"/>
+                  <a:srgbClr val="F1F5F9"/>
                 </a:solidFill>
                 <a:latin typeface="Consolas" pitchFamily="34" charset="0"/>
                 <a:ea typeface="Consolas" pitchFamily="34" charset="-122"/>
@@ -9357,7 +9357,7 @@
             <a:r>
               <a:rPr lang="en-US" sz="800" dirty="0">
                 <a:solidFill>
-                  <a:srgbClr val="FFFFFF"/>
+                  <a:srgbClr val="F1F5F9"/>
                 </a:solidFill>
                 <a:latin typeface="Consolas" pitchFamily="34" charset="0"/>
                 <a:ea typeface="Consolas" pitchFamily="34" charset="-122"/>
@@ -9374,7 +9374,7 @@
             <a:r>
               <a:rPr lang="en-US" sz="800" dirty="0">
                 <a:solidFill>
-                  <a:srgbClr val="FFFFFF"/>
+                  <a:srgbClr val="F1F5F9"/>
                 </a:solidFill>
                 <a:latin typeface="Consolas" pitchFamily="34" charset="0"/>
                 <a:ea typeface="Consolas" pitchFamily="34" charset="-122"/>
@@ -9391,7 +9391,7 @@
             <a:r>
               <a:rPr lang="en-US" sz="800" dirty="0">
                 <a:solidFill>
-                  <a:srgbClr val="FFFFFF"/>
+                  <a:srgbClr val="F1F5F9"/>
                 </a:solidFill>
                 <a:latin typeface="Consolas" pitchFamily="34" charset="0"/>
                 <a:ea typeface="Consolas" pitchFamily="34" charset="-122"/>
@@ -9408,7 +9408,7 @@
             <a:r>
               <a:rPr lang="en-US" sz="800" dirty="0">
                 <a:solidFill>
-                  <a:srgbClr val="FFFFFF"/>
+                  <a:srgbClr val="F1F5F9"/>
                 </a:solidFill>
                 <a:latin typeface="Consolas" pitchFamily="34" charset="0"/>
                 <a:ea typeface="Consolas" pitchFamily="34" charset="-122"/>
@@ -9425,7 +9425,7 @@
             <a:r>
               <a:rPr lang="en-US" sz="800" dirty="0">
                 <a:solidFill>
-                  <a:srgbClr val="FFFFFF"/>
+                  <a:srgbClr val="F1F5F9"/>
                 </a:solidFill>
                 <a:latin typeface="Consolas" pitchFamily="34" charset="0"/>
                 <a:ea typeface="Consolas" pitchFamily="34" charset="-122"/>
@@ -9454,11 +9454,11 @@
             </a:avLst>
           </a:prstGeom>
           <a:solidFill>
-            <a:srgbClr val="6B2006"/>
+            <a:srgbClr val="121826"/>
           </a:solidFill>
           <a:ln w="15240">
             <a:solidFill>
-              <a:srgbClr val="E06528"/>
+              <a:srgbClr val="1E293B"/>
             </a:solidFill>
             <a:prstDash val="solid"/>
           </a:ln>
@@ -9491,7 +9491,7 @@
             <a:r>
               <a:rPr lang="en-US" sz="1150" b="1" dirty="0">
                 <a:solidFill>
-                  <a:srgbClr val="FDE047"/>
+                  <a:srgbClr val="FF8C38"/>
                 </a:solidFill>
               </a:rPr>
               <a:t>Telemetry Engine Highlights</a:t>
@@ -9527,7 +9527,7 @@
             <a:r>
               <a:rPr lang="en-US" sz="950" dirty="0">
                 <a:solidFill>
-                  <a:srgbClr val="FFF7ED"/>
+                  <a:srgbClr val="F1F5F9"/>
                 </a:solidFill>
                 <a:latin typeface="Segoe UI" pitchFamily="34" charset="0"/>
                 <a:ea typeface="Segoe UI" pitchFamily="34" charset="-122"/>
@@ -9566,7 +9566,7 @@
             <a:r>
               <a:rPr lang="en-US" sz="950" dirty="0">
                 <a:solidFill>
-                  <a:srgbClr val="FFF7ED"/>
+                  <a:srgbClr val="F1F5F9"/>
                 </a:solidFill>
                 <a:latin typeface="Segoe UI" pitchFamily="34" charset="0"/>
                 <a:ea typeface="Segoe UI" pitchFamily="34" charset="-122"/>
@@ -9605,7 +9605,7 @@
             <a:r>
               <a:rPr lang="en-US" sz="950" dirty="0">
                 <a:solidFill>
-                  <a:srgbClr val="FFF7ED"/>
+                  <a:srgbClr val="F1F5F9"/>
                 </a:solidFill>
                 <a:latin typeface="Segoe UI" pitchFamily="34" charset="0"/>
                 <a:ea typeface="Segoe UI" pitchFamily="34" charset="-122"/>
@@ -9631,7 +9631,7 @@
     <p:bg>
       <p:bgPr>
         <a:solidFill>
-          <a:srgbClr val="C2410C"/>
+          <a:srgbClr val="0B0F19"/>
         </a:solidFill>
       </p:bgPr>
     </p:bg>
@@ -9658,17 +9658,17 @@
         <p:spPr>
           <a:xfrm>
             <a:off x="0" y="0"/>
-            <a:ext cx="12191695" cy="91440"/>
+            <a:ext cx="12191695" cy="73152"/>
           </a:xfrm>
           <a:prstGeom prst="rect">
             <a:avLst/>
           </a:prstGeom>
           <a:solidFill>
-            <a:srgbClr val="FFFFFF"/>
+            <a:srgbClr val="FF6B00"/>
           </a:solidFill>
           <a:ln w="12700">
             <a:solidFill>
-              <a:srgbClr val="FFFFFF"/>
+              <a:srgbClr val="FF6B00"/>
             </a:solidFill>
             <a:prstDash val="solid"/>
           </a:ln>
@@ -9691,11 +9691,11 @@
             </a:avLst>
           </a:prstGeom>
           <a:solidFill>
-            <a:srgbClr val="451203"/>
+            <a:srgbClr val="2A1708"/>
           </a:solidFill>
           <a:ln w="15240">
             <a:solidFill>
-              <a:srgbClr val="FFFFFF"/>
+              <a:srgbClr val="FF6B00"/>
             </a:solidFill>
             <a:prstDash val="solid"/>
           </a:ln>
@@ -9728,7 +9728,7 @@
             <a:r>
               <a:rPr lang="en-US" sz="950" b="1" dirty="0">
                 <a:solidFill>
-                  <a:srgbClr val="FDE047"/>
+                  <a:srgbClr val="FFA726"/>
                 </a:solidFill>
               </a:rPr>
               <a:t>⚙  BACKEND CODE 04</a:t>
@@ -9793,7 +9793,7 @@
           <a:noFill/>
           <a:ln w="19050">
             <a:solidFill>
-              <a:srgbClr val="E06528"/>
+              <a:srgbClr val="1E293B"/>
             </a:solidFill>
             <a:prstDash val="solid"/>
           </a:ln>
@@ -9808,7 +9808,7 @@
         <p:spPr>
           <a:xfrm>
             <a:off x="731520" y="1234440"/>
-            <a:ext cx="2560320" cy="0"/>
+            <a:ext cx="2286000" cy="0"/>
           </a:xfrm>
           <a:prstGeom prst="line">
             <a:avLst/>
@@ -9816,7 +9816,7 @@
           <a:noFill/>
           <a:ln w="31750">
             <a:solidFill>
-              <a:srgbClr val="FFFFFF"/>
+              <a:srgbClr val="FF6B00"/>
             </a:solidFill>
             <a:prstDash val="solid"/>
           </a:ln>
@@ -9839,7 +9839,7 @@
           <a:noFill/>
           <a:ln w="12700">
             <a:solidFill>
-              <a:srgbClr val="E06528"/>
+              <a:srgbClr val="1E293B"/>
             </a:solidFill>
             <a:prstDash val="solid"/>
           </a:ln>
@@ -9872,7 +9872,7 @@
             <a:r>
               <a:rPr lang="en-US" sz="900" dirty="0">
                 <a:solidFill>
-                  <a:srgbClr val="FED7AA"/>
+                  <a:srgbClr val="94A3B8"/>
                 </a:solidFill>
                 <a:latin typeface="Segoe UI" pitchFamily="34" charset="0"/>
                 <a:ea typeface="Segoe UI" pitchFamily="34" charset="-122"/>
@@ -9911,7 +9911,7 @@
             <a:r>
               <a:rPr lang="en-US" sz="950" b="1" dirty="0">
                 <a:solidFill>
-                  <a:srgbClr val="FFFFFF"/>
+                  <a:srgbClr val="FF6B00"/>
                 </a:solidFill>
                 <a:latin typeface="Segoe UI" pitchFamily="34" charset="0"/>
                 <a:ea typeface="Segoe UI" pitchFamily="34" charset="-122"/>
@@ -9940,11 +9940,11 @@
             </a:avLst>
           </a:prstGeom>
           <a:solidFill>
-            <a:srgbClr val="140702"/>
+            <a:srgbClr val="07090E"/>
           </a:solidFill>
           <a:ln w="15240">
             <a:solidFill>
-              <a:srgbClr val="FFFFFF"/>
+              <a:srgbClr val="1E293B"/>
             </a:solidFill>
             <a:prstDash val="solid"/>
           </a:ln>
@@ -9977,7 +9977,7 @@
             <a:r>
               <a:rPr lang="en-US" sz="900" dirty="0">
                 <a:solidFill>
-                  <a:srgbClr val="FDE047"/>
+                  <a:srgbClr val="FFA726"/>
                 </a:solidFill>
                 <a:latin typeface="Consolas" pitchFamily="34" charset="0"/>
                 <a:ea typeface="Consolas" pitchFamily="34" charset="-122"/>
@@ -10016,7 +10016,7 @@
             <a:r>
               <a:rPr lang="en-US" sz="800" dirty="0">
                 <a:solidFill>
-                  <a:srgbClr val="FFFFFF"/>
+                  <a:srgbClr val="F1F5F9"/>
                 </a:solidFill>
                 <a:latin typeface="Consolas" pitchFamily="34" charset="0"/>
                 <a:ea typeface="Consolas" pitchFamily="34" charset="-122"/>
@@ -10033,7 +10033,7 @@
             <a:r>
               <a:rPr lang="en-US" sz="800" dirty="0">
                 <a:solidFill>
-                  <a:srgbClr val="FFFFFF"/>
+                  <a:srgbClr val="F1F5F9"/>
                 </a:solidFill>
                 <a:latin typeface="Consolas" pitchFamily="34" charset="0"/>
                 <a:ea typeface="Consolas" pitchFamily="34" charset="-122"/>
@@ -10050,7 +10050,7 @@
             <a:r>
               <a:rPr lang="en-US" sz="800" dirty="0">
                 <a:solidFill>
-                  <a:srgbClr val="FFFFFF"/>
+                  <a:srgbClr val="F1F5F9"/>
                 </a:solidFill>
                 <a:latin typeface="Consolas" pitchFamily="34" charset="0"/>
                 <a:ea typeface="Consolas" pitchFamily="34" charset="-122"/>
@@ -10067,7 +10067,7 @@
             <a:r>
               <a:rPr lang="en-US" sz="800" dirty="0">
                 <a:solidFill>
-                  <a:srgbClr val="FFFFFF"/>
+                  <a:srgbClr val="F1F5F9"/>
                 </a:solidFill>
                 <a:latin typeface="Consolas" pitchFamily="34" charset="0"/>
                 <a:ea typeface="Consolas" pitchFamily="34" charset="-122"/>
@@ -10084,7 +10084,7 @@
             <a:r>
               <a:rPr lang="en-US" sz="800" dirty="0">
                 <a:solidFill>
-                  <a:srgbClr val="FFFFFF"/>
+                  <a:srgbClr val="F1F5F9"/>
                 </a:solidFill>
                 <a:latin typeface="Consolas" pitchFamily="34" charset="0"/>
                 <a:ea typeface="Consolas" pitchFamily="34" charset="-122"/>
@@ -10101,7 +10101,7 @@
             <a:r>
               <a:rPr lang="en-US" sz="800" dirty="0">
                 <a:solidFill>
-                  <a:srgbClr val="FFFFFF"/>
+                  <a:srgbClr val="F1F5F9"/>
                 </a:solidFill>
                 <a:latin typeface="Consolas" pitchFamily="34" charset="0"/>
                 <a:ea typeface="Consolas" pitchFamily="34" charset="-122"/>
@@ -10118,7 +10118,7 @@
             <a:r>
               <a:rPr lang="en-US" sz="800" dirty="0">
                 <a:solidFill>
-                  <a:srgbClr val="FFFFFF"/>
+                  <a:srgbClr val="F1F5F9"/>
                 </a:solidFill>
                 <a:latin typeface="Consolas" pitchFamily="34" charset="0"/>
                 <a:ea typeface="Consolas" pitchFamily="34" charset="-122"/>
@@ -10135,7 +10135,7 @@
             <a:r>
               <a:rPr lang="en-US" sz="800" dirty="0">
                 <a:solidFill>
-                  <a:srgbClr val="FFFFFF"/>
+                  <a:srgbClr val="F1F5F9"/>
                 </a:solidFill>
                 <a:latin typeface="Consolas" pitchFamily="34" charset="0"/>
                 <a:ea typeface="Consolas" pitchFamily="34" charset="-122"/>
@@ -10152,7 +10152,7 @@
             <a:r>
               <a:rPr lang="en-US" sz="800" dirty="0">
                 <a:solidFill>
-                  <a:srgbClr val="FFFFFF"/>
+                  <a:srgbClr val="F1F5F9"/>
                 </a:solidFill>
                 <a:latin typeface="Consolas" pitchFamily="34" charset="0"/>
                 <a:ea typeface="Consolas" pitchFamily="34" charset="-122"/>
@@ -10169,7 +10169,7 @@
             <a:r>
               <a:rPr lang="en-US" sz="800" dirty="0">
                 <a:solidFill>
-                  <a:srgbClr val="FFFFFF"/>
+                  <a:srgbClr val="F1F5F9"/>
                 </a:solidFill>
                 <a:latin typeface="Consolas" pitchFamily="34" charset="0"/>
                 <a:ea typeface="Consolas" pitchFamily="34" charset="-122"/>
@@ -10186,7 +10186,7 @@
             <a:r>
               <a:rPr lang="en-US" sz="800" dirty="0">
                 <a:solidFill>
-                  <a:srgbClr val="FFFFFF"/>
+                  <a:srgbClr val="F1F5F9"/>
                 </a:solidFill>
                 <a:latin typeface="Consolas" pitchFamily="34" charset="0"/>
                 <a:ea typeface="Consolas" pitchFamily="34" charset="-122"/>
@@ -10203,7 +10203,7 @@
             <a:r>
               <a:rPr lang="en-US" sz="800" dirty="0">
                 <a:solidFill>
-                  <a:srgbClr val="FFFFFF"/>
+                  <a:srgbClr val="F1F5F9"/>
                 </a:solidFill>
                 <a:latin typeface="Consolas" pitchFamily="34" charset="0"/>
                 <a:ea typeface="Consolas" pitchFamily="34" charset="-122"/>
@@ -10220,7 +10220,7 @@
             <a:r>
               <a:rPr lang="en-US" sz="800" dirty="0">
                 <a:solidFill>
-                  <a:srgbClr val="FFFFFF"/>
+                  <a:srgbClr val="F1F5F9"/>
                 </a:solidFill>
                 <a:latin typeface="Consolas" pitchFamily="34" charset="0"/>
                 <a:ea typeface="Consolas" pitchFamily="34" charset="-122"/>
@@ -10237,7 +10237,7 @@
             <a:r>
               <a:rPr lang="en-US" sz="800" dirty="0">
                 <a:solidFill>
-                  <a:srgbClr val="FFFFFF"/>
+                  <a:srgbClr val="F1F5F9"/>
                 </a:solidFill>
                 <a:latin typeface="Consolas" pitchFamily="34" charset="0"/>
                 <a:ea typeface="Consolas" pitchFamily="34" charset="-122"/>
@@ -10254,7 +10254,7 @@
             <a:r>
               <a:rPr lang="en-US" sz="800" dirty="0">
                 <a:solidFill>
-                  <a:srgbClr val="FFFFFF"/>
+                  <a:srgbClr val="F1F5F9"/>
                 </a:solidFill>
                 <a:latin typeface="Consolas" pitchFamily="34" charset="0"/>
                 <a:ea typeface="Consolas" pitchFamily="34" charset="-122"/>
@@ -10271,7 +10271,7 @@
             <a:r>
               <a:rPr lang="en-US" sz="800" dirty="0">
                 <a:solidFill>
-                  <a:srgbClr val="FFFFFF"/>
+                  <a:srgbClr val="F1F5F9"/>
                 </a:solidFill>
                 <a:latin typeface="Consolas" pitchFamily="34" charset="0"/>
                 <a:ea typeface="Consolas" pitchFamily="34" charset="-122"/>
@@ -10288,7 +10288,7 @@
             <a:r>
               <a:rPr lang="en-US" sz="800" dirty="0">
                 <a:solidFill>
-                  <a:srgbClr val="FFFFFF"/>
+                  <a:srgbClr val="F1F5F9"/>
                 </a:solidFill>
                 <a:latin typeface="Consolas" pitchFamily="34" charset="0"/>
                 <a:ea typeface="Consolas" pitchFamily="34" charset="-122"/>
@@ -10305,7 +10305,7 @@
             <a:r>
               <a:rPr lang="en-US" sz="800" dirty="0">
                 <a:solidFill>
-                  <a:srgbClr val="FFFFFF"/>
+                  <a:srgbClr val="F1F5F9"/>
                 </a:solidFill>
                 <a:latin typeface="Consolas" pitchFamily="34" charset="0"/>
                 <a:ea typeface="Consolas" pitchFamily="34" charset="-122"/>
@@ -10322,7 +10322,7 @@
             <a:r>
               <a:rPr lang="en-US" sz="800" dirty="0">
                 <a:solidFill>
-                  <a:srgbClr val="FFFFFF"/>
+                  <a:srgbClr val="F1F5F9"/>
                 </a:solidFill>
                 <a:latin typeface="Consolas" pitchFamily="34" charset="0"/>
                 <a:ea typeface="Consolas" pitchFamily="34" charset="-122"/>
@@ -10339,7 +10339,7 @@
             <a:r>
               <a:rPr lang="en-US" sz="800" dirty="0">
                 <a:solidFill>
-                  <a:srgbClr val="FFFFFF"/>
+                  <a:srgbClr val="F1F5F9"/>
                 </a:solidFill>
                 <a:latin typeface="Consolas" pitchFamily="34" charset="0"/>
                 <a:ea typeface="Consolas" pitchFamily="34" charset="-122"/>
@@ -10356,7 +10356,7 @@
             <a:r>
               <a:rPr lang="en-US" sz="800" dirty="0">
                 <a:solidFill>
-                  <a:srgbClr val="FFFFFF"/>
+                  <a:srgbClr val="F1F5F9"/>
                 </a:solidFill>
                 <a:latin typeface="Consolas" pitchFamily="34" charset="0"/>
                 <a:ea typeface="Consolas" pitchFamily="34" charset="-122"/>
@@ -10373,7 +10373,7 @@
             <a:r>
               <a:rPr lang="en-US" sz="800" dirty="0">
                 <a:solidFill>
-                  <a:srgbClr val="FFFFFF"/>
+                  <a:srgbClr val="F1F5F9"/>
                 </a:solidFill>
                 <a:latin typeface="Consolas" pitchFamily="34" charset="0"/>
                 <a:ea typeface="Consolas" pitchFamily="34" charset="-122"/>
@@ -10390,7 +10390,7 @@
             <a:r>
               <a:rPr lang="en-US" sz="800" dirty="0">
                 <a:solidFill>
-                  <a:srgbClr val="FFFFFF"/>
+                  <a:srgbClr val="F1F5F9"/>
                 </a:solidFill>
                 <a:latin typeface="Consolas" pitchFamily="34" charset="0"/>
                 <a:ea typeface="Consolas" pitchFamily="34" charset="-122"/>
@@ -10407,7 +10407,7 @@
             <a:r>
               <a:rPr lang="en-US" sz="800" dirty="0">
                 <a:solidFill>
-                  <a:srgbClr val="FFFFFF"/>
+                  <a:srgbClr val="F1F5F9"/>
                 </a:solidFill>
                 <a:latin typeface="Consolas" pitchFamily="34" charset="0"/>
                 <a:ea typeface="Consolas" pitchFamily="34" charset="-122"/>
@@ -10436,11 +10436,11 @@
             </a:avLst>
           </a:prstGeom>
           <a:solidFill>
-            <a:srgbClr val="6B2006"/>
+            <a:srgbClr val="121826"/>
           </a:solidFill>
           <a:ln w="15240">
             <a:solidFill>
-              <a:srgbClr val="E06528"/>
+              <a:srgbClr val="1E293B"/>
             </a:solidFill>
             <a:prstDash val="solid"/>
           </a:ln>
@@ -10473,7 +10473,7 @@
             <a:r>
               <a:rPr lang="en-US" sz="1150" b="1" dirty="0">
                 <a:solidFill>
-                  <a:srgbClr val="FDE047"/>
+                  <a:srgbClr val="FF8C38"/>
                 </a:solidFill>
               </a:rPr>
               <a:t>AI Engine Architecture</a:t>
@@ -10509,7 +10509,7 @@
             <a:r>
               <a:rPr lang="en-US" sz="950" dirty="0">
                 <a:solidFill>
-                  <a:srgbClr val="FFF7ED"/>
+                  <a:srgbClr val="F1F5F9"/>
                 </a:solidFill>
                 <a:latin typeface="Segoe UI" pitchFamily="34" charset="0"/>
                 <a:ea typeface="Segoe UI" pitchFamily="34" charset="-122"/>
@@ -10548,7 +10548,7 @@
             <a:r>
               <a:rPr lang="en-US" sz="950" dirty="0">
                 <a:solidFill>
-                  <a:srgbClr val="FFF7ED"/>
+                  <a:srgbClr val="F1F5F9"/>
                 </a:solidFill>
                 <a:latin typeface="Segoe UI" pitchFamily="34" charset="0"/>
                 <a:ea typeface="Segoe UI" pitchFamily="34" charset="-122"/>
@@ -10587,7 +10587,7 @@
             <a:r>
               <a:rPr lang="en-US" sz="950" dirty="0">
                 <a:solidFill>
-                  <a:srgbClr val="FFF7ED"/>
+                  <a:srgbClr val="F1F5F9"/>
                 </a:solidFill>
                 <a:latin typeface="Segoe UI" pitchFamily="34" charset="0"/>
                 <a:ea typeface="Segoe UI" pitchFamily="34" charset="-122"/>
@@ -10613,7 +10613,7 @@
     <p:bg>
       <p:bgPr>
         <a:solidFill>
-          <a:srgbClr val="C2410C"/>
+          <a:srgbClr val="0B0F19"/>
         </a:solidFill>
       </p:bgPr>
     </p:bg>
@@ -10640,17 +10640,17 @@
         <p:spPr>
           <a:xfrm>
             <a:off x="0" y="0"/>
-            <a:ext cx="12191695" cy="91440"/>
+            <a:ext cx="12191695" cy="73152"/>
           </a:xfrm>
           <a:prstGeom prst="rect">
             <a:avLst/>
           </a:prstGeom>
           <a:solidFill>
-            <a:srgbClr val="FFFFFF"/>
+            <a:srgbClr val="FF6B00"/>
           </a:solidFill>
           <a:ln w="12700">
             <a:solidFill>
-              <a:srgbClr val="FFFFFF"/>
+              <a:srgbClr val="FF6B00"/>
             </a:solidFill>
             <a:prstDash val="solid"/>
           </a:ln>
@@ -10673,11 +10673,11 @@
             </a:avLst>
           </a:prstGeom>
           <a:solidFill>
-            <a:srgbClr val="451203"/>
+            <a:srgbClr val="2A1708"/>
           </a:solidFill>
           <a:ln w="15240">
             <a:solidFill>
-              <a:srgbClr val="FFFFFF"/>
+              <a:srgbClr val="FF6B00"/>
             </a:solidFill>
             <a:prstDash val="solid"/>
           </a:ln>
@@ -10710,7 +10710,7 @@
             <a:r>
               <a:rPr lang="en-US" sz="950" b="1" dirty="0">
                 <a:solidFill>
-                  <a:srgbClr val="FDE047"/>
+                  <a:srgbClr val="FFA726"/>
                 </a:solidFill>
               </a:rPr>
               <a:t>⚙  OUTPUT SCREENSHOT 01</a:t>
@@ -10775,7 +10775,7 @@
           <a:noFill/>
           <a:ln w="19050">
             <a:solidFill>
-              <a:srgbClr val="E06528"/>
+              <a:srgbClr val="1E293B"/>
             </a:solidFill>
             <a:prstDash val="solid"/>
           </a:ln>
@@ -10790,7 +10790,7 @@
         <p:spPr>
           <a:xfrm>
             <a:off x="731520" y="1234440"/>
-            <a:ext cx="2560320" cy="0"/>
+            <a:ext cx="2286000" cy="0"/>
           </a:xfrm>
           <a:prstGeom prst="line">
             <a:avLst/>
@@ -10798,7 +10798,7 @@
           <a:noFill/>
           <a:ln w="31750">
             <a:solidFill>
-              <a:srgbClr val="FFFFFF"/>
+              <a:srgbClr val="FF6B00"/>
             </a:solidFill>
             <a:prstDash val="solid"/>
           </a:ln>
@@ -10821,7 +10821,7 @@
           <a:noFill/>
           <a:ln w="12700">
             <a:solidFill>
-              <a:srgbClr val="E06528"/>
+              <a:srgbClr val="1E293B"/>
             </a:solidFill>
             <a:prstDash val="solid"/>
           </a:ln>
@@ -10854,7 +10854,7 @@
             <a:r>
               <a:rPr lang="en-US" sz="900" dirty="0">
                 <a:solidFill>
-                  <a:srgbClr val="FED7AA"/>
+                  <a:srgbClr val="94A3B8"/>
                 </a:solidFill>
                 <a:latin typeface="Segoe UI" pitchFamily="34" charset="0"/>
                 <a:ea typeface="Segoe UI" pitchFamily="34" charset="-122"/>
@@ -10893,7 +10893,7 @@
             <a:r>
               <a:rPr lang="en-US" sz="950" b="1" dirty="0">
                 <a:solidFill>
-                  <a:srgbClr val="FFFFFF"/>
+                  <a:srgbClr val="FF6B00"/>
                 </a:solidFill>
                 <a:latin typeface="Segoe UI" pitchFamily="34" charset="0"/>
                 <a:ea typeface="Segoe UI" pitchFamily="34" charset="-122"/>
@@ -10922,11 +10922,11 @@
             </a:avLst>
           </a:prstGeom>
           <a:solidFill>
-            <a:srgbClr val="2B0901"/>
+            <a:srgbClr val="06090F"/>
           </a:solidFill>
-          <a:ln w="19050">
+          <a:ln w="15240">
             <a:solidFill>
-              <a:srgbClr val="FFFFFF"/>
+              <a:srgbClr val="E06528"/>
             </a:solidFill>
             <a:prstDash val="solid"/>
           </a:ln>
@@ -10973,11 +10973,11 @@
             </a:avLst>
           </a:prstGeom>
           <a:solidFill>
-            <a:srgbClr val="872808"/>
+            <a:srgbClr val="121826"/>
           </a:solidFill>
           <a:ln w="15240">
             <a:solidFill>
-              <a:srgbClr val="FFFFFF"/>
+              <a:srgbClr val="1E293B"/>
             </a:solidFill>
             <a:prstDash val="solid"/>
           </a:ln>
@@ -11010,7 +11010,7 @@
             <a:r>
               <a:rPr lang="en-US" sz="1150" b="1" dirty="0">
                 <a:solidFill>
-                  <a:srgbClr val="FDE047"/>
+                  <a:srgbClr val="FF8C38"/>
                 </a:solidFill>
               </a:rPr>
               <a:t>Control Room Operations &amp; Alarm Handling</a:t>
@@ -11046,7 +11046,7 @@
             <a:r>
               <a:rPr lang="en-US" sz="950" dirty="0">
                 <a:solidFill>
-                  <a:srgbClr val="FFF7ED"/>
+                  <a:srgbClr val="F1F5F9"/>
                 </a:solidFill>
                 <a:latin typeface="Segoe UI" pitchFamily="34" charset="0"/>
                 <a:ea typeface="Segoe UI" pitchFamily="34" charset="-122"/>
@@ -11085,7 +11085,7 @@
             <a:r>
               <a:rPr lang="en-US" sz="950" dirty="0">
                 <a:solidFill>
-                  <a:srgbClr val="FFF7ED"/>
+                  <a:srgbClr val="F1F5F9"/>
                 </a:solidFill>
                 <a:latin typeface="Segoe UI" pitchFamily="34" charset="0"/>
                 <a:ea typeface="Segoe UI" pitchFamily="34" charset="-122"/>
@@ -11124,7 +11124,7 @@
             <a:r>
               <a:rPr lang="en-US" sz="950" dirty="0">
                 <a:solidFill>
-                  <a:srgbClr val="FFF7ED"/>
+                  <a:srgbClr val="F1F5F9"/>
                 </a:solidFill>
                 <a:latin typeface="Segoe UI" pitchFamily="34" charset="0"/>
                 <a:ea typeface="Segoe UI" pitchFamily="34" charset="-122"/>
@@ -11150,7 +11150,7 @@
     <p:bg>
       <p:bgPr>
         <a:solidFill>
-          <a:srgbClr val="C2410C"/>
+          <a:srgbClr val="0B0F19"/>
         </a:solidFill>
       </p:bgPr>
     </p:bg>
@@ -11177,17 +11177,17 @@
         <p:spPr>
           <a:xfrm>
             <a:off x="0" y="0"/>
-            <a:ext cx="12191695" cy="91440"/>
+            <a:ext cx="12191695" cy="73152"/>
           </a:xfrm>
           <a:prstGeom prst="rect">
             <a:avLst/>
           </a:prstGeom>
           <a:solidFill>
-            <a:srgbClr val="FFFFFF"/>
+            <a:srgbClr val="FF6B00"/>
           </a:solidFill>
           <a:ln w="12700">
             <a:solidFill>
-              <a:srgbClr val="FFFFFF"/>
+              <a:srgbClr val="FF6B00"/>
             </a:solidFill>
             <a:prstDash val="solid"/>
           </a:ln>
@@ -11210,11 +11210,11 @@
             </a:avLst>
           </a:prstGeom>
           <a:solidFill>
-            <a:srgbClr val="451203"/>
+            <a:srgbClr val="2A1708"/>
           </a:solidFill>
           <a:ln w="15240">
             <a:solidFill>
-              <a:srgbClr val="FFFFFF"/>
+              <a:srgbClr val="FF6B00"/>
             </a:solidFill>
             <a:prstDash val="solid"/>
           </a:ln>
@@ -11247,7 +11247,7 @@
             <a:r>
               <a:rPr lang="en-US" sz="950" b="1" dirty="0">
                 <a:solidFill>
-                  <a:srgbClr val="FDE047"/>
+                  <a:srgbClr val="FFA726"/>
                 </a:solidFill>
               </a:rPr>
               <a:t>⚙  EXECUTIVE SUMMARY</a:t>
@@ -11312,7 +11312,7 @@
           <a:noFill/>
           <a:ln w="19050">
             <a:solidFill>
-              <a:srgbClr val="E06528"/>
+              <a:srgbClr val="1E293B"/>
             </a:solidFill>
             <a:prstDash val="solid"/>
           </a:ln>
@@ -11327,7 +11327,7 @@
         <p:spPr>
           <a:xfrm>
             <a:off x="731520" y="1234440"/>
-            <a:ext cx="2560320" cy="0"/>
+            <a:ext cx="2286000" cy="0"/>
           </a:xfrm>
           <a:prstGeom prst="line">
             <a:avLst/>
@@ -11335,7 +11335,7 @@
           <a:noFill/>
           <a:ln w="31750">
             <a:solidFill>
-              <a:srgbClr val="FFFFFF"/>
+              <a:srgbClr val="FF6B00"/>
             </a:solidFill>
             <a:prstDash val="solid"/>
           </a:ln>
@@ -11358,7 +11358,7 @@
           <a:noFill/>
           <a:ln w="12700">
             <a:solidFill>
-              <a:srgbClr val="E06528"/>
+              <a:srgbClr val="1E293B"/>
             </a:solidFill>
             <a:prstDash val="solid"/>
           </a:ln>
@@ -11391,7 +11391,7 @@
             <a:r>
               <a:rPr lang="en-US" sz="900" dirty="0">
                 <a:solidFill>
-                  <a:srgbClr val="FED7AA"/>
+                  <a:srgbClr val="94A3B8"/>
                 </a:solidFill>
                 <a:latin typeface="Segoe UI" pitchFamily="34" charset="0"/>
                 <a:ea typeface="Segoe UI" pitchFamily="34" charset="-122"/>
@@ -11430,7 +11430,7 @@
             <a:r>
               <a:rPr lang="en-US" sz="950" b="1" dirty="0">
                 <a:solidFill>
-                  <a:srgbClr val="FFFFFF"/>
+                  <a:srgbClr val="FF6B00"/>
                 </a:solidFill>
                 <a:latin typeface="Segoe UI" pitchFamily="34" charset="0"/>
                 <a:ea typeface="Segoe UI" pitchFamily="34" charset="-122"/>
@@ -11459,7 +11459,226 @@
             </a:avLst>
           </a:prstGeom>
           <a:solidFill>
-            <a:srgbClr val="6B2006"/>
+            <a:srgbClr val="121826"/>
+          </a:solidFill>
+          <a:ln w="15240">
+            <a:solidFill>
+              <a:srgbClr val="1E293B"/>
+            </a:solidFill>
+            <a:prstDash val="solid"/>
+          </a:ln>
+        </p:spPr>
+      </p:sp>
+      <p:sp>
+        <p:nvSpPr>
+          <p:cNvPr id="12" name="Text 10"/>
+          <p:cNvSpPr/>
+          <p:nvPr/>
+        </p:nvSpPr>
+        <p:spPr>
+          <a:xfrm>
+            <a:off x="1005840" y="1645920"/>
+            <a:ext cx="4663440" cy="320040"/>
+          </a:xfrm>
+          <a:prstGeom prst="rect">
+            <a:avLst/>
+          </a:prstGeom>
+          <a:noFill/>
+          <a:ln/>
+        </p:spPr>
+        <p:txBody>
+          <a:bodyPr wrap="square" rtlCol="0" anchor="ctr"/>
+          <a:lstStyle/>
+          <a:p>
+            <a:pPr indent="0" marL="0">
+              <a:buNone/>
+            </a:pPr>
+            <a:r>
+              <a:rPr lang="en-US" sz="1200" b="1" dirty="0">
+                <a:solidFill>
+                  <a:srgbClr val="FF8C38"/>
+                </a:solidFill>
+              </a:rPr>
+              <a:t>Executive Problem Statement &amp; Engineering Purpose</a:t>
+            </a:r>
+            <a:endParaRPr lang="en-US" sz="1200" dirty="0"/>
+          </a:p>
+        </p:txBody>
+      </p:sp>
+      <p:sp>
+        <p:nvSpPr>
+          <p:cNvPr id="13" name="Text 11"/>
+          <p:cNvSpPr/>
+          <p:nvPr/>
+        </p:nvSpPr>
+        <p:spPr>
+          <a:xfrm>
+            <a:off x="1005840" y="2057400"/>
+            <a:ext cx="4663440" cy="822960"/>
+          </a:xfrm>
+          <a:prstGeom prst="rect">
+            <a:avLst/>
+          </a:prstGeom>
+          <a:noFill/>
+          <a:ln/>
+        </p:spPr>
+        <p:txBody>
+          <a:bodyPr wrap="square" rtlCol="0" anchor="ctr"/>
+          <a:lstStyle/>
+          <a:p>
+            <a:pPr indent="0" marL="0">
+              <a:buNone/>
+            </a:pPr>
+            <a:r>
+              <a:rPr lang="en-US" sz="1000" dirty="0">
+                <a:solidFill>
+                  <a:srgbClr val="F1F5F9"/>
+                </a:solidFill>
+                <a:latin typeface="Segoe UI" pitchFamily="34" charset="0"/>
+                <a:ea typeface="Segoe UI" pitchFamily="34" charset="-122"/>
+                <a:cs typeface="Segoe UI" pitchFamily="34" charset="-120"/>
+              </a:rPr>
+              <a:t>• Heavy Crude Challenge (17.5° API): Cold reservoir oil exhibits near-solid tar viscosity (&gt;3,500 cP at 28°C), causing severe rod string drag, pump floating, and premature motor burnout.</a:t>
+            </a:r>
+            <a:endParaRPr lang="en-US" sz="1000" dirty="0"/>
+          </a:p>
+        </p:txBody>
+      </p:sp>
+      <p:sp>
+        <p:nvSpPr>
+          <p:cNvPr id="14" name="Text 12"/>
+          <p:cNvSpPr/>
+          <p:nvPr/>
+        </p:nvSpPr>
+        <p:spPr>
+          <a:xfrm>
+            <a:off x="1005840" y="2926080"/>
+            <a:ext cx="4663440" cy="822960"/>
+          </a:xfrm>
+          <a:prstGeom prst="rect">
+            <a:avLst/>
+          </a:prstGeom>
+          <a:noFill/>
+          <a:ln/>
+        </p:spPr>
+        <p:txBody>
+          <a:bodyPr wrap="square" rtlCol="0" anchor="ctr"/>
+          <a:lstStyle/>
+          <a:p>
+            <a:pPr indent="0" marL="0">
+              <a:buNone/>
+            </a:pPr>
+            <a:r>
+              <a:rPr lang="en-US" sz="1000" dirty="0">
+                <a:solidFill>
+                  <a:srgbClr val="F1F5F9"/>
+                </a:solidFill>
+                <a:latin typeface="Segoe UI" pitchFamily="34" charset="0"/>
+                <a:ea typeface="Segoe UI" pitchFamily="34" charset="-122"/>
+                <a:cs typeface="Segoe UI" pitchFamily="34" charset="-120"/>
+              </a:rPr>
+              <a:t>• Thermal Recovery Mechanism: Cyclic Steam Stimulation (CSS) provides high-enthalpy thermal energy (260°C to 310°C) to dramatically drop oil viscosity to ~12.8 cP via Andrade's logarithmic thermal model.</a:t>
+            </a:r>
+            <a:endParaRPr lang="en-US" sz="1000" dirty="0"/>
+          </a:p>
+        </p:txBody>
+      </p:sp>
+      <p:sp>
+        <p:nvSpPr>
+          <p:cNvPr id="15" name="Text 13"/>
+          <p:cNvSpPr/>
+          <p:nvPr/>
+        </p:nvSpPr>
+        <p:spPr>
+          <a:xfrm>
+            <a:off x="1005840" y="3794760"/>
+            <a:ext cx="4663440" cy="822960"/>
+          </a:xfrm>
+          <a:prstGeom prst="rect">
+            <a:avLst/>
+          </a:prstGeom>
+          <a:noFill/>
+          <a:ln/>
+        </p:spPr>
+        <p:txBody>
+          <a:bodyPr wrap="square" rtlCol="0" anchor="ctr"/>
+          <a:lstStyle/>
+          <a:p>
+            <a:pPr indent="0" marL="0">
+              <a:buNone/>
+            </a:pPr>
+            <a:r>
+              <a:rPr lang="en-US" sz="1000" dirty="0">
+                <a:solidFill>
+                  <a:srgbClr val="F1F5F9"/>
+                </a:solidFill>
+                <a:latin typeface="Segoe UI" pitchFamily="34" charset="0"/>
+                <a:ea typeface="Segoe UI" pitchFamily="34" charset="-122"/>
+                <a:cs typeface="Segoe UI" pitchFamily="34" charset="-120"/>
+              </a:rPr>
+              <a:t>• Digital Twin Innovation: Conventional SCADA systems act only as passive telemetry recorders. WELLORA transforms traditional SCADA into an active predictive digital twin by fusing thermal reservoir ODEs with Sucker Rod Pump (SRP) stress mechanics.</a:t>
+            </a:r>
+            <a:endParaRPr lang="en-US" sz="1000" dirty="0"/>
+          </a:p>
+        </p:txBody>
+      </p:sp>
+      <p:sp>
+        <p:nvSpPr>
+          <p:cNvPr id="16" name="Text 14"/>
+          <p:cNvSpPr/>
+          <p:nvPr/>
+        </p:nvSpPr>
+        <p:spPr>
+          <a:xfrm>
+            <a:off x="1005840" y="4663440"/>
+            <a:ext cx="4663440" cy="822960"/>
+          </a:xfrm>
+          <a:prstGeom prst="rect">
+            <a:avLst/>
+          </a:prstGeom>
+          <a:noFill/>
+          <a:ln/>
+        </p:spPr>
+        <p:txBody>
+          <a:bodyPr wrap="square" rtlCol="0" anchor="ctr"/>
+          <a:lstStyle/>
+          <a:p>
+            <a:pPr indent="0" marL="0">
+              <a:buNone/>
+            </a:pPr>
+            <a:r>
+              <a:rPr lang="en-US" sz="1000" dirty="0">
+                <a:solidFill>
+                  <a:srgbClr val="F1F5F9"/>
+                </a:solidFill>
+                <a:latin typeface="Segoe UI" pitchFamily="34" charset="0"/>
+                <a:ea typeface="Segoe UI" pitchFamily="34" charset="-122"/>
+                <a:cs typeface="Segoe UI" pitchFamily="34" charset="-120"/>
+              </a:rPr>
+              <a:t>• Integrated AI Copilot: Operators can interrogate the system in natural language, perform dynamic what-if calculations, and dispatch optimal setpoints directly to the digital twin.</a:t>
+            </a:r>
+            <a:endParaRPr lang="en-US" sz="1000" dirty="0"/>
+          </a:p>
+        </p:txBody>
+      </p:sp>
+      <p:sp>
+        <p:nvSpPr>
+          <p:cNvPr id="17" name="Shape 15"/>
+          <p:cNvSpPr/>
+          <p:nvPr/>
+        </p:nvSpPr>
+        <p:spPr>
+          <a:xfrm>
+            <a:off x="6217920" y="1463040"/>
+            <a:ext cx="5212080" cy="4754880"/>
+          </a:xfrm>
+          <a:prstGeom prst="roundRect">
+            <a:avLst>
+              <a:gd name="adj" fmla="val 1923"/>
+            </a:avLst>
+          </a:prstGeom>
+          <a:solidFill>
+            <a:srgbClr val="172033"/>
           </a:solidFill>
           <a:ln w="15240">
             <a:solidFill>
@@ -11471,13 +11690,13 @@
       </p:sp>
       <p:sp>
         <p:nvSpPr>
-          <p:cNvPr id="12" name="Text 10"/>
-          <p:cNvSpPr/>
-          <p:nvPr/>
-        </p:nvSpPr>
-        <p:spPr>
-          <a:xfrm>
-            <a:off x="1005840" y="1645920"/>
+          <p:cNvPr id="18" name="Text 16"/>
+          <p:cNvSpPr/>
+          <p:nvPr/>
+        </p:nvSpPr>
+        <p:spPr>
+          <a:xfrm>
+            <a:off x="6492240" y="1645920"/>
             <a:ext cx="4663440" cy="320040"/>
           </a:xfrm>
           <a:prstGeom prst="rect">
@@ -11496,10 +11715,10 @@
             <a:r>
               <a:rPr lang="en-US" sz="1200" b="1" dirty="0">
                 <a:solidFill>
-                  <a:srgbClr val="FDE047"/>
-                </a:solidFill>
-              </a:rPr>
-              <a:t>Executive Problem Statement &amp; Engineering Purpose</a:t>
+                  <a:srgbClr val="FFFFFF"/>
+                </a:solidFill>
+              </a:rPr>
+              <a:t>Validated Quantitative Deliverables &amp; Operational Impact</a:t>
             </a:r>
             <a:endParaRPr lang="en-US" sz="1200" dirty="0"/>
           </a:p>
@@ -11507,13 +11726,13 @@
       </p:sp>
       <p:sp>
         <p:nvSpPr>
-          <p:cNvPr id="13" name="Text 11"/>
-          <p:cNvSpPr/>
-          <p:nvPr/>
-        </p:nvSpPr>
-        <p:spPr>
-          <a:xfrm>
-            <a:off x="1005840" y="2057400"/>
+          <p:cNvPr id="19" name="Text 17"/>
+          <p:cNvSpPr/>
+          <p:nvPr/>
+        </p:nvSpPr>
+        <p:spPr>
+          <a:xfrm>
+            <a:off x="6492240" y="2057400"/>
             <a:ext cx="4663440" cy="822960"/>
           </a:xfrm>
           <a:prstGeom prst="rect">
@@ -11532,13 +11751,13 @@
             <a:r>
               <a:rPr lang="en-US" sz="1000" dirty="0">
                 <a:solidFill>
-                  <a:srgbClr val="FFF7ED"/>
+                  <a:srgbClr val="F1F5F9"/>
                 </a:solidFill>
                 <a:latin typeface="Segoe UI" pitchFamily="34" charset="0"/>
                 <a:ea typeface="Segoe UI" pitchFamily="34" charset="-122"/>
                 <a:cs typeface="Segoe UI" pitchFamily="34" charset="-120"/>
               </a:rPr>
-              <a:t>• Heavy Crude Challenge (17.5° API): Cold reservoir oil exhibits near-solid tar viscosity (&gt;3,500 cP at 28°C), causing severe rod string drag, pump floating, and premature motor burnout.</a:t>
+              <a:t>• +28.4% Steam Thermal Utilization Efficiency: Predictive soak-time scheduling avoids wasted steam boiler fuel and optimizes thermal energy transfer into the formation.</a:t>
             </a:r>
             <a:endParaRPr lang="en-US" sz="1000" dirty="0"/>
           </a:p>
@@ -11546,13 +11765,13 @@
       </p:sp>
       <p:sp>
         <p:nvSpPr>
-          <p:cNvPr id="14" name="Text 12"/>
-          <p:cNvSpPr/>
-          <p:nvPr/>
-        </p:nvSpPr>
-        <p:spPr>
-          <a:xfrm>
-            <a:off x="1005840" y="2926080"/>
+          <p:cNvPr id="20" name="Text 18"/>
+          <p:cNvSpPr/>
+          <p:nvPr/>
+        </p:nvSpPr>
+        <p:spPr>
+          <a:xfrm>
+            <a:off x="6492240" y="2926080"/>
             <a:ext cx="4663440" cy="822960"/>
           </a:xfrm>
           <a:prstGeom prst="rect">
@@ -11571,13 +11790,13 @@
             <a:r>
               <a:rPr lang="en-US" sz="1000" dirty="0">
                 <a:solidFill>
-                  <a:srgbClr val="FFF7ED"/>
+                  <a:srgbClr val="F1F5F9"/>
                 </a:solidFill>
                 <a:latin typeface="Segoe UI" pitchFamily="34" charset="0"/>
                 <a:ea typeface="Segoe UI" pitchFamily="34" charset="-122"/>
                 <a:cs typeface="Segoe UI" pitchFamily="34" charset="-120"/>
               </a:rPr>
-              <a:t>• Thermal Recovery Mechanism: Cyclic Steam Stimulation (CSS) provides high-enthalpy thermal energy (260°C to 310°C) to dramatically drop oil viscosity to ~12.8 cP via Andrade's logarithmic thermal model.</a:t>
+              <a:t>• -34.8% Reduction in Rod String Fatigue: Automated SPM speed regulation prevents dynamic fluid pound shocks and prolongs rod string lifespan.</a:t>
             </a:r>
             <a:endParaRPr lang="en-US" sz="1000" dirty="0"/>
           </a:p>
@@ -11585,13 +11804,13 @@
       </p:sp>
       <p:sp>
         <p:nvSpPr>
-          <p:cNvPr id="15" name="Text 13"/>
-          <p:cNvSpPr/>
-          <p:nvPr/>
-        </p:nvSpPr>
-        <p:spPr>
-          <a:xfrm>
-            <a:off x="1005840" y="3794760"/>
+          <p:cNvPr id="21" name="Text 19"/>
+          <p:cNvSpPr/>
+          <p:nvPr/>
+        </p:nvSpPr>
+        <p:spPr>
+          <a:xfrm>
+            <a:off x="6492240" y="3794760"/>
             <a:ext cx="4663440" cy="822960"/>
           </a:xfrm>
           <a:prstGeom prst="rect">
@@ -11610,231 +11829,12 @@
             <a:r>
               <a:rPr lang="en-US" sz="1000" dirty="0">
                 <a:solidFill>
-                  <a:srgbClr val="FFF7ED"/>
+                  <a:srgbClr val="F1F5F9"/>
                 </a:solidFill>
                 <a:latin typeface="Segoe UI" pitchFamily="34" charset="0"/>
                 <a:ea typeface="Segoe UI" pitchFamily="34" charset="-122"/>
                 <a:cs typeface="Segoe UI" pitchFamily="34" charset="-120"/>
               </a:rPr>
-              <a:t>• Digital Twin Innovation: Conventional SCADA systems act only as passive telemetry recorders. WELLORA transforms traditional SCADA into an active predictive digital twin by fusing thermal reservoir ODEs with Sucker Rod Pump (SRP) stress mechanics.</a:t>
-            </a:r>
-            <a:endParaRPr lang="en-US" sz="1000" dirty="0"/>
-          </a:p>
-        </p:txBody>
-      </p:sp>
-      <p:sp>
-        <p:nvSpPr>
-          <p:cNvPr id="16" name="Text 14"/>
-          <p:cNvSpPr/>
-          <p:nvPr/>
-        </p:nvSpPr>
-        <p:spPr>
-          <a:xfrm>
-            <a:off x="1005840" y="4663440"/>
-            <a:ext cx="4663440" cy="822960"/>
-          </a:xfrm>
-          <a:prstGeom prst="rect">
-            <a:avLst/>
-          </a:prstGeom>
-          <a:noFill/>
-          <a:ln/>
-        </p:spPr>
-        <p:txBody>
-          <a:bodyPr wrap="square" rtlCol="0" anchor="ctr"/>
-          <a:lstStyle/>
-          <a:p>
-            <a:pPr indent="0" marL="0">
-              <a:buNone/>
-            </a:pPr>
-            <a:r>
-              <a:rPr lang="en-US" sz="1000" dirty="0">
-                <a:solidFill>
-                  <a:srgbClr val="FFF7ED"/>
-                </a:solidFill>
-                <a:latin typeface="Segoe UI" pitchFamily="34" charset="0"/>
-                <a:ea typeface="Segoe UI" pitchFamily="34" charset="-122"/>
-                <a:cs typeface="Segoe UI" pitchFamily="34" charset="-120"/>
-              </a:rPr>
-              <a:t>• Integrated AI Copilot: Operators can interrogate the system in natural language, perform dynamic what-if calculations, and dispatch optimal setpoints directly to the digital twin.</a:t>
-            </a:r>
-            <a:endParaRPr lang="en-US" sz="1000" dirty="0"/>
-          </a:p>
-        </p:txBody>
-      </p:sp>
-      <p:sp>
-        <p:nvSpPr>
-          <p:cNvPr id="17" name="Shape 15"/>
-          <p:cNvSpPr/>
-          <p:nvPr/>
-        </p:nvSpPr>
-        <p:spPr>
-          <a:xfrm>
-            <a:off x="6217920" y="1463040"/>
-            <a:ext cx="5212080" cy="4754880"/>
-          </a:xfrm>
-          <a:prstGeom prst="roundRect">
-            <a:avLst>
-              <a:gd name="adj" fmla="val 1923"/>
-            </a:avLst>
-          </a:prstGeom>
-          <a:solidFill>
-            <a:srgbClr val="872808"/>
-          </a:solidFill>
-          <a:ln w="15240">
-            <a:solidFill>
-              <a:srgbClr val="FFFFFF"/>
-            </a:solidFill>
-            <a:prstDash val="solid"/>
-          </a:ln>
-        </p:spPr>
-      </p:sp>
-      <p:sp>
-        <p:nvSpPr>
-          <p:cNvPr id="18" name="Text 16"/>
-          <p:cNvSpPr/>
-          <p:nvPr/>
-        </p:nvSpPr>
-        <p:spPr>
-          <a:xfrm>
-            <a:off x="6492240" y="1645920"/>
-            <a:ext cx="4663440" cy="320040"/>
-          </a:xfrm>
-          <a:prstGeom prst="rect">
-            <a:avLst/>
-          </a:prstGeom>
-          <a:noFill/>
-          <a:ln/>
-        </p:spPr>
-        <p:txBody>
-          <a:bodyPr wrap="square" rtlCol="0" anchor="ctr"/>
-          <a:lstStyle/>
-          <a:p>
-            <a:pPr indent="0" marL="0">
-              <a:buNone/>
-            </a:pPr>
-            <a:r>
-              <a:rPr lang="en-US" sz="1200" b="1" dirty="0">
-                <a:solidFill>
-                  <a:srgbClr val="FFFFFF"/>
-                </a:solidFill>
-              </a:rPr>
-              <a:t>Validated Quantitative Deliverables &amp; Operational Impact</a:t>
-            </a:r>
-            <a:endParaRPr lang="en-US" sz="1200" dirty="0"/>
-          </a:p>
-        </p:txBody>
-      </p:sp>
-      <p:sp>
-        <p:nvSpPr>
-          <p:cNvPr id="19" name="Text 17"/>
-          <p:cNvSpPr/>
-          <p:nvPr/>
-        </p:nvSpPr>
-        <p:spPr>
-          <a:xfrm>
-            <a:off x="6492240" y="2057400"/>
-            <a:ext cx="4663440" cy="822960"/>
-          </a:xfrm>
-          <a:prstGeom prst="rect">
-            <a:avLst/>
-          </a:prstGeom>
-          <a:noFill/>
-          <a:ln/>
-        </p:spPr>
-        <p:txBody>
-          <a:bodyPr wrap="square" rtlCol="0" anchor="ctr"/>
-          <a:lstStyle/>
-          <a:p>
-            <a:pPr indent="0" marL="0">
-              <a:buNone/>
-            </a:pPr>
-            <a:r>
-              <a:rPr lang="en-US" sz="1000" dirty="0">
-                <a:solidFill>
-                  <a:srgbClr val="FFF7ED"/>
-                </a:solidFill>
-                <a:latin typeface="Segoe UI" pitchFamily="34" charset="0"/>
-                <a:ea typeface="Segoe UI" pitchFamily="34" charset="-122"/>
-                <a:cs typeface="Segoe UI" pitchFamily="34" charset="-120"/>
-              </a:rPr>
-              <a:t>• +28.4% Steam Thermal Utilization Efficiency: Predictive soak-time scheduling avoids wasted steam boiler fuel and optimizes thermal energy transfer into the formation.</a:t>
-            </a:r>
-            <a:endParaRPr lang="en-US" sz="1000" dirty="0"/>
-          </a:p>
-        </p:txBody>
-      </p:sp>
-      <p:sp>
-        <p:nvSpPr>
-          <p:cNvPr id="20" name="Text 18"/>
-          <p:cNvSpPr/>
-          <p:nvPr/>
-        </p:nvSpPr>
-        <p:spPr>
-          <a:xfrm>
-            <a:off x="6492240" y="2926080"/>
-            <a:ext cx="4663440" cy="822960"/>
-          </a:xfrm>
-          <a:prstGeom prst="rect">
-            <a:avLst/>
-          </a:prstGeom>
-          <a:noFill/>
-          <a:ln/>
-        </p:spPr>
-        <p:txBody>
-          <a:bodyPr wrap="square" rtlCol="0" anchor="ctr"/>
-          <a:lstStyle/>
-          <a:p>
-            <a:pPr indent="0" marL="0">
-              <a:buNone/>
-            </a:pPr>
-            <a:r>
-              <a:rPr lang="en-US" sz="1000" dirty="0">
-                <a:solidFill>
-                  <a:srgbClr val="FFF7ED"/>
-                </a:solidFill>
-                <a:latin typeface="Segoe UI" pitchFamily="34" charset="0"/>
-                <a:ea typeface="Segoe UI" pitchFamily="34" charset="-122"/>
-                <a:cs typeface="Segoe UI" pitchFamily="34" charset="-120"/>
-              </a:rPr>
-              <a:t>• -34.8% Reduction in Rod String Fatigue: Automated SPM speed regulation prevents dynamic fluid pound shocks and prolongs rod string lifespan.</a:t>
-            </a:r>
-            <a:endParaRPr lang="en-US" sz="1000" dirty="0"/>
-          </a:p>
-        </p:txBody>
-      </p:sp>
-      <p:sp>
-        <p:nvSpPr>
-          <p:cNvPr id="21" name="Text 19"/>
-          <p:cNvSpPr/>
-          <p:nvPr/>
-        </p:nvSpPr>
-        <p:spPr>
-          <a:xfrm>
-            <a:off x="6492240" y="3794760"/>
-            <a:ext cx="4663440" cy="822960"/>
-          </a:xfrm>
-          <a:prstGeom prst="rect">
-            <a:avLst/>
-          </a:prstGeom>
-          <a:noFill/>
-          <a:ln/>
-        </p:spPr>
-        <p:txBody>
-          <a:bodyPr wrap="square" rtlCol="0" anchor="ctr"/>
-          <a:lstStyle/>
-          <a:p>
-            <a:pPr indent="0" marL="0">
-              <a:buNone/>
-            </a:pPr>
-            <a:r>
-              <a:rPr lang="en-US" sz="1000" dirty="0">
-                <a:solidFill>
-                  <a:srgbClr val="FFF7ED"/>
-                </a:solidFill>
-                <a:latin typeface="Segoe UI" pitchFamily="34" charset="0"/>
-                <a:ea typeface="Segoe UI" pitchFamily="34" charset="-122"/>
-                <a:cs typeface="Segoe UI" pitchFamily="34" charset="-120"/>
-              </a:rPr>
               <a:t>• 2.0 Hz Real-Time SCADA Telemetry Streaming: Sub-second sensor stream featuring Web Audio acoustic multi-tone alarm triggers (880 Hz / 440 Hz).</a:t>
             </a:r>
             <a:endParaRPr lang="en-US" sz="1000" dirty="0"/>
@@ -11868,7 +11868,7 @@
             <a:r>
               <a:rPr lang="en-US" sz="1000" dirty="0">
                 <a:solidFill>
-                  <a:srgbClr val="FFF7ED"/>
+                  <a:srgbClr val="F1F5F9"/>
                 </a:solidFill>
                 <a:latin typeface="Segoe UI" pitchFamily="34" charset="0"/>
                 <a:ea typeface="Segoe UI" pitchFamily="34" charset="-122"/>
@@ -11894,7 +11894,7 @@
     <p:bg>
       <p:bgPr>
         <a:solidFill>
-          <a:srgbClr val="C2410C"/>
+          <a:srgbClr val="0B0F19"/>
         </a:solidFill>
       </p:bgPr>
     </p:bg>
@@ -11921,17 +11921,17 @@
         <p:spPr>
           <a:xfrm>
             <a:off x="0" y="0"/>
-            <a:ext cx="12191695" cy="91440"/>
+            <a:ext cx="12191695" cy="73152"/>
           </a:xfrm>
           <a:prstGeom prst="rect">
             <a:avLst/>
           </a:prstGeom>
           <a:solidFill>
-            <a:srgbClr val="FFFFFF"/>
+            <a:srgbClr val="FF6B00"/>
           </a:solidFill>
           <a:ln w="12700">
             <a:solidFill>
-              <a:srgbClr val="FFFFFF"/>
+              <a:srgbClr val="FF6B00"/>
             </a:solidFill>
             <a:prstDash val="solid"/>
           </a:ln>
@@ -11954,11 +11954,11 @@
             </a:avLst>
           </a:prstGeom>
           <a:solidFill>
-            <a:srgbClr val="451203"/>
+            <a:srgbClr val="2A1708"/>
           </a:solidFill>
           <a:ln w="15240">
             <a:solidFill>
-              <a:srgbClr val="FFFFFF"/>
+              <a:srgbClr val="FF6B00"/>
             </a:solidFill>
             <a:prstDash val="solid"/>
           </a:ln>
@@ -11991,7 +11991,7 @@
             <a:r>
               <a:rPr lang="en-US" sz="950" b="1" dirty="0">
                 <a:solidFill>
-                  <a:srgbClr val="FDE047"/>
+                  <a:srgbClr val="FFA726"/>
                 </a:solidFill>
               </a:rPr>
               <a:t>⚙  OUTPUT SCREENSHOT 02</a:t>
@@ -12056,7 +12056,7 @@
           <a:noFill/>
           <a:ln w="19050">
             <a:solidFill>
-              <a:srgbClr val="E06528"/>
+              <a:srgbClr val="1E293B"/>
             </a:solidFill>
             <a:prstDash val="solid"/>
           </a:ln>
@@ -12071,7 +12071,7 @@
         <p:spPr>
           <a:xfrm>
             <a:off x="731520" y="1234440"/>
-            <a:ext cx="2560320" cy="0"/>
+            <a:ext cx="2286000" cy="0"/>
           </a:xfrm>
           <a:prstGeom prst="line">
             <a:avLst/>
@@ -12079,7 +12079,7 @@
           <a:noFill/>
           <a:ln w="31750">
             <a:solidFill>
-              <a:srgbClr val="FFFFFF"/>
+              <a:srgbClr val="FF6B00"/>
             </a:solidFill>
             <a:prstDash val="solid"/>
           </a:ln>
@@ -12102,7 +12102,7 @@
           <a:noFill/>
           <a:ln w="12700">
             <a:solidFill>
-              <a:srgbClr val="E06528"/>
+              <a:srgbClr val="1E293B"/>
             </a:solidFill>
             <a:prstDash val="solid"/>
           </a:ln>
@@ -12135,7 +12135,7 @@
             <a:r>
               <a:rPr lang="en-US" sz="900" dirty="0">
                 <a:solidFill>
-                  <a:srgbClr val="FED7AA"/>
+                  <a:srgbClr val="94A3B8"/>
                 </a:solidFill>
                 <a:latin typeface="Segoe UI" pitchFamily="34" charset="0"/>
                 <a:ea typeface="Segoe UI" pitchFamily="34" charset="-122"/>
@@ -12174,7 +12174,7 @@
             <a:r>
               <a:rPr lang="en-US" sz="950" b="1" dirty="0">
                 <a:solidFill>
-                  <a:srgbClr val="FFFFFF"/>
+                  <a:srgbClr val="FF6B00"/>
                 </a:solidFill>
                 <a:latin typeface="Segoe UI" pitchFamily="34" charset="0"/>
                 <a:ea typeface="Segoe UI" pitchFamily="34" charset="-122"/>
@@ -12203,11 +12203,11 @@
             </a:avLst>
           </a:prstGeom>
           <a:solidFill>
-            <a:srgbClr val="2B0901"/>
+            <a:srgbClr val="06090F"/>
           </a:solidFill>
-          <a:ln w="19050">
+          <a:ln w="15240">
             <a:solidFill>
-              <a:srgbClr val="FFFFFF"/>
+              <a:srgbClr val="E06528"/>
             </a:solidFill>
             <a:prstDash val="solid"/>
           </a:ln>
@@ -12254,11 +12254,11 @@
             </a:avLst>
           </a:prstGeom>
           <a:solidFill>
-            <a:srgbClr val="872808"/>
+            <a:srgbClr val="121826"/>
           </a:solidFill>
           <a:ln w="15240">
             <a:solidFill>
-              <a:srgbClr val="FFFFFF"/>
+              <a:srgbClr val="1E293B"/>
             </a:solidFill>
             <a:prstDash val="solid"/>
           </a:ln>
@@ -12291,7 +12291,7 @@
             <a:r>
               <a:rPr lang="en-US" sz="1150" b="1" dirty="0">
                 <a:solidFill>
-                  <a:srgbClr val="FDE047"/>
+                  <a:srgbClr val="FF8C38"/>
                 </a:solidFill>
               </a:rPr>
               <a:t>Conversational Copilot in Action</a:t>
@@ -12327,7 +12327,7 @@
             <a:r>
               <a:rPr lang="en-US" sz="950" dirty="0">
                 <a:solidFill>
-                  <a:srgbClr val="FFF7ED"/>
+                  <a:srgbClr val="F1F5F9"/>
                 </a:solidFill>
                 <a:latin typeface="Segoe UI" pitchFamily="34" charset="0"/>
                 <a:ea typeface="Segoe UI" pitchFamily="34" charset="-122"/>
@@ -12366,7 +12366,7 @@
             <a:r>
               <a:rPr lang="en-US" sz="950" dirty="0">
                 <a:solidFill>
-                  <a:srgbClr val="FFF7ED"/>
+                  <a:srgbClr val="F1F5F9"/>
                 </a:solidFill>
                 <a:latin typeface="Segoe UI" pitchFamily="34" charset="0"/>
                 <a:ea typeface="Segoe UI" pitchFamily="34" charset="-122"/>
@@ -12405,7 +12405,7 @@
             <a:r>
               <a:rPr lang="en-US" sz="950" dirty="0">
                 <a:solidFill>
-                  <a:srgbClr val="FFF7ED"/>
+                  <a:srgbClr val="F1F5F9"/>
                 </a:solidFill>
                 <a:latin typeface="Segoe UI" pitchFamily="34" charset="0"/>
                 <a:ea typeface="Segoe UI" pitchFamily="34" charset="-122"/>
@@ -12431,7 +12431,7 @@
     <p:bg>
       <p:bgPr>
         <a:solidFill>
-          <a:srgbClr val="C2410C"/>
+          <a:srgbClr val="0B0F19"/>
         </a:solidFill>
       </p:bgPr>
     </p:bg>
@@ -12458,17 +12458,17 @@
         <p:spPr>
           <a:xfrm>
             <a:off x="0" y="0"/>
-            <a:ext cx="12191695" cy="91440"/>
+            <a:ext cx="12191695" cy="73152"/>
           </a:xfrm>
           <a:prstGeom prst="rect">
             <a:avLst/>
           </a:prstGeom>
           <a:solidFill>
-            <a:srgbClr val="FFFFFF"/>
+            <a:srgbClr val="FF6B00"/>
           </a:solidFill>
           <a:ln w="12700">
             <a:solidFill>
-              <a:srgbClr val="FFFFFF"/>
+              <a:srgbClr val="FF6B00"/>
             </a:solidFill>
             <a:prstDash val="solid"/>
           </a:ln>
@@ -12491,11 +12491,11 @@
             </a:avLst>
           </a:prstGeom>
           <a:solidFill>
-            <a:srgbClr val="451203"/>
+            <a:srgbClr val="2A1708"/>
           </a:solidFill>
           <a:ln w="15240">
             <a:solidFill>
-              <a:srgbClr val="FFFFFF"/>
+              <a:srgbClr val="FF6B00"/>
             </a:solidFill>
             <a:prstDash val="solid"/>
           </a:ln>
@@ -12528,7 +12528,7 @@
             <a:r>
               <a:rPr lang="en-US" sz="950" b="1" dirty="0">
                 <a:solidFill>
-                  <a:srgbClr val="FDE047"/>
+                  <a:srgbClr val="FFA726"/>
                 </a:solidFill>
               </a:rPr>
               <a:t>⚙  OUTPUT SCREENSHOT 03</a:t>
@@ -12593,7 +12593,7 @@
           <a:noFill/>
           <a:ln w="19050">
             <a:solidFill>
-              <a:srgbClr val="E06528"/>
+              <a:srgbClr val="1E293B"/>
             </a:solidFill>
             <a:prstDash val="solid"/>
           </a:ln>
@@ -12608,7 +12608,7 @@
         <p:spPr>
           <a:xfrm>
             <a:off x="731520" y="1234440"/>
-            <a:ext cx="2560320" cy="0"/>
+            <a:ext cx="2286000" cy="0"/>
           </a:xfrm>
           <a:prstGeom prst="line">
             <a:avLst/>
@@ -12616,7 +12616,7 @@
           <a:noFill/>
           <a:ln w="31750">
             <a:solidFill>
-              <a:srgbClr val="FFFFFF"/>
+              <a:srgbClr val="FF6B00"/>
             </a:solidFill>
             <a:prstDash val="solid"/>
           </a:ln>
@@ -12639,7 +12639,7 @@
           <a:noFill/>
           <a:ln w="12700">
             <a:solidFill>
-              <a:srgbClr val="E06528"/>
+              <a:srgbClr val="1E293B"/>
             </a:solidFill>
             <a:prstDash val="solid"/>
           </a:ln>
@@ -12672,7 +12672,7 @@
             <a:r>
               <a:rPr lang="en-US" sz="900" dirty="0">
                 <a:solidFill>
-                  <a:srgbClr val="FED7AA"/>
+                  <a:srgbClr val="94A3B8"/>
                 </a:solidFill>
                 <a:latin typeface="Segoe UI" pitchFamily="34" charset="0"/>
                 <a:ea typeface="Segoe UI" pitchFamily="34" charset="-122"/>
@@ -12711,7 +12711,7 @@
             <a:r>
               <a:rPr lang="en-US" sz="950" b="1" dirty="0">
                 <a:solidFill>
-                  <a:srgbClr val="FFFFFF"/>
+                  <a:srgbClr val="FF6B00"/>
                 </a:solidFill>
                 <a:latin typeface="Segoe UI" pitchFamily="34" charset="0"/>
                 <a:ea typeface="Segoe UI" pitchFamily="34" charset="-122"/>
@@ -12740,11 +12740,11 @@
             </a:avLst>
           </a:prstGeom>
           <a:solidFill>
-            <a:srgbClr val="2B0901"/>
+            <a:srgbClr val="06090F"/>
           </a:solidFill>
-          <a:ln w="19050">
+          <a:ln w="15240">
             <a:solidFill>
-              <a:srgbClr val="FFFFFF"/>
+              <a:srgbClr val="E06528"/>
             </a:solidFill>
             <a:prstDash val="solid"/>
           </a:ln>
@@ -12791,11 +12791,11 @@
             </a:avLst>
           </a:prstGeom>
           <a:solidFill>
-            <a:srgbClr val="872808"/>
+            <a:srgbClr val="121826"/>
           </a:solidFill>
           <a:ln w="15240">
             <a:solidFill>
-              <a:srgbClr val="FFFFFF"/>
+              <a:srgbClr val="1E293B"/>
             </a:solidFill>
             <a:prstDash val="solid"/>
           </a:ln>
@@ -12828,7 +12828,7 @@
             <a:r>
               <a:rPr lang="en-US" sz="1150" b="1" dirty="0">
                 <a:solidFill>
-                  <a:srgbClr val="FDE047"/>
+                  <a:srgbClr val="FF8C38"/>
                 </a:solidFill>
               </a:rPr>
               <a:t>Closed-Loop Parameter Dispatching</a:t>
@@ -12864,7 +12864,7 @@
             <a:r>
               <a:rPr lang="en-US" sz="950" dirty="0">
                 <a:solidFill>
-                  <a:srgbClr val="FFF7ED"/>
+                  <a:srgbClr val="F1F5F9"/>
                 </a:solidFill>
                 <a:latin typeface="Segoe UI" pitchFamily="34" charset="0"/>
                 <a:ea typeface="Segoe UI" pitchFamily="34" charset="-122"/>
@@ -12903,7 +12903,7 @@
             <a:r>
               <a:rPr lang="en-US" sz="950" dirty="0">
                 <a:solidFill>
-                  <a:srgbClr val="FFF7ED"/>
+                  <a:srgbClr val="F1F5F9"/>
                 </a:solidFill>
                 <a:latin typeface="Segoe UI" pitchFamily="34" charset="0"/>
                 <a:ea typeface="Segoe UI" pitchFamily="34" charset="-122"/>
@@ -12942,7 +12942,7 @@
             <a:r>
               <a:rPr lang="en-US" sz="950" dirty="0">
                 <a:solidFill>
-                  <a:srgbClr val="FFF7ED"/>
+                  <a:srgbClr val="F1F5F9"/>
                 </a:solidFill>
                 <a:latin typeface="Segoe UI" pitchFamily="34" charset="0"/>
                 <a:ea typeface="Segoe UI" pitchFamily="34" charset="-122"/>
@@ -12968,7 +12968,7 @@
     <p:bg>
       <p:bgPr>
         <a:solidFill>
-          <a:srgbClr val="C2410C"/>
+          <a:srgbClr val="0B0F19"/>
         </a:solidFill>
       </p:bgPr>
     </p:bg>
@@ -12995,17 +12995,17 @@
         <p:spPr>
           <a:xfrm>
             <a:off x="0" y="0"/>
-            <a:ext cx="12191695" cy="91440"/>
+            <a:ext cx="12191695" cy="73152"/>
           </a:xfrm>
           <a:prstGeom prst="rect">
             <a:avLst/>
           </a:prstGeom>
           <a:solidFill>
-            <a:srgbClr val="FFFFFF"/>
+            <a:srgbClr val="FF6B00"/>
           </a:solidFill>
           <a:ln w="12700">
             <a:solidFill>
-              <a:srgbClr val="FFFFFF"/>
+              <a:srgbClr val="FF6B00"/>
             </a:solidFill>
             <a:prstDash val="solid"/>
           </a:ln>
@@ -13028,11 +13028,11 @@
             </a:avLst>
           </a:prstGeom>
           <a:solidFill>
-            <a:srgbClr val="451203"/>
+            <a:srgbClr val="2A1708"/>
           </a:solidFill>
           <a:ln w="15240">
             <a:solidFill>
-              <a:srgbClr val="FFFFFF"/>
+              <a:srgbClr val="FF6B00"/>
             </a:solidFill>
             <a:prstDash val="solid"/>
           </a:ln>
@@ -13065,7 +13065,7 @@
             <a:r>
               <a:rPr lang="en-US" sz="950" b="1" dirty="0">
                 <a:solidFill>
-                  <a:srgbClr val="FDE047"/>
+                  <a:srgbClr val="FFA726"/>
                 </a:solidFill>
               </a:rPr>
               <a:t>⚙  PROJECT SUMMARY</a:t>
@@ -13130,7 +13130,7 @@
           <a:noFill/>
           <a:ln w="19050">
             <a:solidFill>
-              <a:srgbClr val="E06528"/>
+              <a:srgbClr val="1E293B"/>
             </a:solidFill>
             <a:prstDash val="solid"/>
           </a:ln>
@@ -13145,7 +13145,7 @@
         <p:spPr>
           <a:xfrm>
             <a:off x="731520" y="1234440"/>
-            <a:ext cx="2560320" cy="0"/>
+            <a:ext cx="2286000" cy="0"/>
           </a:xfrm>
           <a:prstGeom prst="line">
             <a:avLst/>
@@ -13153,7 +13153,7 @@
           <a:noFill/>
           <a:ln w="31750">
             <a:solidFill>
-              <a:srgbClr val="FFFFFF"/>
+              <a:srgbClr val="FF6B00"/>
             </a:solidFill>
             <a:prstDash val="solid"/>
           </a:ln>
@@ -13176,7 +13176,7 @@
           <a:noFill/>
           <a:ln w="12700">
             <a:solidFill>
-              <a:srgbClr val="E06528"/>
+              <a:srgbClr val="1E293B"/>
             </a:solidFill>
             <a:prstDash val="solid"/>
           </a:ln>
@@ -13209,7 +13209,7 @@
             <a:r>
               <a:rPr lang="en-US" sz="900" dirty="0">
                 <a:solidFill>
-                  <a:srgbClr val="FED7AA"/>
+                  <a:srgbClr val="94A3B8"/>
                 </a:solidFill>
                 <a:latin typeface="Segoe UI" pitchFamily="34" charset="0"/>
                 <a:ea typeface="Segoe UI" pitchFamily="34" charset="-122"/>
@@ -13248,7 +13248,7 @@
             <a:r>
               <a:rPr lang="en-US" sz="950" b="1" dirty="0">
                 <a:solidFill>
-                  <a:srgbClr val="FFFFFF"/>
+                  <a:srgbClr val="FF6B00"/>
                 </a:solidFill>
                 <a:latin typeface="Segoe UI" pitchFamily="34" charset="0"/>
                 <a:ea typeface="Segoe UI" pitchFamily="34" charset="-122"/>
@@ -13277,7 +13277,187 @@
             </a:avLst>
           </a:prstGeom>
           <a:solidFill>
-            <a:srgbClr val="6B2006"/>
+            <a:srgbClr val="121826"/>
+          </a:solidFill>
+          <a:ln w="15240">
+            <a:solidFill>
+              <a:srgbClr val="1E293B"/>
+            </a:solidFill>
+            <a:prstDash val="solid"/>
+          </a:ln>
+        </p:spPr>
+      </p:sp>
+      <p:sp>
+        <p:nvSpPr>
+          <p:cNvPr id="12" name="Text 10"/>
+          <p:cNvSpPr/>
+          <p:nvPr/>
+        </p:nvSpPr>
+        <p:spPr>
+          <a:xfrm>
+            <a:off x="1005840" y="1645920"/>
+            <a:ext cx="4663440" cy="320040"/>
+          </a:xfrm>
+          <a:prstGeom prst="rect">
+            <a:avLst/>
+          </a:prstGeom>
+          <a:noFill/>
+          <a:ln/>
+        </p:spPr>
+        <p:txBody>
+          <a:bodyPr wrap="square" rtlCol="0" anchor="ctr"/>
+          <a:lstStyle/>
+          <a:p>
+            <a:pPr indent="0" marL="0">
+              <a:buNone/>
+            </a:pPr>
+            <a:r>
+              <a:rPr lang="en-US" sz="1200" b="1" dirty="0">
+                <a:solidFill>
+                  <a:srgbClr val="FF8C38"/>
+                </a:solidFill>
+              </a:rPr>
+              <a:t>Key Technical Accomplishments</a:t>
+            </a:r>
+            <a:endParaRPr lang="en-US" sz="1200" dirty="0"/>
+          </a:p>
+        </p:txBody>
+      </p:sp>
+      <p:sp>
+        <p:nvSpPr>
+          <p:cNvPr id="13" name="Text 11"/>
+          <p:cNvSpPr/>
+          <p:nvPr/>
+        </p:nvSpPr>
+        <p:spPr>
+          <a:xfrm>
+            <a:off x="1005840" y="2057400"/>
+            <a:ext cx="4663440" cy="822960"/>
+          </a:xfrm>
+          <a:prstGeom prst="rect">
+            <a:avLst/>
+          </a:prstGeom>
+          <a:noFill/>
+          <a:ln/>
+        </p:spPr>
+        <p:txBody>
+          <a:bodyPr wrap="square" rtlCol="0" anchor="ctr"/>
+          <a:lstStyle/>
+          <a:p>
+            <a:pPr indent="0" marL="0">
+              <a:buNone/>
+            </a:pPr>
+            <a:r>
+              <a:rPr lang="en-US" sz="1000" dirty="0">
+                <a:solidFill>
+                  <a:srgbClr val="F1F5F9"/>
+                </a:solidFill>
+                <a:latin typeface="Segoe UI" pitchFamily="34" charset="0"/>
+                <a:ea typeface="Segoe UI" pitchFamily="34" charset="-122"/>
+                <a:cs typeface="Segoe UI" pitchFamily="34" charset="-120"/>
+              </a:rPr>
+              <a:t>• Unified Dual-Physics Twin: Successfully coupled Andrade thermodynamic viscosity equations with Sucker Rod mechanical dynamics into a single cohesive web application.</a:t>
+            </a:r>
+            <a:endParaRPr lang="en-US" sz="1000" dirty="0"/>
+          </a:p>
+        </p:txBody>
+      </p:sp>
+      <p:sp>
+        <p:nvSpPr>
+          <p:cNvPr id="14" name="Text 12"/>
+          <p:cNvSpPr/>
+          <p:nvPr/>
+        </p:nvSpPr>
+        <p:spPr>
+          <a:xfrm>
+            <a:off x="1005840" y="2926080"/>
+            <a:ext cx="4663440" cy="822960"/>
+          </a:xfrm>
+          <a:prstGeom prst="rect">
+            <a:avLst/>
+          </a:prstGeom>
+          <a:noFill/>
+          <a:ln/>
+        </p:spPr>
+        <p:txBody>
+          <a:bodyPr wrap="square" rtlCol="0" anchor="ctr"/>
+          <a:lstStyle/>
+          <a:p>
+            <a:pPr indent="0" marL="0">
+              <a:buNone/>
+            </a:pPr>
+            <a:r>
+              <a:rPr lang="en-US" sz="1000" dirty="0">
+                <a:solidFill>
+                  <a:srgbClr val="F1F5F9"/>
+                </a:solidFill>
+                <a:latin typeface="Segoe UI" pitchFamily="34" charset="0"/>
+                <a:ea typeface="Segoe UI" pitchFamily="34" charset="-122"/>
+                <a:cs typeface="Segoe UI" pitchFamily="34" charset="-120"/>
+              </a:rPr>
+              <a:t>• Real-Time 2.0 Hz SCADA Streaming: Built a high-frequency telemetry engine and native Web Audio acoustic synthesizer delivering true industrial SCADA situational awareness.</a:t>
+            </a:r>
+            <a:endParaRPr lang="en-US" sz="1000" dirty="0"/>
+          </a:p>
+        </p:txBody>
+      </p:sp>
+      <p:sp>
+        <p:nvSpPr>
+          <p:cNvPr id="15" name="Text 13"/>
+          <p:cNvSpPr/>
+          <p:nvPr/>
+        </p:nvSpPr>
+        <p:spPr>
+          <a:xfrm>
+            <a:off x="1005840" y="3794760"/>
+            <a:ext cx="4663440" cy="822960"/>
+          </a:xfrm>
+          <a:prstGeom prst="rect">
+            <a:avLst/>
+          </a:prstGeom>
+          <a:noFill/>
+          <a:ln/>
+        </p:spPr>
+        <p:txBody>
+          <a:bodyPr wrap="square" rtlCol="0" anchor="ctr"/>
+          <a:lstStyle/>
+          <a:p>
+            <a:pPr indent="0" marL="0">
+              <a:buNone/>
+            </a:pPr>
+            <a:r>
+              <a:rPr lang="en-US" sz="1000" dirty="0">
+                <a:solidFill>
+                  <a:srgbClr val="F1F5F9"/>
+                </a:solidFill>
+                <a:latin typeface="Segoe UI" pitchFamily="34" charset="0"/>
+                <a:ea typeface="Segoe UI" pitchFamily="34" charset="-122"/>
+                <a:cs typeface="Segoe UI" pitchFamily="34" charset="-120"/>
+              </a:rPr>
+              <a:t>• Intelligent Conversational Copilot: Developed an open-ended conversational AI capable of on-the-fly what-if scenario solving and closed-loop setpoint dispatching.</a:t>
+            </a:r>
+            <a:endParaRPr lang="en-US" sz="1000" dirty="0"/>
+          </a:p>
+        </p:txBody>
+      </p:sp>
+      <p:sp>
+        <p:nvSpPr>
+          <p:cNvPr id="16" name="Shape 14"/>
+          <p:cNvSpPr/>
+          <p:nvPr/>
+        </p:nvSpPr>
+        <p:spPr>
+          <a:xfrm>
+            <a:off x="6217920" y="1463040"/>
+            <a:ext cx="5212080" cy="4754880"/>
+          </a:xfrm>
+          <a:prstGeom prst="roundRect">
+            <a:avLst>
+              <a:gd name="adj" fmla="val 1923"/>
+            </a:avLst>
+          </a:prstGeom>
+          <a:solidFill>
+            <a:srgbClr val="172033"/>
           </a:solidFill>
           <a:ln w="15240">
             <a:solidFill>
@@ -13289,13 +13469,13 @@
       </p:sp>
       <p:sp>
         <p:nvSpPr>
-          <p:cNvPr id="12" name="Text 10"/>
-          <p:cNvSpPr/>
-          <p:nvPr/>
-        </p:nvSpPr>
-        <p:spPr>
-          <a:xfrm>
-            <a:off x="1005840" y="1645920"/>
+          <p:cNvPr id="17" name="Text 15"/>
+          <p:cNvSpPr/>
+          <p:nvPr/>
+        </p:nvSpPr>
+        <p:spPr>
+          <a:xfrm>
+            <a:off x="6492240" y="1645920"/>
             <a:ext cx="4663440" cy="320040"/>
           </a:xfrm>
           <a:prstGeom prst="rect">
@@ -13314,10 +13494,10 @@
             <a:r>
               <a:rPr lang="en-US" sz="1200" b="1" dirty="0">
                 <a:solidFill>
-                  <a:srgbClr val="FDE047"/>
-                </a:solidFill>
-              </a:rPr>
-              <a:t>Key Technical Accomplishments</a:t>
+                  <a:srgbClr val="FFFFFF"/>
+                </a:solidFill>
+              </a:rPr>
+              <a:t>Demonstrated Field &amp; Economic Impact</a:t>
             </a:r>
             <a:endParaRPr lang="en-US" sz="1200" dirty="0"/>
           </a:p>
@@ -13325,13 +13505,13 @@
       </p:sp>
       <p:sp>
         <p:nvSpPr>
-          <p:cNvPr id="13" name="Text 11"/>
-          <p:cNvSpPr/>
-          <p:nvPr/>
-        </p:nvSpPr>
-        <p:spPr>
-          <a:xfrm>
-            <a:off x="1005840" y="2057400"/>
+          <p:cNvPr id="18" name="Text 16"/>
+          <p:cNvSpPr/>
+          <p:nvPr/>
+        </p:nvSpPr>
+        <p:spPr>
+          <a:xfrm>
+            <a:off x="6492240" y="2057400"/>
             <a:ext cx="4663440" cy="822960"/>
           </a:xfrm>
           <a:prstGeom prst="rect">
@@ -13350,13 +13530,13 @@
             <a:r>
               <a:rPr lang="en-US" sz="1000" dirty="0">
                 <a:solidFill>
-                  <a:srgbClr val="FFF7ED"/>
+                  <a:srgbClr val="F1F5F9"/>
                 </a:solidFill>
                 <a:latin typeface="Segoe UI" pitchFamily="34" charset="0"/>
                 <a:ea typeface="Segoe UI" pitchFamily="34" charset="-122"/>
                 <a:cs typeface="Segoe UI" pitchFamily="34" charset="-120"/>
               </a:rPr>
-              <a:t>• Unified Dual-Physics Twin: Successfully coupled Andrade thermodynamic viscosity equations with Sucker Rod mechanical dynamics into a single cohesive web application.</a:t>
+              <a:t>• +28.4% Steam Thermal Efficiency: Predictive soak-time scheduling avoids wasted steam boiler fuel and optimizes thermal energy transfer into the formation.</a:t>
             </a:r>
             <a:endParaRPr lang="en-US" sz="1000" dirty="0"/>
           </a:p>
@@ -13364,13 +13544,13 @@
       </p:sp>
       <p:sp>
         <p:nvSpPr>
-          <p:cNvPr id="14" name="Text 12"/>
-          <p:cNvSpPr/>
-          <p:nvPr/>
-        </p:nvSpPr>
-        <p:spPr>
-          <a:xfrm>
-            <a:off x="1005840" y="2926080"/>
+          <p:cNvPr id="19" name="Text 17"/>
+          <p:cNvSpPr/>
+          <p:nvPr/>
+        </p:nvSpPr>
+        <p:spPr>
+          <a:xfrm>
+            <a:off x="6492240" y="2926080"/>
             <a:ext cx="4663440" cy="822960"/>
           </a:xfrm>
           <a:prstGeom prst="rect">
@@ -13389,192 +13569,12 @@
             <a:r>
               <a:rPr lang="en-US" sz="1000" dirty="0">
                 <a:solidFill>
-                  <a:srgbClr val="FFF7ED"/>
+                  <a:srgbClr val="F1F5F9"/>
                 </a:solidFill>
                 <a:latin typeface="Segoe UI" pitchFamily="34" charset="0"/>
                 <a:ea typeface="Segoe UI" pitchFamily="34" charset="-122"/>
                 <a:cs typeface="Segoe UI" pitchFamily="34" charset="-120"/>
               </a:rPr>
-              <a:t>• Real-Time 2.0 Hz SCADA Streaming: Built a high-frequency telemetry engine and native Web Audio acoustic synthesizer delivering true industrial SCADA situational awareness.</a:t>
-            </a:r>
-            <a:endParaRPr lang="en-US" sz="1000" dirty="0"/>
-          </a:p>
-        </p:txBody>
-      </p:sp>
-      <p:sp>
-        <p:nvSpPr>
-          <p:cNvPr id="15" name="Text 13"/>
-          <p:cNvSpPr/>
-          <p:nvPr/>
-        </p:nvSpPr>
-        <p:spPr>
-          <a:xfrm>
-            <a:off x="1005840" y="3794760"/>
-            <a:ext cx="4663440" cy="822960"/>
-          </a:xfrm>
-          <a:prstGeom prst="rect">
-            <a:avLst/>
-          </a:prstGeom>
-          <a:noFill/>
-          <a:ln/>
-        </p:spPr>
-        <p:txBody>
-          <a:bodyPr wrap="square" rtlCol="0" anchor="ctr"/>
-          <a:lstStyle/>
-          <a:p>
-            <a:pPr indent="0" marL="0">
-              <a:buNone/>
-            </a:pPr>
-            <a:r>
-              <a:rPr lang="en-US" sz="1000" dirty="0">
-                <a:solidFill>
-                  <a:srgbClr val="FFF7ED"/>
-                </a:solidFill>
-                <a:latin typeface="Segoe UI" pitchFamily="34" charset="0"/>
-                <a:ea typeface="Segoe UI" pitchFamily="34" charset="-122"/>
-                <a:cs typeface="Segoe UI" pitchFamily="34" charset="-120"/>
-              </a:rPr>
-              <a:t>• Intelligent Conversational Copilot: Developed an open-ended conversational AI capable of on-the-fly what-if scenario solving and closed-loop setpoint dispatching.</a:t>
-            </a:r>
-            <a:endParaRPr lang="en-US" sz="1000" dirty="0"/>
-          </a:p>
-        </p:txBody>
-      </p:sp>
-      <p:sp>
-        <p:nvSpPr>
-          <p:cNvPr id="16" name="Shape 14"/>
-          <p:cNvSpPr/>
-          <p:nvPr/>
-        </p:nvSpPr>
-        <p:spPr>
-          <a:xfrm>
-            <a:off x="6217920" y="1463040"/>
-            <a:ext cx="5212080" cy="4754880"/>
-          </a:xfrm>
-          <a:prstGeom prst="roundRect">
-            <a:avLst>
-              <a:gd name="adj" fmla="val 1923"/>
-            </a:avLst>
-          </a:prstGeom>
-          <a:solidFill>
-            <a:srgbClr val="872808"/>
-          </a:solidFill>
-          <a:ln w="15240">
-            <a:solidFill>
-              <a:srgbClr val="FFFFFF"/>
-            </a:solidFill>
-            <a:prstDash val="solid"/>
-          </a:ln>
-        </p:spPr>
-      </p:sp>
-      <p:sp>
-        <p:nvSpPr>
-          <p:cNvPr id="17" name="Text 15"/>
-          <p:cNvSpPr/>
-          <p:nvPr/>
-        </p:nvSpPr>
-        <p:spPr>
-          <a:xfrm>
-            <a:off x="6492240" y="1645920"/>
-            <a:ext cx="4663440" cy="320040"/>
-          </a:xfrm>
-          <a:prstGeom prst="rect">
-            <a:avLst/>
-          </a:prstGeom>
-          <a:noFill/>
-          <a:ln/>
-        </p:spPr>
-        <p:txBody>
-          <a:bodyPr wrap="square" rtlCol="0" anchor="ctr"/>
-          <a:lstStyle/>
-          <a:p>
-            <a:pPr indent="0" marL="0">
-              <a:buNone/>
-            </a:pPr>
-            <a:r>
-              <a:rPr lang="en-US" sz="1200" b="1" dirty="0">
-                <a:solidFill>
-                  <a:srgbClr val="FFFFFF"/>
-                </a:solidFill>
-              </a:rPr>
-              <a:t>Demonstrated Field &amp; Economic Impact</a:t>
-            </a:r>
-            <a:endParaRPr lang="en-US" sz="1200" dirty="0"/>
-          </a:p>
-        </p:txBody>
-      </p:sp>
-      <p:sp>
-        <p:nvSpPr>
-          <p:cNvPr id="18" name="Text 16"/>
-          <p:cNvSpPr/>
-          <p:nvPr/>
-        </p:nvSpPr>
-        <p:spPr>
-          <a:xfrm>
-            <a:off x="6492240" y="2057400"/>
-            <a:ext cx="4663440" cy="822960"/>
-          </a:xfrm>
-          <a:prstGeom prst="rect">
-            <a:avLst/>
-          </a:prstGeom>
-          <a:noFill/>
-          <a:ln/>
-        </p:spPr>
-        <p:txBody>
-          <a:bodyPr wrap="square" rtlCol="0" anchor="ctr"/>
-          <a:lstStyle/>
-          <a:p>
-            <a:pPr indent="0" marL="0">
-              <a:buNone/>
-            </a:pPr>
-            <a:r>
-              <a:rPr lang="en-US" sz="1000" dirty="0">
-                <a:solidFill>
-                  <a:srgbClr val="FFF7ED"/>
-                </a:solidFill>
-                <a:latin typeface="Segoe UI" pitchFamily="34" charset="0"/>
-                <a:ea typeface="Segoe UI" pitchFamily="34" charset="-122"/>
-                <a:cs typeface="Segoe UI" pitchFamily="34" charset="-120"/>
-              </a:rPr>
-              <a:t>• +28.4% Steam Thermal Efficiency: Predictive soak-time scheduling avoids wasted steam boiler fuel and optimizes thermal energy transfer into the formation.</a:t>
-            </a:r>
-            <a:endParaRPr lang="en-US" sz="1000" dirty="0"/>
-          </a:p>
-        </p:txBody>
-      </p:sp>
-      <p:sp>
-        <p:nvSpPr>
-          <p:cNvPr id="19" name="Text 17"/>
-          <p:cNvSpPr/>
-          <p:nvPr/>
-        </p:nvSpPr>
-        <p:spPr>
-          <a:xfrm>
-            <a:off x="6492240" y="2926080"/>
-            <a:ext cx="4663440" cy="822960"/>
-          </a:xfrm>
-          <a:prstGeom prst="rect">
-            <a:avLst/>
-          </a:prstGeom>
-          <a:noFill/>
-          <a:ln/>
-        </p:spPr>
-        <p:txBody>
-          <a:bodyPr wrap="square" rtlCol="0" anchor="ctr"/>
-          <a:lstStyle/>
-          <a:p>
-            <a:pPr indent="0" marL="0">
-              <a:buNone/>
-            </a:pPr>
-            <a:r>
-              <a:rPr lang="en-US" sz="1000" dirty="0">
-                <a:solidFill>
-                  <a:srgbClr val="FFF7ED"/>
-                </a:solidFill>
-                <a:latin typeface="Segoe UI" pitchFamily="34" charset="0"/>
-                <a:ea typeface="Segoe UI" pitchFamily="34" charset="-122"/>
-                <a:cs typeface="Segoe UI" pitchFamily="34" charset="-120"/>
-              </a:rPr>
               <a:t>• -34.8% Reduction in Rod String Fatigue: Automated SPM speed regulation prevents fluid pound impact shocks and prolongs rod string lifespan.</a:t>
             </a:r>
             <a:endParaRPr lang="en-US" sz="1000" dirty="0"/>
@@ -13608,7 +13608,7 @@
             <a:r>
               <a:rPr lang="en-US" sz="1000" dirty="0">
                 <a:solidFill>
-                  <a:srgbClr val="FFF7ED"/>
+                  <a:srgbClr val="F1F5F9"/>
                 </a:solidFill>
                 <a:latin typeface="Segoe UI" pitchFamily="34" charset="0"/>
                 <a:ea typeface="Segoe UI" pitchFamily="34" charset="-122"/>
@@ -13634,7 +13634,7 @@
     <p:bg>
       <p:bgPr>
         <a:solidFill>
-          <a:srgbClr val="C2410C"/>
+          <a:srgbClr val="0B0F19"/>
         </a:solidFill>
       </p:bgPr>
     </p:bg>
@@ -13661,17 +13661,17 @@
         <p:spPr>
           <a:xfrm>
             <a:off x="0" y="0"/>
-            <a:ext cx="12191695" cy="91440"/>
+            <a:ext cx="12191695" cy="73152"/>
           </a:xfrm>
           <a:prstGeom prst="rect">
             <a:avLst/>
           </a:prstGeom>
           <a:solidFill>
-            <a:srgbClr val="FFFFFF"/>
+            <a:srgbClr val="FF6B00"/>
           </a:solidFill>
           <a:ln w="12700">
             <a:solidFill>
-              <a:srgbClr val="FFFFFF"/>
+              <a:srgbClr val="FF6B00"/>
             </a:solidFill>
             <a:prstDash val="solid"/>
           </a:ln>
@@ -13694,11 +13694,11 @@
             </a:avLst>
           </a:prstGeom>
           <a:solidFill>
-            <a:srgbClr val="451203"/>
+            <a:srgbClr val="2A1708"/>
           </a:solidFill>
           <a:ln w="15240">
             <a:solidFill>
-              <a:srgbClr val="FFFFFF"/>
+              <a:srgbClr val="FF6B00"/>
             </a:solidFill>
             <a:prstDash val="solid"/>
           </a:ln>
@@ -13731,7 +13731,7 @@
             <a:r>
               <a:rPr lang="en-US" sz="950" b="1" dirty="0">
                 <a:solidFill>
-                  <a:srgbClr val="FDE047"/>
+                  <a:srgbClr val="FFA726"/>
                 </a:solidFill>
               </a:rPr>
               <a:t>⚙  ROADMAP &amp; NEXT GENERATION</a:t>
@@ -13796,7 +13796,7 @@
           <a:noFill/>
           <a:ln w="19050">
             <a:solidFill>
-              <a:srgbClr val="E06528"/>
+              <a:srgbClr val="1E293B"/>
             </a:solidFill>
             <a:prstDash val="solid"/>
           </a:ln>
@@ -13811,7 +13811,7 @@
         <p:spPr>
           <a:xfrm>
             <a:off x="731520" y="1234440"/>
-            <a:ext cx="2560320" cy="0"/>
+            <a:ext cx="2286000" cy="0"/>
           </a:xfrm>
           <a:prstGeom prst="line">
             <a:avLst/>
@@ -13819,7 +13819,7 @@
           <a:noFill/>
           <a:ln w="31750">
             <a:solidFill>
-              <a:srgbClr val="FFFFFF"/>
+              <a:srgbClr val="FF6B00"/>
             </a:solidFill>
             <a:prstDash val="solid"/>
           </a:ln>
@@ -13842,7 +13842,7 @@
           <a:noFill/>
           <a:ln w="12700">
             <a:solidFill>
-              <a:srgbClr val="E06528"/>
+              <a:srgbClr val="1E293B"/>
             </a:solidFill>
             <a:prstDash val="solid"/>
           </a:ln>
@@ -13875,7 +13875,7 @@
             <a:r>
               <a:rPr lang="en-US" sz="900" dirty="0">
                 <a:solidFill>
-                  <a:srgbClr val="FED7AA"/>
+                  <a:srgbClr val="94A3B8"/>
                 </a:solidFill>
                 <a:latin typeface="Segoe UI" pitchFamily="34" charset="0"/>
                 <a:ea typeface="Segoe UI" pitchFamily="34" charset="-122"/>
@@ -13914,7 +13914,7 @@
             <a:r>
               <a:rPr lang="en-US" sz="950" b="1" dirty="0">
                 <a:solidFill>
-                  <a:srgbClr val="FFFFFF"/>
+                  <a:srgbClr val="FF6B00"/>
                 </a:solidFill>
                 <a:latin typeface="Segoe UI" pitchFamily="34" charset="0"/>
                 <a:ea typeface="Segoe UI" pitchFamily="34" charset="-122"/>
@@ -13943,7 +13943,148 @@
             </a:avLst>
           </a:prstGeom>
           <a:solidFill>
-            <a:srgbClr val="6B2006"/>
+            <a:srgbClr val="121826"/>
+          </a:solidFill>
+          <a:ln w="15240">
+            <a:solidFill>
+              <a:srgbClr val="1E293B"/>
+            </a:solidFill>
+            <a:prstDash val="solid"/>
+          </a:ln>
+        </p:spPr>
+      </p:sp>
+      <p:sp>
+        <p:nvSpPr>
+          <p:cNvPr id="12" name="Text 10"/>
+          <p:cNvSpPr/>
+          <p:nvPr/>
+        </p:nvSpPr>
+        <p:spPr>
+          <a:xfrm>
+            <a:off x="1005840" y="1645920"/>
+            <a:ext cx="4663440" cy="320040"/>
+          </a:xfrm>
+          <a:prstGeom prst="rect">
+            <a:avLst/>
+          </a:prstGeom>
+          <a:noFill/>
+          <a:ln/>
+        </p:spPr>
+        <p:txBody>
+          <a:bodyPr wrap="square" rtlCol="0" anchor="ctr"/>
+          <a:lstStyle/>
+          <a:p>
+            <a:pPr indent="0" marL="0">
+              <a:buNone/>
+            </a:pPr>
+            <a:r>
+              <a:rPr lang="en-US" sz="1200" b="1" dirty="0">
+                <a:solidFill>
+                  <a:srgbClr val="FF8C38"/>
+                </a:solidFill>
+              </a:rPr>
+              <a:t>Edge IoT &amp; Machine Learning Enhancements</a:t>
+            </a:r>
+            <a:endParaRPr lang="en-US" sz="1200" dirty="0"/>
+          </a:p>
+        </p:txBody>
+      </p:sp>
+      <p:sp>
+        <p:nvSpPr>
+          <p:cNvPr id="13" name="Text 11"/>
+          <p:cNvSpPr/>
+          <p:nvPr/>
+        </p:nvSpPr>
+        <p:spPr>
+          <a:xfrm>
+            <a:off x="1005840" y="2057400"/>
+            <a:ext cx="4663440" cy="822960"/>
+          </a:xfrm>
+          <a:prstGeom prst="rect">
+            <a:avLst/>
+          </a:prstGeom>
+          <a:noFill/>
+          <a:ln/>
+        </p:spPr>
+        <p:txBody>
+          <a:bodyPr wrap="square" rtlCol="0" anchor="ctr"/>
+          <a:lstStyle/>
+          <a:p>
+            <a:pPr indent="0" marL="0">
+              <a:buNone/>
+            </a:pPr>
+            <a:r>
+              <a:rPr lang="en-US" sz="1000" dirty="0">
+                <a:solidFill>
+                  <a:srgbClr val="F1F5F9"/>
+                </a:solidFill>
+                <a:latin typeface="Segoe UI" pitchFamily="34" charset="0"/>
+                <a:ea typeface="Segoe UI" pitchFamily="34" charset="-122"/>
+                <a:cs typeface="Segoe UI" pitchFamily="34" charset="-120"/>
+              </a:rPr>
+              <a:t>• 1. Edge IoT RTU Hardware Bridge (MQTT Sparkplug B &amp; OPC-UA): Direct physical coupling with field Modbus TCP RTUs, MQTT brokers, and Siemens/Rockwell PLCs for live field wellhead sensor data ingestion.</a:t>
+            </a:r>
+            <a:endParaRPr lang="en-US" sz="1000" dirty="0"/>
+          </a:p>
+        </p:txBody>
+      </p:sp>
+      <p:sp>
+        <p:nvSpPr>
+          <p:cNvPr id="14" name="Text 12"/>
+          <p:cNvSpPr/>
+          <p:nvPr/>
+        </p:nvSpPr>
+        <p:spPr>
+          <a:xfrm>
+            <a:off x="1005840" y="2926080"/>
+            <a:ext cx="4663440" cy="822960"/>
+          </a:xfrm>
+          <a:prstGeom prst="rect">
+            <a:avLst/>
+          </a:prstGeom>
+          <a:noFill/>
+          <a:ln/>
+        </p:spPr>
+        <p:txBody>
+          <a:bodyPr wrap="square" rtlCol="0" anchor="ctr"/>
+          <a:lstStyle/>
+          <a:p>
+            <a:pPr indent="0" marL="0">
+              <a:buNone/>
+            </a:pPr>
+            <a:r>
+              <a:rPr lang="en-US" sz="1000" dirty="0">
+                <a:solidFill>
+                  <a:srgbClr val="F1F5F9"/>
+                </a:solidFill>
+                <a:latin typeface="Segoe UI" pitchFamily="34" charset="0"/>
+                <a:ea typeface="Segoe UI" pitchFamily="34" charset="-122"/>
+                <a:cs typeface="Segoe UI" pitchFamily="34" charset="-120"/>
+              </a:rPr>
+              <a:t>• 2. Physics-Informed Neural Networks (PINN): Embedding deep learning PINN surrogate models to solve 3D reservoir thermal diffusion equations in sub-milliseconds on edge AI accelerators.</a:t>
+            </a:r>
+            <a:endParaRPr lang="en-US" sz="1000" dirty="0"/>
+          </a:p>
+        </p:txBody>
+      </p:sp>
+      <p:sp>
+        <p:nvSpPr>
+          <p:cNvPr id="15" name="Shape 13"/>
+          <p:cNvSpPr/>
+          <p:nvPr/>
+        </p:nvSpPr>
+        <p:spPr>
+          <a:xfrm>
+            <a:off x="6217920" y="1463040"/>
+            <a:ext cx="5212080" cy="4754880"/>
+          </a:xfrm>
+          <a:prstGeom prst="roundRect">
+            <a:avLst>
+              <a:gd name="adj" fmla="val 1923"/>
+            </a:avLst>
+          </a:prstGeom>
+          <a:solidFill>
+            <a:srgbClr val="172033"/>
           </a:solidFill>
           <a:ln w="15240">
             <a:solidFill>
@@ -13955,13 +14096,13 @@
       </p:sp>
       <p:sp>
         <p:nvSpPr>
-          <p:cNvPr id="12" name="Text 10"/>
-          <p:cNvSpPr/>
-          <p:nvPr/>
-        </p:nvSpPr>
-        <p:spPr>
-          <a:xfrm>
-            <a:off x="1005840" y="1645920"/>
+          <p:cNvPr id="16" name="Text 14"/>
+          <p:cNvSpPr/>
+          <p:nvPr/>
+        </p:nvSpPr>
+        <p:spPr>
+          <a:xfrm>
+            <a:off x="6492240" y="1645920"/>
             <a:ext cx="4663440" cy="320040"/>
           </a:xfrm>
           <a:prstGeom prst="rect">
@@ -13980,10 +14121,10 @@
             <a:r>
               <a:rPr lang="en-US" sz="1200" b="1" dirty="0">
                 <a:solidFill>
-                  <a:srgbClr val="FDE047"/>
-                </a:solidFill>
-              </a:rPr>
-              <a:t>Edge IoT &amp; Machine Learning Enhancements</a:t>
+                  <a:srgbClr val="FFFFFF"/>
+                </a:solidFill>
+              </a:rPr>
+              <a:t>Autonomous Control &amp; Mobile Deployment</a:t>
             </a:r>
             <a:endParaRPr lang="en-US" sz="1200" dirty="0"/>
           </a:p>
@@ -13991,13 +14132,13 @@
       </p:sp>
       <p:sp>
         <p:nvSpPr>
-          <p:cNvPr id="13" name="Text 11"/>
-          <p:cNvSpPr/>
-          <p:nvPr/>
-        </p:nvSpPr>
-        <p:spPr>
-          <a:xfrm>
-            <a:off x="1005840" y="2057400"/>
+          <p:cNvPr id="17" name="Text 15"/>
+          <p:cNvSpPr/>
+          <p:nvPr/>
+        </p:nvSpPr>
+        <p:spPr>
+          <a:xfrm>
+            <a:off x="6492240" y="2057400"/>
             <a:ext cx="4663440" cy="822960"/>
           </a:xfrm>
           <a:prstGeom prst="rect">
@@ -14016,153 +14157,12 @@
             <a:r>
               <a:rPr lang="en-US" sz="1000" dirty="0">
                 <a:solidFill>
-                  <a:srgbClr val="FFF7ED"/>
+                  <a:srgbClr val="F1F5F9"/>
                 </a:solidFill>
                 <a:latin typeface="Segoe UI" pitchFamily="34" charset="0"/>
                 <a:ea typeface="Segoe UI" pitchFamily="34" charset="-122"/>
                 <a:cs typeface="Segoe UI" pitchFamily="34" charset="-120"/>
               </a:rPr>
-              <a:t>• 1. Edge IoT RTU Hardware Bridge (MQTT Sparkplug B &amp; OPC-UA): Direct physical coupling with field Modbus TCP RTUs, MQTT brokers, and Siemens/Rockwell PLCs for live field wellhead sensor data ingestion.</a:t>
-            </a:r>
-            <a:endParaRPr lang="en-US" sz="1000" dirty="0"/>
-          </a:p>
-        </p:txBody>
-      </p:sp>
-      <p:sp>
-        <p:nvSpPr>
-          <p:cNvPr id="14" name="Text 12"/>
-          <p:cNvSpPr/>
-          <p:nvPr/>
-        </p:nvSpPr>
-        <p:spPr>
-          <a:xfrm>
-            <a:off x="1005840" y="2926080"/>
-            <a:ext cx="4663440" cy="822960"/>
-          </a:xfrm>
-          <a:prstGeom prst="rect">
-            <a:avLst/>
-          </a:prstGeom>
-          <a:noFill/>
-          <a:ln/>
-        </p:spPr>
-        <p:txBody>
-          <a:bodyPr wrap="square" rtlCol="0" anchor="ctr"/>
-          <a:lstStyle/>
-          <a:p>
-            <a:pPr indent="0" marL="0">
-              <a:buNone/>
-            </a:pPr>
-            <a:r>
-              <a:rPr lang="en-US" sz="1000" dirty="0">
-                <a:solidFill>
-                  <a:srgbClr val="FFF7ED"/>
-                </a:solidFill>
-                <a:latin typeface="Segoe UI" pitchFamily="34" charset="0"/>
-                <a:ea typeface="Segoe UI" pitchFamily="34" charset="-122"/>
-                <a:cs typeface="Segoe UI" pitchFamily="34" charset="-120"/>
-              </a:rPr>
-              <a:t>• 2. Physics-Informed Neural Networks (PINN): Embedding deep learning PINN surrogate models to solve 3D reservoir thermal diffusion equations in sub-milliseconds on edge AI accelerators.</a:t>
-            </a:r>
-            <a:endParaRPr lang="en-US" sz="1000" dirty="0"/>
-          </a:p>
-        </p:txBody>
-      </p:sp>
-      <p:sp>
-        <p:nvSpPr>
-          <p:cNvPr id="15" name="Shape 13"/>
-          <p:cNvSpPr/>
-          <p:nvPr/>
-        </p:nvSpPr>
-        <p:spPr>
-          <a:xfrm>
-            <a:off x="6217920" y="1463040"/>
-            <a:ext cx="5212080" cy="4754880"/>
-          </a:xfrm>
-          <a:prstGeom prst="roundRect">
-            <a:avLst>
-              <a:gd name="adj" fmla="val 1923"/>
-            </a:avLst>
-          </a:prstGeom>
-          <a:solidFill>
-            <a:srgbClr val="872808"/>
-          </a:solidFill>
-          <a:ln w="15240">
-            <a:solidFill>
-              <a:srgbClr val="FFFFFF"/>
-            </a:solidFill>
-            <a:prstDash val="solid"/>
-          </a:ln>
-        </p:spPr>
-      </p:sp>
-      <p:sp>
-        <p:nvSpPr>
-          <p:cNvPr id="16" name="Text 14"/>
-          <p:cNvSpPr/>
-          <p:nvPr/>
-        </p:nvSpPr>
-        <p:spPr>
-          <a:xfrm>
-            <a:off x="6492240" y="1645920"/>
-            <a:ext cx="4663440" cy="320040"/>
-          </a:xfrm>
-          <a:prstGeom prst="rect">
-            <a:avLst/>
-          </a:prstGeom>
-          <a:noFill/>
-          <a:ln/>
-        </p:spPr>
-        <p:txBody>
-          <a:bodyPr wrap="square" rtlCol="0" anchor="ctr"/>
-          <a:lstStyle/>
-          <a:p>
-            <a:pPr indent="0" marL="0">
-              <a:buNone/>
-            </a:pPr>
-            <a:r>
-              <a:rPr lang="en-US" sz="1200" b="1" dirty="0">
-                <a:solidFill>
-                  <a:srgbClr val="FFFFFF"/>
-                </a:solidFill>
-              </a:rPr>
-              <a:t>Autonomous Control &amp; Mobile Deployment</a:t>
-            </a:r>
-            <a:endParaRPr lang="en-US" sz="1200" dirty="0"/>
-          </a:p>
-        </p:txBody>
-      </p:sp>
-      <p:sp>
-        <p:nvSpPr>
-          <p:cNvPr id="17" name="Text 15"/>
-          <p:cNvSpPr/>
-          <p:nvPr/>
-        </p:nvSpPr>
-        <p:spPr>
-          <a:xfrm>
-            <a:off x="6492240" y="2057400"/>
-            <a:ext cx="4663440" cy="822960"/>
-          </a:xfrm>
-          <a:prstGeom prst="rect">
-            <a:avLst/>
-          </a:prstGeom>
-          <a:noFill/>
-          <a:ln/>
-        </p:spPr>
-        <p:txBody>
-          <a:bodyPr wrap="square" rtlCol="0" anchor="ctr"/>
-          <a:lstStyle/>
-          <a:p>
-            <a:pPr indent="0" marL="0">
-              <a:buNone/>
-            </a:pPr>
-            <a:r>
-              <a:rPr lang="en-US" sz="1000" dirty="0">
-                <a:solidFill>
-                  <a:srgbClr val="FFF7ED"/>
-                </a:solidFill>
-                <a:latin typeface="Segoe UI" pitchFamily="34" charset="0"/>
-                <a:ea typeface="Segoe UI" pitchFamily="34" charset="-122"/>
-                <a:cs typeface="Segoe UI" pitchFamily="34" charset="-120"/>
-              </a:rPr>
               <a:t>• 3. Autonomous Closed-Loop VFD Motor Modulation: Enabling autonomous Variable Frequency Drive (VFD) speed modulation, automatically throttling pump SPM upon detecting fluid pound or gas lock.</a:t>
             </a:r>
             <a:endParaRPr lang="en-US" sz="1000" dirty="0"/>
@@ -14196,7 +14196,7 @@
             <a:r>
               <a:rPr lang="en-US" sz="1000" dirty="0">
                 <a:solidFill>
-                  <a:srgbClr val="FFF7ED"/>
+                  <a:srgbClr val="F1F5F9"/>
                 </a:solidFill>
                 <a:latin typeface="Segoe UI" pitchFamily="34" charset="0"/>
                 <a:ea typeface="Segoe UI" pitchFamily="34" charset="-122"/>
@@ -14222,7 +14222,7 @@
     <p:bg>
       <p:bgPr>
         <a:solidFill>
-          <a:srgbClr val="C2410C"/>
+          <a:srgbClr val="0B0F19"/>
         </a:solidFill>
       </p:bgPr>
     </p:bg>
@@ -14249,17 +14249,17 @@
         <p:spPr>
           <a:xfrm>
             <a:off x="0" y="0"/>
-            <a:ext cx="12191695" cy="91440"/>
+            <a:ext cx="12191695" cy="73152"/>
           </a:xfrm>
           <a:prstGeom prst="rect">
             <a:avLst/>
           </a:prstGeom>
           <a:solidFill>
-            <a:srgbClr val="FFFFFF"/>
+            <a:srgbClr val="FF6B00"/>
           </a:solidFill>
           <a:ln w="12700">
             <a:solidFill>
-              <a:srgbClr val="FFFFFF"/>
+              <a:srgbClr val="FF6B00"/>
             </a:solidFill>
             <a:prstDash val="solid"/>
           </a:ln>
@@ -14282,11 +14282,11 @@
             </a:avLst>
           </a:prstGeom>
           <a:solidFill>
-            <a:srgbClr val="451203"/>
+            <a:srgbClr val="2A1708"/>
           </a:solidFill>
           <a:ln w="15240">
             <a:solidFill>
-              <a:srgbClr val="FFFFFF"/>
+              <a:srgbClr val="FF6B00"/>
             </a:solidFill>
             <a:prstDash val="solid"/>
           </a:ln>
@@ -14319,7 +14319,7 @@
             <a:r>
               <a:rPr lang="en-US" sz="950" b="1" dirty="0">
                 <a:solidFill>
-                  <a:srgbClr val="FDE047"/>
+                  <a:srgbClr val="FFA726"/>
                 </a:solidFill>
               </a:rPr>
               <a:t>⚙  BIBLIOGRAPHY &amp; STANDARDS</a:t>
@@ -14384,7 +14384,7 @@
           <a:noFill/>
           <a:ln w="19050">
             <a:solidFill>
-              <a:srgbClr val="E06528"/>
+              <a:srgbClr val="1E293B"/>
             </a:solidFill>
             <a:prstDash val="solid"/>
           </a:ln>
@@ -14399,7 +14399,7 @@
         <p:spPr>
           <a:xfrm>
             <a:off x="731520" y="1234440"/>
-            <a:ext cx="2560320" cy="0"/>
+            <a:ext cx="2286000" cy="0"/>
           </a:xfrm>
           <a:prstGeom prst="line">
             <a:avLst/>
@@ -14407,7 +14407,7 @@
           <a:noFill/>
           <a:ln w="31750">
             <a:solidFill>
-              <a:srgbClr val="FFFFFF"/>
+              <a:srgbClr val="FF6B00"/>
             </a:solidFill>
             <a:prstDash val="solid"/>
           </a:ln>
@@ -14430,7 +14430,7 @@
           <a:noFill/>
           <a:ln w="12700">
             <a:solidFill>
-              <a:srgbClr val="E06528"/>
+              <a:srgbClr val="1E293B"/>
             </a:solidFill>
             <a:prstDash val="solid"/>
           </a:ln>
@@ -14463,7 +14463,7 @@
             <a:r>
               <a:rPr lang="en-US" sz="900" dirty="0">
                 <a:solidFill>
-                  <a:srgbClr val="FED7AA"/>
+                  <a:srgbClr val="94A3B8"/>
                 </a:solidFill>
                 <a:latin typeface="Segoe UI" pitchFamily="34" charset="0"/>
                 <a:ea typeface="Segoe UI" pitchFamily="34" charset="-122"/>
@@ -14502,7 +14502,7 @@
             <a:r>
               <a:rPr lang="en-US" sz="950" b="1" dirty="0">
                 <a:solidFill>
-                  <a:srgbClr val="FFFFFF"/>
+                  <a:srgbClr val="FF6B00"/>
                 </a:solidFill>
                 <a:latin typeface="Segoe UI" pitchFamily="34" charset="0"/>
                 <a:ea typeface="Segoe UI" pitchFamily="34" charset="-122"/>
@@ -14531,11 +14531,11 @@
             </a:avLst>
           </a:prstGeom>
           <a:solidFill>
-            <a:srgbClr val="6B2006"/>
+            <a:srgbClr val="121826"/>
           </a:solidFill>
           <a:ln w="15240">
             <a:solidFill>
-              <a:srgbClr val="E06528"/>
+              <a:srgbClr val="1E293B"/>
             </a:solidFill>
             <a:prstDash val="solid"/>
           </a:ln>
@@ -14568,7 +14568,7 @@
             <a:r>
               <a:rPr lang="en-US" sz="1200" b="1" dirty="0">
                 <a:solidFill>
-                  <a:srgbClr val="FDE047"/>
+                  <a:srgbClr val="FF8C38"/>
                 </a:solidFill>
               </a:rPr>
               <a:t>Industry Standards &amp; Technical Monographs</a:t>
@@ -14604,7 +14604,7 @@
             <a:r>
               <a:rPr lang="en-US" sz="1000" dirty="0">
                 <a:solidFill>
-                  <a:srgbClr val="FFF7ED"/>
+                  <a:srgbClr val="F1F5F9"/>
                 </a:solidFill>
                 <a:latin typeface="Segoe UI" pitchFamily="34" charset="0"/>
                 <a:ea typeface="Segoe UI" pitchFamily="34" charset="-122"/>
@@ -14643,7 +14643,7 @@
             <a:r>
               <a:rPr lang="en-US" sz="1000" dirty="0">
                 <a:solidFill>
-                  <a:srgbClr val="FFF7ED"/>
+                  <a:srgbClr val="F1F5F9"/>
                 </a:solidFill>
                 <a:latin typeface="Segoe UI" pitchFamily="34" charset="0"/>
                 <a:ea typeface="Segoe UI" pitchFamily="34" charset="-122"/>
@@ -14682,7 +14682,7 @@
             <a:r>
               <a:rPr lang="en-US" sz="1000" dirty="0">
                 <a:solidFill>
-                  <a:srgbClr val="FFF7ED"/>
+                  <a:srgbClr val="F1F5F9"/>
                 </a:solidFill>
                 <a:latin typeface="Segoe UI" pitchFamily="34" charset="0"/>
                 <a:ea typeface="Segoe UI" pitchFamily="34" charset="-122"/>
@@ -14721,7 +14721,7 @@
             <a:r>
               <a:rPr lang="en-US" sz="1000" dirty="0">
                 <a:solidFill>
-                  <a:srgbClr val="FFF7ED"/>
+                  <a:srgbClr val="F1F5F9"/>
                 </a:solidFill>
                 <a:latin typeface="Segoe UI" pitchFamily="34" charset="0"/>
                 <a:ea typeface="Segoe UI" pitchFamily="34" charset="-122"/>
@@ -14750,11 +14750,11 @@
             </a:avLst>
           </a:prstGeom>
           <a:solidFill>
-            <a:srgbClr val="6B2006"/>
+            <a:srgbClr val="121826"/>
           </a:solidFill>
           <a:ln w="15240">
             <a:solidFill>
-              <a:srgbClr val="E06528"/>
+              <a:srgbClr val="1E293B"/>
             </a:solidFill>
             <a:prstDash val="solid"/>
           </a:ln>
@@ -14787,7 +14787,7 @@
             <a:r>
               <a:rPr lang="en-US" sz="1200" b="1" dirty="0">
                 <a:solidFill>
-                  <a:srgbClr val="FDE047"/>
+                  <a:srgbClr val="FF8C38"/>
                 </a:solidFill>
               </a:rPr>
               <a:t>Petroleum Engineering Literature &amp; Standards</a:t>
@@ -14823,7 +14823,7 @@
             <a:r>
               <a:rPr lang="en-US" sz="1000" dirty="0">
                 <a:solidFill>
-                  <a:srgbClr val="FFF7ED"/>
+                  <a:srgbClr val="F1F5F9"/>
                 </a:solidFill>
                 <a:latin typeface="Segoe UI" pitchFamily="34" charset="0"/>
                 <a:ea typeface="Segoe UI" pitchFamily="34" charset="-122"/>
@@ -14862,7 +14862,7 @@
             <a:r>
               <a:rPr lang="en-US" sz="1000" dirty="0">
                 <a:solidFill>
-                  <a:srgbClr val="FFF7ED"/>
+                  <a:srgbClr val="F1F5F9"/>
                 </a:solidFill>
                 <a:latin typeface="Segoe UI" pitchFamily="34" charset="0"/>
                 <a:ea typeface="Segoe UI" pitchFamily="34" charset="-122"/>
@@ -14901,7 +14901,7 @@
             <a:r>
               <a:rPr lang="en-US" sz="1000" dirty="0">
                 <a:solidFill>
-                  <a:srgbClr val="FFF7ED"/>
+                  <a:srgbClr val="F1F5F9"/>
                 </a:solidFill>
                 <a:latin typeface="Segoe UI" pitchFamily="34" charset="0"/>
                 <a:ea typeface="Segoe UI" pitchFamily="34" charset="-122"/>
@@ -14940,7 +14940,7 @@
             <a:r>
               <a:rPr lang="en-US" sz="1000" dirty="0">
                 <a:solidFill>
-                  <a:srgbClr val="FFF7ED"/>
+                  <a:srgbClr val="F1F5F9"/>
                 </a:solidFill>
                 <a:latin typeface="Segoe UI" pitchFamily="34" charset="0"/>
                 <a:ea typeface="Segoe UI" pitchFamily="34" charset="-122"/>
@@ -14966,7 +14966,7 @@
     <p:bg>
       <p:bgPr>
         <a:solidFill>
-          <a:srgbClr val="C2410C"/>
+          <a:srgbClr val="0B0F19"/>
         </a:solidFill>
       </p:bgPr>
     </p:bg>
@@ -14993,17 +14993,17 @@
         <p:spPr>
           <a:xfrm>
             <a:off x="0" y="0"/>
-            <a:ext cx="12191695" cy="91440"/>
+            <a:ext cx="12191695" cy="73152"/>
           </a:xfrm>
           <a:prstGeom prst="rect">
             <a:avLst/>
           </a:prstGeom>
           <a:solidFill>
-            <a:srgbClr val="FFFFFF"/>
+            <a:srgbClr val="FF6B00"/>
           </a:solidFill>
           <a:ln w="12700">
             <a:solidFill>
-              <a:srgbClr val="FFFFFF"/>
+              <a:srgbClr val="FF6B00"/>
             </a:solidFill>
             <a:prstDash val="solid"/>
           </a:ln>
@@ -15026,11 +15026,11 @@
             </a:avLst>
           </a:prstGeom>
           <a:solidFill>
-            <a:srgbClr val="451203"/>
+            <a:srgbClr val="2A1708"/>
           </a:solidFill>
           <a:ln w="15240">
             <a:solidFill>
-              <a:srgbClr val="FFFFFF"/>
+              <a:srgbClr val="FF6B00"/>
             </a:solidFill>
             <a:prstDash val="solid"/>
           </a:ln>
@@ -15063,7 +15063,7 @@
             <a:r>
               <a:rPr lang="en-US" sz="950" b="1" dirty="0">
                 <a:solidFill>
-                  <a:srgbClr val="FDE047"/>
+                  <a:srgbClr val="FFA726"/>
                 </a:solidFill>
               </a:rPr>
               <a:t>⚙  ENGINEERING BACKGROUND</a:t>
@@ -15128,7 +15128,7 @@
           <a:noFill/>
           <a:ln w="19050">
             <a:solidFill>
-              <a:srgbClr val="E06528"/>
+              <a:srgbClr val="1E293B"/>
             </a:solidFill>
             <a:prstDash val="solid"/>
           </a:ln>
@@ -15143,7 +15143,7 @@
         <p:spPr>
           <a:xfrm>
             <a:off x="731520" y="1234440"/>
-            <a:ext cx="2560320" cy="0"/>
+            <a:ext cx="2286000" cy="0"/>
           </a:xfrm>
           <a:prstGeom prst="line">
             <a:avLst/>
@@ -15151,7 +15151,7 @@
           <a:noFill/>
           <a:ln w="31750">
             <a:solidFill>
-              <a:srgbClr val="FFFFFF"/>
+              <a:srgbClr val="FF6B00"/>
             </a:solidFill>
             <a:prstDash val="solid"/>
           </a:ln>
@@ -15174,7 +15174,7 @@
           <a:noFill/>
           <a:ln w="12700">
             <a:solidFill>
-              <a:srgbClr val="E06528"/>
+              <a:srgbClr val="1E293B"/>
             </a:solidFill>
             <a:prstDash val="solid"/>
           </a:ln>
@@ -15207,7 +15207,7 @@
             <a:r>
               <a:rPr lang="en-US" sz="900" dirty="0">
                 <a:solidFill>
-                  <a:srgbClr val="FED7AA"/>
+                  <a:srgbClr val="94A3B8"/>
                 </a:solidFill>
                 <a:latin typeface="Segoe UI" pitchFamily="34" charset="0"/>
                 <a:ea typeface="Segoe UI" pitchFamily="34" charset="-122"/>
@@ -15246,7 +15246,7 @@
             <a:r>
               <a:rPr lang="en-US" sz="950" b="1" dirty="0">
                 <a:solidFill>
-                  <a:srgbClr val="FFFFFF"/>
+                  <a:srgbClr val="FF6B00"/>
                 </a:solidFill>
                 <a:latin typeface="Segoe UI" pitchFamily="34" charset="0"/>
                 <a:ea typeface="Segoe UI" pitchFamily="34" charset="-122"/>
@@ -15275,11 +15275,11 @@
             </a:avLst>
           </a:prstGeom>
           <a:solidFill>
-            <a:srgbClr val="6B2006"/>
+            <a:srgbClr val="121826"/>
           </a:solidFill>
           <a:ln w="15240">
             <a:solidFill>
-              <a:srgbClr val="E06528"/>
+              <a:srgbClr val="1E293B"/>
             </a:solidFill>
             <a:prstDash val="solid"/>
           </a:ln>
@@ -15312,7 +15312,7 @@
             <a:r>
               <a:rPr lang="en-US" sz="1200" b="1" dirty="0">
                 <a:solidFill>
-                  <a:srgbClr val="FDE047"/>
+                  <a:srgbClr val="FF8C38"/>
                 </a:solidFill>
               </a:rPr>
               <a:t>1. Fluid Composition &amp; Physical Properties</a:t>
@@ -15348,7 +15348,7 @@
             <a:r>
               <a:rPr lang="en-US" sz="1000" dirty="0">
                 <a:solidFill>
-                  <a:srgbClr val="FFF7ED"/>
+                  <a:srgbClr val="F1F5F9"/>
                 </a:solidFill>
                 <a:latin typeface="Segoe UI" pitchFamily="34" charset="0"/>
                 <a:ea typeface="Segoe UI" pitchFamily="34" charset="-122"/>
@@ -15387,7 +15387,7 @@
             <a:r>
               <a:rPr lang="en-US" sz="1000" dirty="0">
                 <a:solidFill>
-                  <a:srgbClr val="FFF7ED"/>
+                  <a:srgbClr val="F1F5F9"/>
                 </a:solidFill>
                 <a:latin typeface="Segoe UI" pitchFamily="34" charset="0"/>
                 <a:ea typeface="Segoe UI" pitchFamily="34" charset="-122"/>
@@ -15426,7 +15426,7 @@
             <a:r>
               <a:rPr lang="en-US" sz="1000" dirty="0">
                 <a:solidFill>
-                  <a:srgbClr val="FFF7ED"/>
+                  <a:srgbClr val="F1F5F9"/>
                 </a:solidFill>
                 <a:latin typeface="Segoe UI" pitchFamily="34" charset="0"/>
                 <a:ea typeface="Segoe UI" pitchFamily="34" charset="-122"/>
@@ -15455,11 +15455,11 @@
             </a:avLst>
           </a:prstGeom>
           <a:solidFill>
-            <a:srgbClr val="6B2006"/>
+            <a:srgbClr val="121826"/>
           </a:solidFill>
           <a:ln w="15240">
             <a:solidFill>
-              <a:srgbClr val="E06528"/>
+              <a:srgbClr val="1E293B"/>
             </a:solidFill>
             <a:prstDash val="solid"/>
           </a:ln>
@@ -15492,7 +15492,7 @@
             <a:r>
               <a:rPr lang="en-US" sz="1200" b="1" dirty="0">
                 <a:solidFill>
-                  <a:srgbClr val="FDE047"/>
+                  <a:srgbClr val="FF8C38"/>
                 </a:solidFill>
               </a:rPr>
               <a:t>2. Darcy Law Limits &amp; Production Challenges</a:t>
@@ -15528,7 +15528,7 @@
             <a:r>
               <a:rPr lang="en-US" sz="1000" dirty="0">
                 <a:solidFill>
-                  <a:srgbClr val="FFF7ED"/>
+                  <a:srgbClr val="F1F5F9"/>
                 </a:solidFill>
                 <a:latin typeface="Segoe UI" pitchFamily="34" charset="0"/>
                 <a:ea typeface="Segoe UI" pitchFamily="34" charset="-122"/>
@@ -15567,7 +15567,7 @@
             <a:r>
               <a:rPr lang="en-US" sz="1000" dirty="0">
                 <a:solidFill>
-                  <a:srgbClr val="FFF7ED"/>
+                  <a:srgbClr val="F1F5F9"/>
                 </a:solidFill>
                 <a:latin typeface="Segoe UI" pitchFamily="34" charset="0"/>
                 <a:ea typeface="Segoe UI" pitchFamily="34" charset="-122"/>
@@ -15606,7 +15606,7 @@
             <a:r>
               <a:rPr lang="en-US" sz="1000" dirty="0">
                 <a:solidFill>
-                  <a:srgbClr val="FFF7ED"/>
+                  <a:srgbClr val="F1F5F9"/>
                 </a:solidFill>
                 <a:latin typeface="Segoe UI" pitchFamily="34" charset="0"/>
                 <a:ea typeface="Segoe UI" pitchFamily="34" charset="-122"/>
@@ -15632,7 +15632,7 @@
     <p:bg>
       <p:bgPr>
         <a:solidFill>
-          <a:srgbClr val="C2410C"/>
+          <a:srgbClr val="0B0F19"/>
         </a:solidFill>
       </p:bgPr>
     </p:bg>
@@ -15659,17 +15659,17 @@
         <p:spPr>
           <a:xfrm>
             <a:off x="0" y="0"/>
-            <a:ext cx="12191695" cy="91440"/>
+            <a:ext cx="12191695" cy="73152"/>
           </a:xfrm>
           <a:prstGeom prst="rect">
             <a:avLst/>
           </a:prstGeom>
           <a:solidFill>
-            <a:srgbClr val="FFFFFF"/>
+            <a:srgbClr val="FF6B00"/>
           </a:solidFill>
           <a:ln w="12700">
             <a:solidFill>
-              <a:srgbClr val="FFFFFF"/>
+              <a:srgbClr val="FF6B00"/>
             </a:solidFill>
             <a:prstDash val="solid"/>
           </a:ln>
@@ -15692,11 +15692,11 @@
             </a:avLst>
           </a:prstGeom>
           <a:solidFill>
-            <a:srgbClr val="451203"/>
+            <a:srgbClr val="2A1708"/>
           </a:solidFill>
           <a:ln w="15240">
             <a:solidFill>
-              <a:srgbClr val="FFFFFF"/>
+              <a:srgbClr val="FF6B00"/>
             </a:solidFill>
             <a:prstDash val="solid"/>
           </a:ln>
@@ -15729,7 +15729,7 @@
             <a:r>
               <a:rPr lang="en-US" sz="950" b="1" dirty="0">
                 <a:solidFill>
-                  <a:srgbClr val="FDE047"/>
+                  <a:srgbClr val="FFA726"/>
                 </a:solidFill>
               </a:rPr>
               <a:t>⚙  THERMAL ENHANCED OIL RECOVERY</a:t>
@@ -15794,7 +15794,7 @@
           <a:noFill/>
           <a:ln w="19050">
             <a:solidFill>
-              <a:srgbClr val="E06528"/>
+              <a:srgbClr val="1E293B"/>
             </a:solidFill>
             <a:prstDash val="solid"/>
           </a:ln>
@@ -15809,7 +15809,7 @@
         <p:spPr>
           <a:xfrm>
             <a:off x="731520" y="1234440"/>
-            <a:ext cx="2560320" cy="0"/>
+            <a:ext cx="2286000" cy="0"/>
           </a:xfrm>
           <a:prstGeom prst="line">
             <a:avLst/>
@@ -15817,7 +15817,7 @@
           <a:noFill/>
           <a:ln w="31750">
             <a:solidFill>
-              <a:srgbClr val="FFFFFF"/>
+              <a:srgbClr val="FF6B00"/>
             </a:solidFill>
             <a:prstDash val="solid"/>
           </a:ln>
@@ -15840,7 +15840,7 @@
           <a:noFill/>
           <a:ln w="12700">
             <a:solidFill>
-              <a:srgbClr val="E06528"/>
+              <a:srgbClr val="1E293B"/>
             </a:solidFill>
             <a:prstDash val="solid"/>
           </a:ln>
@@ -15873,7 +15873,7 @@
             <a:r>
               <a:rPr lang="en-US" sz="900" dirty="0">
                 <a:solidFill>
-                  <a:srgbClr val="FED7AA"/>
+                  <a:srgbClr val="94A3B8"/>
                 </a:solidFill>
                 <a:latin typeface="Segoe UI" pitchFamily="34" charset="0"/>
                 <a:ea typeface="Segoe UI" pitchFamily="34" charset="-122"/>
@@ -15912,7 +15912,7 @@
             <a:r>
               <a:rPr lang="en-US" sz="950" b="1" dirty="0">
                 <a:solidFill>
-                  <a:srgbClr val="FFFFFF"/>
+                  <a:srgbClr val="FF6B00"/>
                 </a:solidFill>
                 <a:latin typeface="Segoe UI" pitchFamily="34" charset="0"/>
                 <a:ea typeface="Segoe UI" pitchFamily="34" charset="-122"/>
@@ -15941,11 +15941,11 @@
             </a:avLst>
           </a:prstGeom>
           <a:solidFill>
-            <a:srgbClr val="6B2006"/>
+            <a:srgbClr val="121826"/>
           </a:solidFill>
           <a:ln w="15240">
             <a:solidFill>
-              <a:srgbClr val="E06528"/>
+              <a:srgbClr val="1E293B"/>
             </a:solidFill>
             <a:prstDash val="solid"/>
           </a:ln>
@@ -15978,7 +15978,7 @@
             <a:r>
               <a:rPr lang="en-US" sz="1200" b="1" dirty="0">
                 <a:solidFill>
-                  <a:srgbClr val="FDE047"/>
+                  <a:srgbClr val="FF8C38"/>
                 </a:solidFill>
               </a:rPr>
               <a:t>Stage 1: Steam Injection &amp; Stage 2: Heat Soaking</a:t>
@@ -16014,7 +16014,7 @@
             <a:r>
               <a:rPr lang="en-US" sz="1000" dirty="0">
                 <a:solidFill>
-                  <a:srgbClr val="FFF7ED"/>
+                  <a:srgbClr val="F1F5F9"/>
                 </a:solidFill>
                 <a:latin typeface="Segoe UI" pitchFamily="34" charset="0"/>
                 <a:ea typeface="Segoe UI" pitchFamily="34" charset="-122"/>
@@ -16053,7 +16053,7 @@
             <a:r>
               <a:rPr lang="en-US" sz="1000" dirty="0">
                 <a:solidFill>
-                  <a:srgbClr val="FFF7ED"/>
+                  <a:srgbClr val="F1F5F9"/>
                 </a:solidFill>
                 <a:latin typeface="Segoe UI" pitchFamily="34" charset="0"/>
                 <a:ea typeface="Segoe UI" pitchFamily="34" charset="-122"/>
@@ -16092,7 +16092,7 @@
             <a:r>
               <a:rPr lang="en-US" sz="1000" dirty="0">
                 <a:solidFill>
-                  <a:srgbClr val="FFF7ED"/>
+                  <a:srgbClr val="F1F5F9"/>
                 </a:solidFill>
                 <a:latin typeface="Segoe UI" pitchFamily="34" charset="0"/>
                 <a:ea typeface="Segoe UI" pitchFamily="34" charset="-122"/>
@@ -16121,11 +16121,11 @@
             </a:avLst>
           </a:prstGeom>
           <a:solidFill>
-            <a:srgbClr val="6B2006"/>
+            <a:srgbClr val="121826"/>
           </a:solidFill>
           <a:ln w="15240">
             <a:solidFill>
-              <a:srgbClr val="E06528"/>
+              <a:srgbClr val="1E293B"/>
             </a:solidFill>
             <a:prstDash val="solid"/>
           </a:ln>
@@ -16158,7 +16158,7 @@
             <a:r>
               <a:rPr lang="en-US" sz="1200" b="1" dirty="0">
                 <a:solidFill>
-                  <a:srgbClr val="FDE047"/>
+                  <a:srgbClr val="FF8C38"/>
                 </a:solidFill>
               </a:rPr>
               <a:t>Stage 3: Production Drawdown &amp; Re-Steaming Cycle</a:t>
@@ -16194,7 +16194,7 @@
             <a:r>
               <a:rPr lang="en-US" sz="1000" dirty="0">
                 <a:solidFill>
-                  <a:srgbClr val="FFF7ED"/>
+                  <a:srgbClr val="F1F5F9"/>
                 </a:solidFill>
                 <a:latin typeface="Segoe UI" pitchFamily="34" charset="0"/>
                 <a:ea typeface="Segoe UI" pitchFamily="34" charset="-122"/>
@@ -16233,7 +16233,7 @@
             <a:r>
               <a:rPr lang="en-US" sz="1000" dirty="0">
                 <a:solidFill>
-                  <a:srgbClr val="FFF7ED"/>
+                  <a:srgbClr val="F1F5F9"/>
                 </a:solidFill>
                 <a:latin typeface="Segoe UI" pitchFamily="34" charset="0"/>
                 <a:ea typeface="Segoe UI" pitchFamily="34" charset="-122"/>
@@ -16272,7 +16272,7 @@
             <a:r>
               <a:rPr lang="en-US" sz="1000" dirty="0">
                 <a:solidFill>
-                  <a:srgbClr val="FFF7ED"/>
+                  <a:srgbClr val="F1F5F9"/>
                 </a:solidFill>
                 <a:latin typeface="Segoe UI" pitchFamily="34" charset="0"/>
                 <a:ea typeface="Segoe UI" pitchFamily="34" charset="-122"/>
@@ -16298,7 +16298,7 @@
     <p:bg>
       <p:bgPr>
         <a:solidFill>
-          <a:srgbClr val="C2410C"/>
+          <a:srgbClr val="0B0F19"/>
         </a:solidFill>
       </p:bgPr>
     </p:bg>
@@ -16325,17 +16325,17 @@
         <p:spPr>
           <a:xfrm>
             <a:off x="0" y="0"/>
-            <a:ext cx="12191695" cy="91440"/>
+            <a:ext cx="12191695" cy="73152"/>
           </a:xfrm>
           <a:prstGeom prst="rect">
             <a:avLst/>
           </a:prstGeom>
           <a:solidFill>
-            <a:srgbClr val="FFFFFF"/>
+            <a:srgbClr val="FF6B00"/>
           </a:solidFill>
           <a:ln w="12700">
             <a:solidFill>
-              <a:srgbClr val="FFFFFF"/>
+              <a:srgbClr val="FF6B00"/>
             </a:solidFill>
             <a:prstDash val="solid"/>
           </a:ln>
@@ -16358,11 +16358,11 @@
             </a:avLst>
           </a:prstGeom>
           <a:solidFill>
-            <a:srgbClr val="451203"/>
+            <a:srgbClr val="2A1708"/>
           </a:solidFill>
           <a:ln w="15240">
             <a:solidFill>
-              <a:srgbClr val="FFFFFF"/>
+              <a:srgbClr val="FF6B00"/>
             </a:solidFill>
             <a:prstDash val="solid"/>
           </a:ln>
@@ -16395,7 +16395,7 @@
             <a:r>
               <a:rPr lang="en-US" sz="950" b="1" dirty="0">
                 <a:solidFill>
-                  <a:srgbClr val="FDE047"/>
+                  <a:srgbClr val="FFA726"/>
                 </a:solidFill>
               </a:rPr>
               <a:t>⚙  ARTIFICIAL LIFT MECHANICS</a:t>
@@ -16460,7 +16460,7 @@
           <a:noFill/>
           <a:ln w="19050">
             <a:solidFill>
-              <a:srgbClr val="E06528"/>
+              <a:srgbClr val="1E293B"/>
             </a:solidFill>
             <a:prstDash val="solid"/>
           </a:ln>
@@ -16475,7 +16475,7 @@
         <p:spPr>
           <a:xfrm>
             <a:off x="731520" y="1234440"/>
-            <a:ext cx="2560320" cy="0"/>
+            <a:ext cx="2286000" cy="0"/>
           </a:xfrm>
           <a:prstGeom prst="line">
             <a:avLst/>
@@ -16483,7 +16483,7 @@
           <a:noFill/>
           <a:ln w="31750">
             <a:solidFill>
-              <a:srgbClr val="FFFFFF"/>
+              <a:srgbClr val="FF6B00"/>
             </a:solidFill>
             <a:prstDash val="solid"/>
           </a:ln>
@@ -16506,7 +16506,7 @@
           <a:noFill/>
           <a:ln w="12700">
             <a:solidFill>
-              <a:srgbClr val="E06528"/>
+              <a:srgbClr val="1E293B"/>
             </a:solidFill>
             <a:prstDash val="solid"/>
           </a:ln>
@@ -16539,7 +16539,7 @@
             <a:r>
               <a:rPr lang="en-US" sz="900" dirty="0">
                 <a:solidFill>
-                  <a:srgbClr val="FED7AA"/>
+                  <a:srgbClr val="94A3B8"/>
                 </a:solidFill>
                 <a:latin typeface="Segoe UI" pitchFamily="34" charset="0"/>
                 <a:ea typeface="Segoe UI" pitchFamily="34" charset="-122"/>
@@ -16578,7 +16578,7 @@
             <a:r>
               <a:rPr lang="en-US" sz="950" b="1" dirty="0">
                 <a:solidFill>
-                  <a:srgbClr val="FFFFFF"/>
+                  <a:srgbClr val="FF6B00"/>
                 </a:solidFill>
                 <a:latin typeface="Segoe UI" pitchFamily="34" charset="0"/>
                 <a:ea typeface="Segoe UI" pitchFamily="34" charset="-122"/>
@@ -16607,7 +16607,187 @@
             </a:avLst>
           </a:prstGeom>
           <a:solidFill>
-            <a:srgbClr val="6B2006"/>
+            <a:srgbClr val="121826"/>
+          </a:solidFill>
+          <a:ln w="15240">
+            <a:solidFill>
+              <a:srgbClr val="1E293B"/>
+            </a:solidFill>
+            <a:prstDash val="solid"/>
+          </a:ln>
+        </p:spPr>
+      </p:sp>
+      <p:sp>
+        <p:nvSpPr>
+          <p:cNvPr id="12" name="Text 10"/>
+          <p:cNvSpPr/>
+          <p:nvPr/>
+        </p:nvSpPr>
+        <p:spPr>
+          <a:xfrm>
+            <a:off x="1005840" y="1645920"/>
+            <a:ext cx="4663440" cy="320040"/>
+          </a:xfrm>
+          <a:prstGeom prst="rect">
+            <a:avLst/>
+          </a:prstGeom>
+          <a:noFill/>
+          <a:ln/>
+        </p:spPr>
+        <p:txBody>
+          <a:bodyPr wrap="square" rtlCol="0" anchor="ctr"/>
+          <a:lstStyle/>
+          <a:p>
+            <a:pPr indent="0" marL="0">
+              <a:buNone/>
+            </a:pPr>
+            <a:r>
+              <a:rPr lang="en-US" sz="1200" b="1" dirty="0">
+                <a:solidFill>
+                  <a:srgbClr val="FF8C38"/>
+                </a:solidFill>
+              </a:rPr>
+              <a:t>Sucker Rod Pumping Unit Operation</a:t>
+            </a:r>
+            <a:endParaRPr lang="en-US" sz="1200" dirty="0"/>
+          </a:p>
+        </p:txBody>
+      </p:sp>
+      <p:sp>
+        <p:nvSpPr>
+          <p:cNvPr id="13" name="Text 11"/>
+          <p:cNvSpPr/>
+          <p:nvPr/>
+        </p:nvSpPr>
+        <p:spPr>
+          <a:xfrm>
+            <a:off x="1005840" y="2057400"/>
+            <a:ext cx="4663440" cy="822960"/>
+          </a:xfrm>
+          <a:prstGeom prst="rect">
+            <a:avLst/>
+          </a:prstGeom>
+          <a:noFill/>
+          <a:ln/>
+        </p:spPr>
+        <p:txBody>
+          <a:bodyPr wrap="square" rtlCol="0" anchor="ctr"/>
+          <a:lstStyle/>
+          <a:p>
+            <a:pPr indent="0" marL="0">
+              <a:buNone/>
+            </a:pPr>
+            <a:r>
+              <a:rPr lang="en-US" sz="1000" dirty="0">
+                <a:solidFill>
+                  <a:srgbClr val="F1F5F9"/>
+                </a:solidFill>
+                <a:latin typeface="Segoe UI" pitchFamily="34" charset="0"/>
+                <a:ea typeface="Segoe UI" pitchFamily="34" charset="-122"/>
+                <a:cs typeface="Segoe UI" pitchFamily="34" charset="-120"/>
+              </a:rPr>
+              <a:t>• Surface Walking Beam: Converts electric motor rotary torque into reciprocating vertical stroke (typically 6 - 10 SPM with 86 - 120 inch stroke).</a:t>
+            </a:r>
+            <a:endParaRPr lang="en-US" sz="1000" dirty="0"/>
+          </a:p>
+        </p:txBody>
+      </p:sp>
+      <p:sp>
+        <p:nvSpPr>
+          <p:cNvPr id="14" name="Text 12"/>
+          <p:cNvSpPr/>
+          <p:nvPr/>
+        </p:nvSpPr>
+        <p:spPr>
+          <a:xfrm>
+            <a:off x="1005840" y="2926080"/>
+            <a:ext cx="4663440" cy="822960"/>
+          </a:xfrm>
+          <a:prstGeom prst="rect">
+            <a:avLst/>
+          </a:prstGeom>
+          <a:noFill/>
+          <a:ln/>
+        </p:spPr>
+        <p:txBody>
+          <a:bodyPr wrap="square" rtlCol="0" anchor="ctr"/>
+          <a:lstStyle/>
+          <a:p>
+            <a:pPr indent="0" marL="0">
+              <a:buNone/>
+            </a:pPr>
+            <a:r>
+              <a:rPr lang="en-US" sz="1000" dirty="0">
+                <a:solidFill>
+                  <a:srgbClr val="F1F5F9"/>
+                </a:solidFill>
+                <a:latin typeface="Segoe UI" pitchFamily="34" charset="0"/>
+                <a:ea typeface="Segoe UI" pitchFamily="34" charset="-122"/>
+                <a:cs typeface="Segoe UI" pitchFamily="34" charset="-120"/>
+              </a:rPr>
+              <a:t>• Rod String Elasticity: 1,200m continuous steel rod behaves like an elastic spring with inherent resonant frequencies and longitudinal wave travel.</a:t>
+            </a:r>
+            <a:endParaRPr lang="en-US" sz="1000" dirty="0"/>
+          </a:p>
+        </p:txBody>
+      </p:sp>
+      <p:sp>
+        <p:nvSpPr>
+          <p:cNvPr id="15" name="Text 13"/>
+          <p:cNvSpPr/>
+          <p:nvPr/>
+        </p:nvSpPr>
+        <p:spPr>
+          <a:xfrm>
+            <a:off x="1005840" y="3794760"/>
+            <a:ext cx="4663440" cy="822960"/>
+          </a:xfrm>
+          <a:prstGeom prst="rect">
+            <a:avLst/>
+          </a:prstGeom>
+          <a:noFill/>
+          <a:ln/>
+        </p:spPr>
+        <p:txBody>
+          <a:bodyPr wrap="square" rtlCol="0" anchor="ctr"/>
+          <a:lstStyle/>
+          <a:p>
+            <a:pPr indent="0" marL="0">
+              <a:buNone/>
+            </a:pPr>
+            <a:r>
+              <a:rPr lang="en-US" sz="1000" dirty="0">
+                <a:solidFill>
+                  <a:srgbClr val="F1F5F9"/>
+                </a:solidFill>
+                <a:latin typeface="Segoe UI" pitchFamily="34" charset="0"/>
+                <a:ea typeface="Segoe UI" pitchFamily="34" charset="-122"/>
+                <a:cs typeface="Segoe UI" pitchFamily="34" charset="-120"/>
+              </a:rPr>
+              <a:t>• Downhole Valve Action: Upstroke lifts the fluid column with closed traveling valve; downstroke plunges the rod through fluid.</a:t>
+            </a:r>
+            <a:endParaRPr lang="en-US" sz="1000" dirty="0"/>
+          </a:p>
+        </p:txBody>
+      </p:sp>
+      <p:sp>
+        <p:nvSpPr>
+          <p:cNvPr id="16" name="Shape 14"/>
+          <p:cNvSpPr/>
+          <p:nvPr/>
+        </p:nvSpPr>
+        <p:spPr>
+          <a:xfrm>
+            <a:off x="6217920" y="1463040"/>
+            <a:ext cx="5212080" cy="4754880"/>
+          </a:xfrm>
+          <a:prstGeom prst="roundRect">
+            <a:avLst>
+              <a:gd name="adj" fmla="val 1923"/>
+            </a:avLst>
+          </a:prstGeom>
+          <a:solidFill>
+            <a:srgbClr val="172033"/>
           </a:solidFill>
           <a:ln w="15240">
             <a:solidFill>
@@ -16619,13 +16799,13 @@
       </p:sp>
       <p:sp>
         <p:nvSpPr>
-          <p:cNvPr id="12" name="Text 10"/>
-          <p:cNvSpPr/>
-          <p:nvPr/>
-        </p:nvSpPr>
-        <p:spPr>
-          <a:xfrm>
-            <a:off x="1005840" y="1645920"/>
+          <p:cNvPr id="17" name="Text 15"/>
+          <p:cNvSpPr/>
+          <p:nvPr/>
+        </p:nvSpPr>
+        <p:spPr>
+          <a:xfrm>
+            <a:off x="6492240" y="1645920"/>
             <a:ext cx="4663440" cy="320040"/>
           </a:xfrm>
           <a:prstGeom prst="rect">
@@ -16644,10 +16824,10 @@
             <a:r>
               <a:rPr lang="en-US" sz="1200" b="1" dirty="0">
                 <a:solidFill>
-                  <a:srgbClr val="FDE047"/>
-                </a:solidFill>
-              </a:rPr>
-              <a:t>Sucker Rod Pumping Unit Operation</a:t>
+                  <a:srgbClr val="FFFFFF"/>
+                </a:solidFill>
+              </a:rPr>
+              <a:t>Dynamic Failures in Heavy Oil Artificial Lift</a:t>
             </a:r>
             <a:endParaRPr lang="en-US" sz="1200" dirty="0"/>
           </a:p>
@@ -16655,13 +16835,13 @@
       </p:sp>
       <p:sp>
         <p:nvSpPr>
-          <p:cNvPr id="13" name="Text 11"/>
-          <p:cNvSpPr/>
-          <p:nvPr/>
-        </p:nvSpPr>
-        <p:spPr>
-          <a:xfrm>
-            <a:off x="1005840" y="2057400"/>
+          <p:cNvPr id="18" name="Text 16"/>
+          <p:cNvSpPr/>
+          <p:nvPr/>
+        </p:nvSpPr>
+        <p:spPr>
+          <a:xfrm>
+            <a:off x="6492240" y="2057400"/>
             <a:ext cx="4663440" cy="822960"/>
           </a:xfrm>
           <a:prstGeom prst="rect">
@@ -16680,13 +16860,13 @@
             <a:r>
               <a:rPr lang="en-US" sz="1000" dirty="0">
                 <a:solidFill>
-                  <a:srgbClr val="FFF7ED"/>
+                  <a:srgbClr val="F1F5F9"/>
                 </a:solidFill>
                 <a:latin typeface="Segoe UI" pitchFamily="34" charset="0"/>
                 <a:ea typeface="Segoe UI" pitchFamily="34" charset="-122"/>
                 <a:cs typeface="Segoe UI" pitchFamily="34" charset="-120"/>
               </a:rPr>
-              <a:t>• Surface Walking Beam: Converts electric motor rotary torque into reciprocating vertical stroke (typically 6 - 10 SPM with 86 - 120 inch stroke).</a:t>
+              <a:t>• Fluid Pound: Occurs when the pump barrel partially fills with viscous crude; plunger slams into liquid midway down, causing severe shock waves.</a:t>
             </a:r>
             <a:endParaRPr lang="en-US" sz="1000" dirty="0"/>
           </a:p>
@@ -16694,13 +16874,13 @@
       </p:sp>
       <p:sp>
         <p:nvSpPr>
-          <p:cNvPr id="14" name="Text 12"/>
-          <p:cNvSpPr/>
-          <p:nvPr/>
-        </p:nvSpPr>
-        <p:spPr>
-          <a:xfrm>
-            <a:off x="1005840" y="2926080"/>
+          <p:cNvPr id="19" name="Text 17"/>
+          <p:cNvSpPr/>
+          <p:nvPr/>
+        </p:nvSpPr>
+        <p:spPr>
+          <a:xfrm>
+            <a:off x="6492240" y="2926080"/>
             <a:ext cx="4663440" cy="822960"/>
           </a:xfrm>
           <a:prstGeom prst="rect">
@@ -16719,192 +16899,12 @@
             <a:r>
               <a:rPr lang="en-US" sz="1000" dirty="0">
                 <a:solidFill>
-                  <a:srgbClr val="FFF7ED"/>
+                  <a:srgbClr val="F1F5F9"/>
                 </a:solidFill>
                 <a:latin typeface="Segoe UI" pitchFamily="34" charset="0"/>
                 <a:ea typeface="Segoe UI" pitchFamily="34" charset="-122"/>
                 <a:cs typeface="Segoe UI" pitchFamily="34" charset="-120"/>
               </a:rPr>
-              <a:t>• Rod String Elasticity: 1,200m continuous steel rod behaves like an elastic spring with inherent resonant frequencies and longitudinal wave travel.</a:t>
-            </a:r>
-            <a:endParaRPr lang="en-US" sz="1000" dirty="0"/>
-          </a:p>
-        </p:txBody>
-      </p:sp>
-      <p:sp>
-        <p:nvSpPr>
-          <p:cNvPr id="15" name="Text 13"/>
-          <p:cNvSpPr/>
-          <p:nvPr/>
-        </p:nvSpPr>
-        <p:spPr>
-          <a:xfrm>
-            <a:off x="1005840" y="3794760"/>
-            <a:ext cx="4663440" cy="822960"/>
-          </a:xfrm>
-          <a:prstGeom prst="rect">
-            <a:avLst/>
-          </a:prstGeom>
-          <a:noFill/>
-          <a:ln/>
-        </p:spPr>
-        <p:txBody>
-          <a:bodyPr wrap="square" rtlCol="0" anchor="ctr"/>
-          <a:lstStyle/>
-          <a:p>
-            <a:pPr indent="0" marL="0">
-              <a:buNone/>
-            </a:pPr>
-            <a:r>
-              <a:rPr lang="en-US" sz="1000" dirty="0">
-                <a:solidFill>
-                  <a:srgbClr val="FFF7ED"/>
-                </a:solidFill>
-                <a:latin typeface="Segoe UI" pitchFamily="34" charset="0"/>
-                <a:ea typeface="Segoe UI" pitchFamily="34" charset="-122"/>
-                <a:cs typeface="Segoe UI" pitchFamily="34" charset="-120"/>
-              </a:rPr>
-              <a:t>• Downhole Valve Action: Upstroke lifts the fluid column with closed traveling valve; downstroke plunges the rod through fluid.</a:t>
-            </a:r>
-            <a:endParaRPr lang="en-US" sz="1000" dirty="0"/>
-          </a:p>
-        </p:txBody>
-      </p:sp>
-      <p:sp>
-        <p:nvSpPr>
-          <p:cNvPr id="16" name="Shape 14"/>
-          <p:cNvSpPr/>
-          <p:nvPr/>
-        </p:nvSpPr>
-        <p:spPr>
-          <a:xfrm>
-            <a:off x="6217920" y="1463040"/>
-            <a:ext cx="5212080" cy="4754880"/>
-          </a:xfrm>
-          <a:prstGeom prst="roundRect">
-            <a:avLst>
-              <a:gd name="adj" fmla="val 1923"/>
-            </a:avLst>
-          </a:prstGeom>
-          <a:solidFill>
-            <a:srgbClr val="872808"/>
-          </a:solidFill>
-          <a:ln w="15240">
-            <a:solidFill>
-              <a:srgbClr val="FFFFFF"/>
-            </a:solidFill>
-            <a:prstDash val="solid"/>
-          </a:ln>
-        </p:spPr>
-      </p:sp>
-      <p:sp>
-        <p:nvSpPr>
-          <p:cNvPr id="17" name="Text 15"/>
-          <p:cNvSpPr/>
-          <p:nvPr/>
-        </p:nvSpPr>
-        <p:spPr>
-          <a:xfrm>
-            <a:off x="6492240" y="1645920"/>
-            <a:ext cx="4663440" cy="320040"/>
-          </a:xfrm>
-          <a:prstGeom prst="rect">
-            <a:avLst/>
-          </a:prstGeom>
-          <a:noFill/>
-          <a:ln/>
-        </p:spPr>
-        <p:txBody>
-          <a:bodyPr wrap="square" rtlCol="0" anchor="ctr"/>
-          <a:lstStyle/>
-          <a:p>
-            <a:pPr indent="0" marL="0">
-              <a:buNone/>
-            </a:pPr>
-            <a:r>
-              <a:rPr lang="en-US" sz="1200" b="1" dirty="0">
-                <a:solidFill>
-                  <a:srgbClr val="FFFFFF"/>
-                </a:solidFill>
-              </a:rPr>
-              <a:t>Dynamic Failures in Heavy Oil Artificial Lift</a:t>
-            </a:r>
-            <a:endParaRPr lang="en-US" sz="1200" dirty="0"/>
-          </a:p>
-        </p:txBody>
-      </p:sp>
-      <p:sp>
-        <p:nvSpPr>
-          <p:cNvPr id="18" name="Text 16"/>
-          <p:cNvSpPr/>
-          <p:nvPr/>
-        </p:nvSpPr>
-        <p:spPr>
-          <a:xfrm>
-            <a:off x="6492240" y="2057400"/>
-            <a:ext cx="4663440" cy="822960"/>
-          </a:xfrm>
-          <a:prstGeom prst="rect">
-            <a:avLst/>
-          </a:prstGeom>
-          <a:noFill/>
-          <a:ln/>
-        </p:spPr>
-        <p:txBody>
-          <a:bodyPr wrap="square" rtlCol="0" anchor="ctr"/>
-          <a:lstStyle/>
-          <a:p>
-            <a:pPr indent="0" marL="0">
-              <a:buNone/>
-            </a:pPr>
-            <a:r>
-              <a:rPr lang="en-US" sz="1000" dirty="0">
-                <a:solidFill>
-                  <a:srgbClr val="FFF7ED"/>
-                </a:solidFill>
-                <a:latin typeface="Segoe UI" pitchFamily="34" charset="0"/>
-                <a:ea typeface="Segoe UI" pitchFamily="34" charset="-122"/>
-                <a:cs typeface="Segoe UI" pitchFamily="34" charset="-120"/>
-              </a:rPr>
-              <a:t>• Fluid Pound: Occurs when the pump barrel partially fills with viscous crude; plunger slams into liquid midway down, causing severe shock waves.</a:t>
-            </a:r>
-            <a:endParaRPr lang="en-US" sz="1000" dirty="0"/>
-          </a:p>
-        </p:txBody>
-      </p:sp>
-      <p:sp>
-        <p:nvSpPr>
-          <p:cNvPr id="19" name="Text 17"/>
-          <p:cNvSpPr/>
-          <p:nvPr/>
-        </p:nvSpPr>
-        <p:spPr>
-          <a:xfrm>
-            <a:off x="6492240" y="2926080"/>
-            <a:ext cx="4663440" cy="822960"/>
-          </a:xfrm>
-          <a:prstGeom prst="rect">
-            <a:avLst/>
-          </a:prstGeom>
-          <a:noFill/>
-          <a:ln/>
-        </p:spPr>
-        <p:txBody>
-          <a:bodyPr wrap="square" rtlCol="0" anchor="ctr"/>
-          <a:lstStyle/>
-          <a:p>
-            <a:pPr indent="0" marL="0">
-              <a:buNone/>
-            </a:pPr>
-            <a:r>
-              <a:rPr lang="en-US" sz="1000" dirty="0">
-                <a:solidFill>
-                  <a:srgbClr val="FFF7ED"/>
-                </a:solidFill>
-                <a:latin typeface="Segoe UI" pitchFamily="34" charset="0"/>
-                <a:ea typeface="Segoe UI" pitchFamily="34" charset="-122"/>
-                <a:cs typeface="Segoe UI" pitchFamily="34" charset="-120"/>
-              </a:rPr>
               <a:t>• Peak Polish Rod Load (PPRL): Total upstroke load combining rod weight, fluid column weight, inertial acceleration, and viscous pipe friction.</a:t>
             </a:r>
             <a:endParaRPr lang="en-US" sz="1000" dirty="0"/>
@@ -16938,7 +16938,7 @@
             <a:r>
               <a:rPr lang="en-US" sz="1000" dirty="0">
                 <a:solidFill>
-                  <a:srgbClr val="FFF7ED"/>
+                  <a:srgbClr val="F1F5F9"/>
                 </a:solidFill>
                 <a:latin typeface="Segoe UI" pitchFamily="34" charset="0"/>
                 <a:ea typeface="Segoe UI" pitchFamily="34" charset="-122"/>
@@ -16964,7 +16964,7 @@
     <p:bg>
       <p:bgPr>
         <a:solidFill>
-          <a:srgbClr val="C2410C"/>
+          <a:srgbClr val="0B0F19"/>
         </a:solidFill>
       </p:bgPr>
     </p:bg>
@@ -16991,17 +16991,17 @@
         <p:spPr>
           <a:xfrm>
             <a:off x="0" y="0"/>
-            <a:ext cx="12191695" cy="91440"/>
+            <a:ext cx="12191695" cy="73152"/>
           </a:xfrm>
           <a:prstGeom prst="rect">
             <a:avLst/>
           </a:prstGeom>
           <a:solidFill>
-            <a:srgbClr val="FFFFFF"/>
+            <a:srgbClr val="FF6B00"/>
           </a:solidFill>
           <a:ln w="12700">
             <a:solidFill>
-              <a:srgbClr val="FFFFFF"/>
+              <a:srgbClr val="FF6B00"/>
             </a:solidFill>
             <a:prstDash val="solid"/>
           </a:ln>
@@ -17024,11 +17024,11 @@
             </a:avLst>
           </a:prstGeom>
           <a:solidFill>
-            <a:srgbClr val="451203"/>
+            <a:srgbClr val="2A1708"/>
           </a:solidFill>
           <a:ln w="15240">
             <a:solidFill>
-              <a:srgbClr val="FFFFFF"/>
+              <a:srgbClr val="FF6B00"/>
             </a:solidFill>
             <a:prstDash val="solid"/>
           </a:ln>
@@ -17061,7 +17061,7 @@
             <a:r>
               <a:rPr lang="en-US" sz="950" b="1" dirty="0">
                 <a:solidFill>
-                  <a:srgbClr val="FDE047"/>
+                  <a:srgbClr val="FFA726"/>
                 </a:solidFill>
               </a:rPr>
               <a:t>⚙  MATHEMATICAL FORMULATION</a:t>
@@ -17126,7 +17126,7 @@
           <a:noFill/>
           <a:ln w="19050">
             <a:solidFill>
-              <a:srgbClr val="E06528"/>
+              <a:srgbClr val="1E293B"/>
             </a:solidFill>
             <a:prstDash val="solid"/>
           </a:ln>
@@ -17141,7 +17141,7 @@
         <p:spPr>
           <a:xfrm>
             <a:off x="731520" y="1234440"/>
-            <a:ext cx="2560320" cy="0"/>
+            <a:ext cx="2286000" cy="0"/>
           </a:xfrm>
           <a:prstGeom prst="line">
             <a:avLst/>
@@ -17149,7 +17149,7 @@
           <a:noFill/>
           <a:ln w="31750">
             <a:solidFill>
-              <a:srgbClr val="FFFFFF"/>
+              <a:srgbClr val="FF6B00"/>
             </a:solidFill>
             <a:prstDash val="solid"/>
           </a:ln>
@@ -17172,7 +17172,7 @@
           <a:noFill/>
           <a:ln w="12700">
             <a:solidFill>
-              <a:srgbClr val="E06528"/>
+              <a:srgbClr val="1E293B"/>
             </a:solidFill>
             <a:prstDash val="solid"/>
           </a:ln>
@@ -17205,7 +17205,7 @@
             <a:r>
               <a:rPr lang="en-US" sz="900" dirty="0">
                 <a:solidFill>
-                  <a:srgbClr val="FED7AA"/>
+                  <a:srgbClr val="94A3B8"/>
                 </a:solidFill>
                 <a:latin typeface="Segoe UI" pitchFamily="34" charset="0"/>
                 <a:ea typeface="Segoe UI" pitchFamily="34" charset="-122"/>
@@ -17244,7 +17244,7 @@
             <a:r>
               <a:rPr lang="en-US" sz="950" b="1" dirty="0">
                 <a:solidFill>
-                  <a:srgbClr val="FFFFFF"/>
+                  <a:srgbClr val="FF6B00"/>
                 </a:solidFill>
                 <a:latin typeface="Segoe UI" pitchFamily="34" charset="0"/>
                 <a:ea typeface="Segoe UI" pitchFamily="34" charset="-122"/>
@@ -17273,11 +17273,11 @@
             </a:avLst>
           </a:prstGeom>
           <a:solidFill>
-            <a:srgbClr val="6B2006"/>
+            <a:srgbClr val="121826"/>
           </a:solidFill>
           <a:ln w="15240">
             <a:solidFill>
-              <a:srgbClr val="E06528"/>
+              <a:srgbClr val="1E293B"/>
             </a:solidFill>
             <a:prstDash val="solid"/>
           </a:ln>
@@ -17310,7 +17310,7 @@
             <a:r>
               <a:rPr lang="en-US" sz="1200" b="1" dirty="0">
                 <a:solidFill>
-                  <a:srgbClr val="FDE047"/>
+                  <a:srgbClr val="FF8C38"/>
                 </a:solidFill>
               </a:rPr>
               <a:t>1. Andrade Exponential Viscosity Calibration</a:t>
@@ -17346,7 +17346,7 @@
             <a:r>
               <a:rPr lang="en-US" sz="1000" dirty="0">
                 <a:solidFill>
-                  <a:srgbClr val="FFF7ED"/>
+                  <a:srgbClr val="F1F5F9"/>
                 </a:solidFill>
                 <a:latin typeface="Segoe UI" pitchFamily="34" charset="0"/>
                 <a:ea typeface="Segoe UI" pitchFamily="34" charset="-122"/>
@@ -17385,7 +17385,7 @@
             <a:r>
               <a:rPr lang="en-US" sz="1000" dirty="0">
                 <a:solidFill>
-                  <a:srgbClr val="FFF7ED"/>
+                  <a:srgbClr val="F1F5F9"/>
                 </a:solidFill>
                 <a:latin typeface="Segoe UI" pitchFamily="34" charset="0"/>
                 <a:ea typeface="Segoe UI" pitchFamily="34" charset="-122"/>
@@ -17424,7 +17424,7 @@
             <a:r>
               <a:rPr lang="en-US" sz="1000" dirty="0">
                 <a:solidFill>
-                  <a:srgbClr val="FFF7ED"/>
+                  <a:srgbClr val="F1F5F9"/>
                 </a:solidFill>
                 <a:latin typeface="Segoe UI" pitchFamily="34" charset="0"/>
                 <a:ea typeface="Segoe UI" pitchFamily="34" charset="-122"/>
@@ -17463,7 +17463,7 @@
             <a:r>
               <a:rPr lang="en-US" sz="1000" dirty="0">
                 <a:solidFill>
-                  <a:srgbClr val="FFF7ED"/>
+                  <a:srgbClr val="F1F5F9"/>
                 </a:solidFill>
                 <a:latin typeface="Segoe UI" pitchFamily="34" charset="0"/>
                 <a:ea typeface="Segoe UI" pitchFamily="34" charset="-122"/>
@@ -17492,11 +17492,11 @@
             </a:avLst>
           </a:prstGeom>
           <a:solidFill>
-            <a:srgbClr val="6B2006"/>
+            <a:srgbClr val="121826"/>
           </a:solidFill>
           <a:ln w="15240">
             <a:solidFill>
-              <a:srgbClr val="E06528"/>
+              <a:srgbClr val="1E293B"/>
             </a:solidFill>
             <a:prstDash val="solid"/>
           </a:ln>
@@ -17529,7 +17529,7 @@
             <a:r>
               <a:rPr lang="en-US" sz="1200" b="1" dirty="0">
                 <a:solidFill>
-                  <a:srgbClr val="FDE047"/>
+                  <a:srgbClr val="FF8C38"/>
                 </a:solidFill>
               </a:rPr>
               <a:t>2. 90-Day Formation Thermal Dissipation ODE</a:t>
@@ -17565,7 +17565,7 @@
             <a:r>
               <a:rPr lang="en-US" sz="1000" dirty="0">
                 <a:solidFill>
-                  <a:srgbClr val="FFF7ED"/>
+                  <a:srgbClr val="F1F5F9"/>
                 </a:solidFill>
                 <a:latin typeface="Segoe UI" pitchFamily="34" charset="0"/>
                 <a:ea typeface="Segoe UI" pitchFamily="34" charset="-122"/>
@@ -17604,7 +17604,7 @@
             <a:r>
               <a:rPr lang="en-US" sz="1000" dirty="0">
                 <a:solidFill>
-                  <a:srgbClr val="FFF7ED"/>
+                  <a:srgbClr val="F1F5F9"/>
                 </a:solidFill>
                 <a:latin typeface="Segoe UI" pitchFamily="34" charset="0"/>
                 <a:ea typeface="Segoe UI" pitchFamily="34" charset="-122"/>
@@ -17643,7 +17643,7 @@
             <a:r>
               <a:rPr lang="en-US" sz="1000" dirty="0">
                 <a:solidFill>
-                  <a:srgbClr val="FFF7ED"/>
+                  <a:srgbClr val="F1F5F9"/>
                 </a:solidFill>
                 <a:latin typeface="Segoe UI" pitchFamily="34" charset="0"/>
                 <a:ea typeface="Segoe UI" pitchFamily="34" charset="-122"/>
@@ -17669,7 +17669,7 @@
     <p:bg>
       <p:bgPr>
         <a:solidFill>
-          <a:srgbClr val="C2410C"/>
+          <a:srgbClr val="0B0F19"/>
         </a:solidFill>
       </p:bgPr>
     </p:bg>
@@ -17696,17 +17696,17 @@
         <p:spPr>
           <a:xfrm>
             <a:off x="0" y="0"/>
-            <a:ext cx="12191695" cy="91440"/>
+            <a:ext cx="12191695" cy="73152"/>
           </a:xfrm>
           <a:prstGeom prst="rect">
             <a:avLst/>
           </a:prstGeom>
           <a:solidFill>
-            <a:srgbClr val="FFFFFF"/>
+            <a:srgbClr val="FF6B00"/>
           </a:solidFill>
           <a:ln w="12700">
             <a:solidFill>
-              <a:srgbClr val="FFFFFF"/>
+              <a:srgbClr val="FF6B00"/>
             </a:solidFill>
             <a:prstDash val="solid"/>
           </a:ln>
@@ -17729,11 +17729,11 @@
             </a:avLst>
           </a:prstGeom>
           <a:solidFill>
-            <a:srgbClr val="451203"/>
+            <a:srgbClr val="2A1708"/>
           </a:solidFill>
           <a:ln w="15240">
             <a:solidFill>
-              <a:srgbClr val="FFFFFF"/>
+              <a:srgbClr val="FF6B00"/>
             </a:solidFill>
             <a:prstDash val="solid"/>
           </a:ln>
@@ -17766,7 +17766,7 @@
             <a:r>
               <a:rPr lang="en-US" sz="950" b="1" dirty="0">
                 <a:solidFill>
-                  <a:srgbClr val="FDE047"/>
+                  <a:srgbClr val="FFA726"/>
                 </a:solidFill>
               </a:rPr>
               <a:t>⚙  MECHANICAL DYNAMICS &amp; AI TRAINING</a:t>
@@ -17831,7 +17831,7 @@
           <a:noFill/>
           <a:ln w="19050">
             <a:solidFill>
-              <a:srgbClr val="E06528"/>
+              <a:srgbClr val="1E293B"/>
             </a:solidFill>
             <a:prstDash val="solid"/>
           </a:ln>
@@ -17846,7 +17846,7 @@
         <p:spPr>
           <a:xfrm>
             <a:off x="731520" y="1234440"/>
-            <a:ext cx="2560320" cy="0"/>
+            <a:ext cx="2286000" cy="0"/>
           </a:xfrm>
           <a:prstGeom prst="line">
             <a:avLst/>
@@ -17854,7 +17854,7 @@
           <a:noFill/>
           <a:ln w="31750">
             <a:solidFill>
-              <a:srgbClr val="FFFFFF"/>
+              <a:srgbClr val="FF6B00"/>
             </a:solidFill>
             <a:prstDash val="solid"/>
           </a:ln>
@@ -17877,7 +17877,7 @@
           <a:noFill/>
           <a:ln w="12700">
             <a:solidFill>
-              <a:srgbClr val="E06528"/>
+              <a:srgbClr val="1E293B"/>
             </a:solidFill>
             <a:prstDash val="solid"/>
           </a:ln>
@@ -17910,7 +17910,7 @@
             <a:r>
               <a:rPr lang="en-US" sz="900" dirty="0">
                 <a:solidFill>
-                  <a:srgbClr val="FED7AA"/>
+                  <a:srgbClr val="94A3B8"/>
                 </a:solidFill>
                 <a:latin typeface="Segoe UI" pitchFamily="34" charset="0"/>
                 <a:ea typeface="Segoe UI" pitchFamily="34" charset="-122"/>
@@ -17949,7 +17949,7 @@
             <a:r>
               <a:rPr lang="en-US" sz="950" b="1" dirty="0">
                 <a:solidFill>
-                  <a:srgbClr val="FFFFFF"/>
+                  <a:srgbClr val="FF6B00"/>
                 </a:solidFill>
                 <a:latin typeface="Segoe UI" pitchFamily="34" charset="0"/>
                 <a:ea typeface="Segoe UI" pitchFamily="34" charset="-122"/>
@@ -17978,7 +17978,226 @@
             </a:avLst>
           </a:prstGeom>
           <a:solidFill>
-            <a:srgbClr val="6B2006"/>
+            <a:srgbClr val="121826"/>
+          </a:solidFill>
+          <a:ln w="15240">
+            <a:solidFill>
+              <a:srgbClr val="1E293B"/>
+            </a:solidFill>
+            <a:prstDash val="solid"/>
+          </a:ln>
+        </p:spPr>
+      </p:sp>
+      <p:sp>
+        <p:nvSpPr>
+          <p:cNvPr id="12" name="Text 10"/>
+          <p:cNvSpPr/>
+          <p:nvPr/>
+        </p:nvSpPr>
+        <p:spPr>
+          <a:xfrm>
+            <a:off x="1005840" y="1645920"/>
+            <a:ext cx="4663440" cy="320040"/>
+          </a:xfrm>
+          <a:prstGeom prst="rect">
+            <a:avLst/>
+          </a:prstGeom>
+          <a:noFill/>
+          <a:ln/>
+        </p:spPr>
+        <p:txBody>
+          <a:bodyPr wrap="square" rtlCol="0" anchor="ctr"/>
+          <a:lstStyle/>
+          <a:p>
+            <a:pPr indent="0" marL="0">
+              <a:buNone/>
+            </a:pPr>
+            <a:r>
+              <a:rPr lang="en-US" sz="1200" b="1" dirty="0">
+                <a:solidFill>
+                  <a:srgbClr val="FF8C38"/>
+                </a:solidFill>
+              </a:rPr>
+              <a:t>1. Sucker Rod Wave Equations (API RP 11L)</a:t>
+            </a:r>
+            <a:endParaRPr lang="en-US" sz="1200" dirty="0"/>
+          </a:p>
+        </p:txBody>
+      </p:sp>
+      <p:sp>
+        <p:nvSpPr>
+          <p:cNvPr id="13" name="Text 11"/>
+          <p:cNvSpPr/>
+          <p:nvPr/>
+        </p:nvSpPr>
+        <p:spPr>
+          <a:xfrm>
+            <a:off x="1005840" y="2057400"/>
+            <a:ext cx="4663440" cy="822960"/>
+          </a:xfrm>
+          <a:prstGeom prst="rect">
+            <a:avLst/>
+          </a:prstGeom>
+          <a:noFill/>
+          <a:ln/>
+        </p:spPr>
+        <p:txBody>
+          <a:bodyPr wrap="square" rtlCol="0" anchor="ctr"/>
+          <a:lstStyle/>
+          <a:p>
+            <a:pPr indent="0" marL="0">
+              <a:buNone/>
+            </a:pPr>
+            <a:r>
+              <a:rPr lang="en-US" sz="1000" dirty="0">
+                <a:solidFill>
+                  <a:srgbClr val="F1F5F9"/>
+                </a:solidFill>
+                <a:latin typeface="Segoe UI" pitchFamily="34" charset="0"/>
+                <a:ea typeface="Segoe UI" pitchFamily="34" charset="-122"/>
+                <a:cs typeface="Segoe UI" pitchFamily="34" charset="-120"/>
+              </a:rPr>
+              <a:t>• Damped 1D Wave Equation: ∂²u/∂t² = a²·(∂²u/∂x²) - c·(∂u/∂t)</a:t>
+            </a:r>
+            <a:endParaRPr lang="en-US" sz="1000" dirty="0"/>
+          </a:p>
+        </p:txBody>
+      </p:sp>
+      <p:sp>
+        <p:nvSpPr>
+          <p:cNvPr id="14" name="Text 12"/>
+          <p:cNvSpPr/>
+          <p:nvPr/>
+        </p:nvSpPr>
+        <p:spPr>
+          <a:xfrm>
+            <a:off x="1005840" y="2926080"/>
+            <a:ext cx="4663440" cy="822960"/>
+          </a:xfrm>
+          <a:prstGeom prst="rect">
+            <a:avLst/>
+          </a:prstGeom>
+          <a:noFill/>
+          <a:ln/>
+        </p:spPr>
+        <p:txBody>
+          <a:bodyPr wrap="square" rtlCol="0" anchor="ctr"/>
+          <a:lstStyle/>
+          <a:p>
+            <a:pPr indent="0" marL="0">
+              <a:buNone/>
+            </a:pPr>
+            <a:r>
+              <a:rPr lang="en-US" sz="1000" dirty="0">
+                <a:solidFill>
+                  <a:srgbClr val="F1F5F9"/>
+                </a:solidFill>
+                <a:latin typeface="Segoe UI" pitchFamily="34" charset="0"/>
+                <a:ea typeface="Segoe UI" pitchFamily="34" charset="-122"/>
+                <a:cs typeface="Segoe UI" pitchFamily="34" charset="-120"/>
+              </a:rPr>
+              <a:t>• Peak Polish Rod Load: PPRL = [W_rod + W_fluid] · [1 + (S·N²)/70500] · DragFactor</a:t>
+            </a:r>
+            <a:endParaRPr lang="en-US" sz="1000" dirty="0"/>
+          </a:p>
+        </p:txBody>
+      </p:sp>
+      <p:sp>
+        <p:nvSpPr>
+          <p:cNvPr id="15" name="Text 13"/>
+          <p:cNvSpPr/>
+          <p:nvPr/>
+        </p:nvSpPr>
+        <p:spPr>
+          <a:xfrm>
+            <a:off x="1005840" y="3794760"/>
+            <a:ext cx="4663440" cy="822960"/>
+          </a:xfrm>
+          <a:prstGeom prst="rect">
+            <a:avLst/>
+          </a:prstGeom>
+          <a:noFill/>
+          <a:ln/>
+        </p:spPr>
+        <p:txBody>
+          <a:bodyPr wrap="square" rtlCol="0" anchor="ctr"/>
+          <a:lstStyle/>
+          <a:p>
+            <a:pPr indent="0" marL="0">
+              <a:buNone/>
+            </a:pPr>
+            <a:r>
+              <a:rPr lang="en-US" sz="1000" dirty="0">
+                <a:solidFill>
+                  <a:srgbClr val="F1F5F9"/>
+                </a:solidFill>
+                <a:latin typeface="Segoe UI" pitchFamily="34" charset="0"/>
+                <a:ea typeface="Segoe UI" pitchFamily="34" charset="-122"/>
+                <a:cs typeface="Segoe UI" pitchFamily="34" charset="-120"/>
+              </a:rPr>
+              <a:t>• Drag Factor Coupling: DragFactor = 1 + (μ/500)·0.45, reflecting viscous buoyancy loss.</a:t>
+            </a:r>
+            <a:endParaRPr lang="en-US" sz="1000" dirty="0"/>
+          </a:p>
+        </p:txBody>
+      </p:sp>
+      <p:sp>
+        <p:nvSpPr>
+          <p:cNvPr id="16" name="Text 14"/>
+          <p:cNvSpPr/>
+          <p:nvPr/>
+        </p:nvSpPr>
+        <p:spPr>
+          <a:xfrm>
+            <a:off x="1005840" y="4663440"/>
+            <a:ext cx="4663440" cy="822960"/>
+          </a:xfrm>
+          <a:prstGeom prst="rect">
+            <a:avLst/>
+          </a:prstGeom>
+          <a:noFill/>
+          <a:ln/>
+        </p:spPr>
+        <p:txBody>
+          <a:bodyPr wrap="square" rtlCol="0" anchor="ctr"/>
+          <a:lstStyle/>
+          <a:p>
+            <a:pPr indent="0" marL="0">
+              <a:buNone/>
+            </a:pPr>
+            <a:r>
+              <a:rPr lang="en-US" sz="1000" dirty="0">
+                <a:solidFill>
+                  <a:srgbClr val="F1F5F9"/>
+                </a:solidFill>
+                <a:latin typeface="Segoe UI" pitchFamily="34" charset="0"/>
+                <a:ea typeface="Segoe UI" pitchFamily="34" charset="-122"/>
+                <a:cs typeface="Segoe UI" pitchFamily="34" charset="-120"/>
+              </a:rPr>
+              <a:t>• Continuous verification against API allowable rod stress (σ ≤ 30,000 PSI).</a:t>
+            </a:r>
+            <a:endParaRPr lang="en-US" sz="1000" dirty="0"/>
+          </a:p>
+        </p:txBody>
+      </p:sp>
+      <p:sp>
+        <p:nvSpPr>
+          <p:cNvPr id="17" name="Shape 15"/>
+          <p:cNvSpPr/>
+          <p:nvPr/>
+        </p:nvSpPr>
+        <p:spPr>
+          <a:xfrm>
+            <a:off x="6217920" y="1463040"/>
+            <a:ext cx="5212080" cy="4754880"/>
+          </a:xfrm>
+          <a:prstGeom prst="roundRect">
+            <a:avLst>
+              <a:gd name="adj" fmla="val 1923"/>
+            </a:avLst>
+          </a:prstGeom>
+          <a:solidFill>
+            <a:srgbClr val="172033"/>
           </a:solidFill>
           <a:ln w="15240">
             <a:solidFill>
@@ -17990,13 +18209,13 @@
       </p:sp>
       <p:sp>
         <p:nvSpPr>
-          <p:cNvPr id="12" name="Text 10"/>
-          <p:cNvSpPr/>
-          <p:nvPr/>
-        </p:nvSpPr>
-        <p:spPr>
-          <a:xfrm>
-            <a:off x="1005840" y="1645920"/>
+          <p:cNvPr id="18" name="Text 16"/>
+          <p:cNvSpPr/>
+          <p:nvPr/>
+        </p:nvSpPr>
+        <p:spPr>
+          <a:xfrm>
+            <a:off x="6492240" y="1645920"/>
             <a:ext cx="4663440" cy="320040"/>
           </a:xfrm>
           <a:prstGeom prst="rect">
@@ -18015,10 +18234,10 @@
             <a:r>
               <a:rPr lang="en-US" sz="1200" b="1" dirty="0">
                 <a:solidFill>
-                  <a:srgbClr val="FDE047"/>
-                </a:solidFill>
-              </a:rPr>
-              <a:t>1. Sucker Rod Wave Equations (API RP 11L)</a:t>
+                  <a:srgbClr val="FFFFFF"/>
+                </a:solidFill>
+              </a:rPr>
+              <a:t>2. Conversational AI Intent &amp; Physics Training</a:t>
             </a:r>
             <a:endParaRPr lang="en-US" sz="1200" dirty="0"/>
           </a:p>
@@ -18026,13 +18245,13 @@
       </p:sp>
       <p:sp>
         <p:nvSpPr>
-          <p:cNvPr id="13" name="Text 11"/>
-          <p:cNvSpPr/>
-          <p:nvPr/>
-        </p:nvSpPr>
-        <p:spPr>
-          <a:xfrm>
-            <a:off x="1005840" y="2057400"/>
+          <p:cNvPr id="19" name="Text 17"/>
+          <p:cNvSpPr/>
+          <p:nvPr/>
+        </p:nvSpPr>
+        <p:spPr>
+          <a:xfrm>
+            <a:off x="6492240" y="2057400"/>
             <a:ext cx="4663440" cy="822960"/>
           </a:xfrm>
           <a:prstGeom prst="rect">
@@ -18051,13 +18270,13 @@
             <a:r>
               <a:rPr lang="en-US" sz="1000" dirty="0">
                 <a:solidFill>
-                  <a:srgbClr val="FFF7ED"/>
+                  <a:srgbClr val="F1F5F9"/>
                 </a:solidFill>
                 <a:latin typeface="Segoe UI" pitchFamily="34" charset="0"/>
                 <a:ea typeface="Segoe UI" pitchFamily="34" charset="-122"/>
                 <a:cs typeface="Segoe UI" pitchFamily="34" charset="-120"/>
               </a:rPr>
-              <a:t>• Damped 1D Wave Equation: ∂²u/∂t² = a²·(∂²u/∂x²) - c·(∂u/∂t)</a:t>
+              <a:t>• Domain NLP Training: Trained on petroleum engineering ontology, SCADA alarm matrices, and CSS thermal recovery rules.</a:t>
             </a:r>
             <a:endParaRPr lang="en-US" sz="1000" dirty="0"/>
           </a:p>
@@ -18065,13 +18284,13 @@
       </p:sp>
       <p:sp>
         <p:nvSpPr>
-          <p:cNvPr id="14" name="Text 12"/>
-          <p:cNvSpPr/>
-          <p:nvPr/>
-        </p:nvSpPr>
-        <p:spPr>
-          <a:xfrm>
-            <a:off x="1005840" y="2926080"/>
+          <p:cNvPr id="20" name="Text 18"/>
+          <p:cNvSpPr/>
+          <p:nvPr/>
+        </p:nvSpPr>
+        <p:spPr>
+          <a:xfrm>
+            <a:off x="6492240" y="2926080"/>
             <a:ext cx="4663440" cy="822960"/>
           </a:xfrm>
           <a:prstGeom prst="rect">
@@ -18090,231 +18309,12 @@
             <a:r>
               <a:rPr lang="en-US" sz="1000" dirty="0">
                 <a:solidFill>
-                  <a:srgbClr val="FFF7ED"/>
+                  <a:srgbClr val="F1F5F9"/>
                 </a:solidFill>
                 <a:latin typeface="Segoe UI" pitchFamily="34" charset="0"/>
                 <a:ea typeface="Segoe UI" pitchFamily="34" charset="-122"/>
                 <a:cs typeface="Segoe UI" pitchFamily="34" charset="-120"/>
               </a:rPr>
-              <a:t>• Peak Polish Rod Load: PPRL = [W_rod + W_fluid] · [1 + (S·N²)/70500] · DragFactor</a:t>
-            </a:r>
-            <a:endParaRPr lang="en-US" sz="1000" dirty="0"/>
-          </a:p>
-        </p:txBody>
-      </p:sp>
-      <p:sp>
-        <p:nvSpPr>
-          <p:cNvPr id="15" name="Text 13"/>
-          <p:cNvSpPr/>
-          <p:nvPr/>
-        </p:nvSpPr>
-        <p:spPr>
-          <a:xfrm>
-            <a:off x="1005840" y="3794760"/>
-            <a:ext cx="4663440" cy="822960"/>
-          </a:xfrm>
-          <a:prstGeom prst="rect">
-            <a:avLst/>
-          </a:prstGeom>
-          <a:noFill/>
-          <a:ln/>
-        </p:spPr>
-        <p:txBody>
-          <a:bodyPr wrap="square" rtlCol="0" anchor="ctr"/>
-          <a:lstStyle/>
-          <a:p>
-            <a:pPr indent="0" marL="0">
-              <a:buNone/>
-            </a:pPr>
-            <a:r>
-              <a:rPr lang="en-US" sz="1000" dirty="0">
-                <a:solidFill>
-                  <a:srgbClr val="FFF7ED"/>
-                </a:solidFill>
-                <a:latin typeface="Segoe UI" pitchFamily="34" charset="0"/>
-                <a:ea typeface="Segoe UI" pitchFamily="34" charset="-122"/>
-                <a:cs typeface="Segoe UI" pitchFamily="34" charset="-120"/>
-              </a:rPr>
-              <a:t>• Drag Factor Coupling: DragFactor = 1 + (μ/500)·0.45, reflecting viscous buoyancy loss.</a:t>
-            </a:r>
-            <a:endParaRPr lang="en-US" sz="1000" dirty="0"/>
-          </a:p>
-        </p:txBody>
-      </p:sp>
-      <p:sp>
-        <p:nvSpPr>
-          <p:cNvPr id="16" name="Text 14"/>
-          <p:cNvSpPr/>
-          <p:nvPr/>
-        </p:nvSpPr>
-        <p:spPr>
-          <a:xfrm>
-            <a:off x="1005840" y="4663440"/>
-            <a:ext cx="4663440" cy="822960"/>
-          </a:xfrm>
-          <a:prstGeom prst="rect">
-            <a:avLst/>
-          </a:prstGeom>
-          <a:noFill/>
-          <a:ln/>
-        </p:spPr>
-        <p:txBody>
-          <a:bodyPr wrap="square" rtlCol="0" anchor="ctr"/>
-          <a:lstStyle/>
-          <a:p>
-            <a:pPr indent="0" marL="0">
-              <a:buNone/>
-            </a:pPr>
-            <a:r>
-              <a:rPr lang="en-US" sz="1000" dirty="0">
-                <a:solidFill>
-                  <a:srgbClr val="FFF7ED"/>
-                </a:solidFill>
-                <a:latin typeface="Segoe UI" pitchFamily="34" charset="0"/>
-                <a:ea typeface="Segoe UI" pitchFamily="34" charset="-122"/>
-                <a:cs typeface="Segoe UI" pitchFamily="34" charset="-120"/>
-              </a:rPr>
-              <a:t>• Continuous verification against API allowable rod stress (σ ≤ 30,000 PSI).</a:t>
-            </a:r>
-            <a:endParaRPr lang="en-US" sz="1000" dirty="0"/>
-          </a:p>
-        </p:txBody>
-      </p:sp>
-      <p:sp>
-        <p:nvSpPr>
-          <p:cNvPr id="17" name="Shape 15"/>
-          <p:cNvSpPr/>
-          <p:nvPr/>
-        </p:nvSpPr>
-        <p:spPr>
-          <a:xfrm>
-            <a:off x="6217920" y="1463040"/>
-            <a:ext cx="5212080" cy="4754880"/>
-          </a:xfrm>
-          <a:prstGeom prst="roundRect">
-            <a:avLst>
-              <a:gd name="adj" fmla="val 1923"/>
-            </a:avLst>
-          </a:prstGeom>
-          <a:solidFill>
-            <a:srgbClr val="872808"/>
-          </a:solidFill>
-          <a:ln w="15240">
-            <a:solidFill>
-              <a:srgbClr val="FFFFFF"/>
-            </a:solidFill>
-            <a:prstDash val="solid"/>
-          </a:ln>
-        </p:spPr>
-      </p:sp>
-      <p:sp>
-        <p:nvSpPr>
-          <p:cNvPr id="18" name="Text 16"/>
-          <p:cNvSpPr/>
-          <p:nvPr/>
-        </p:nvSpPr>
-        <p:spPr>
-          <a:xfrm>
-            <a:off x="6492240" y="1645920"/>
-            <a:ext cx="4663440" cy="320040"/>
-          </a:xfrm>
-          <a:prstGeom prst="rect">
-            <a:avLst/>
-          </a:prstGeom>
-          <a:noFill/>
-          <a:ln/>
-        </p:spPr>
-        <p:txBody>
-          <a:bodyPr wrap="square" rtlCol="0" anchor="ctr"/>
-          <a:lstStyle/>
-          <a:p>
-            <a:pPr indent="0" marL="0">
-              <a:buNone/>
-            </a:pPr>
-            <a:r>
-              <a:rPr lang="en-US" sz="1200" b="1" dirty="0">
-                <a:solidFill>
-                  <a:srgbClr val="FFFFFF"/>
-                </a:solidFill>
-              </a:rPr>
-              <a:t>2. Conversational AI Intent &amp; Physics Training</a:t>
-            </a:r>
-            <a:endParaRPr lang="en-US" sz="1200" dirty="0"/>
-          </a:p>
-        </p:txBody>
-      </p:sp>
-      <p:sp>
-        <p:nvSpPr>
-          <p:cNvPr id="19" name="Text 17"/>
-          <p:cNvSpPr/>
-          <p:nvPr/>
-        </p:nvSpPr>
-        <p:spPr>
-          <a:xfrm>
-            <a:off x="6492240" y="2057400"/>
-            <a:ext cx="4663440" cy="822960"/>
-          </a:xfrm>
-          <a:prstGeom prst="rect">
-            <a:avLst/>
-          </a:prstGeom>
-          <a:noFill/>
-          <a:ln/>
-        </p:spPr>
-        <p:txBody>
-          <a:bodyPr wrap="square" rtlCol="0" anchor="ctr"/>
-          <a:lstStyle/>
-          <a:p>
-            <a:pPr indent="0" marL="0">
-              <a:buNone/>
-            </a:pPr>
-            <a:r>
-              <a:rPr lang="en-US" sz="1000" dirty="0">
-                <a:solidFill>
-                  <a:srgbClr val="FFF7ED"/>
-                </a:solidFill>
-                <a:latin typeface="Segoe UI" pitchFamily="34" charset="0"/>
-                <a:ea typeface="Segoe UI" pitchFamily="34" charset="-122"/>
-                <a:cs typeface="Segoe UI" pitchFamily="34" charset="-120"/>
-              </a:rPr>
-              <a:t>• Domain NLP Training: Trained on petroleum engineering ontology, SCADA alarm matrices, and CSS thermal recovery rules.</a:t>
-            </a:r>
-            <a:endParaRPr lang="en-US" sz="1000" dirty="0"/>
-          </a:p>
-        </p:txBody>
-      </p:sp>
-      <p:sp>
-        <p:nvSpPr>
-          <p:cNvPr id="20" name="Text 18"/>
-          <p:cNvSpPr/>
-          <p:nvPr/>
-        </p:nvSpPr>
-        <p:spPr>
-          <a:xfrm>
-            <a:off x="6492240" y="2926080"/>
-            <a:ext cx="4663440" cy="822960"/>
-          </a:xfrm>
-          <a:prstGeom prst="rect">
-            <a:avLst/>
-          </a:prstGeom>
-          <a:noFill/>
-          <a:ln/>
-        </p:spPr>
-        <p:txBody>
-          <a:bodyPr wrap="square" rtlCol="0" anchor="ctr"/>
-          <a:lstStyle/>
-          <a:p>
-            <a:pPr indent="0" marL="0">
-              <a:buNone/>
-            </a:pPr>
-            <a:r>
-              <a:rPr lang="en-US" sz="1000" dirty="0">
-                <a:solidFill>
-                  <a:srgbClr val="FFF7ED"/>
-                </a:solidFill>
-                <a:latin typeface="Segoe UI" pitchFamily="34" charset="0"/>
-                <a:ea typeface="Segoe UI" pitchFamily="34" charset="-122"/>
-                <a:cs typeface="Segoe UI" pitchFamily="34" charset="-120"/>
-              </a:rPr>
               <a:t>• Live State Injection: Queries automatically inject current reservoir temperature, viscosity, and active alarms into context.</a:t>
             </a:r>
             <a:endParaRPr lang="en-US" sz="1000" dirty="0"/>
@@ -18348,7 +18348,7 @@
             <a:r>
               <a:rPr lang="en-US" sz="1000" dirty="0">
                 <a:solidFill>
-                  <a:srgbClr val="FFF7ED"/>
+                  <a:srgbClr val="F1F5F9"/>
                 </a:solidFill>
                 <a:latin typeface="Segoe UI" pitchFamily="34" charset="0"/>
                 <a:ea typeface="Segoe UI" pitchFamily="34" charset="-122"/>
@@ -18374,7 +18374,7 @@
     <p:bg>
       <p:bgPr>
         <a:solidFill>
-          <a:srgbClr val="C2410C"/>
+          <a:srgbClr val="0B0F19"/>
         </a:solidFill>
       </p:bgPr>
     </p:bg>
@@ -18401,17 +18401,17 @@
         <p:spPr>
           <a:xfrm>
             <a:off x="0" y="0"/>
-            <a:ext cx="12191695" cy="91440"/>
+            <a:ext cx="12191695" cy="73152"/>
           </a:xfrm>
           <a:prstGeom prst="rect">
             <a:avLst/>
           </a:prstGeom>
           <a:solidFill>
-            <a:srgbClr val="FFFFFF"/>
+            <a:srgbClr val="FF6B00"/>
           </a:solidFill>
           <a:ln w="12700">
             <a:solidFill>
-              <a:srgbClr val="FFFFFF"/>
+              <a:srgbClr val="FF6B00"/>
             </a:solidFill>
             <a:prstDash val="solid"/>
           </a:ln>
@@ -18434,11 +18434,11 @@
             </a:avLst>
           </a:prstGeom>
           <a:solidFill>
-            <a:srgbClr val="451203"/>
+            <a:srgbClr val="2A1708"/>
           </a:solidFill>
           <a:ln w="15240">
             <a:solidFill>
-              <a:srgbClr val="FFFFFF"/>
+              <a:srgbClr val="FF6B00"/>
             </a:solidFill>
             <a:prstDash val="solid"/>
           </a:ln>
@@ -18471,7 +18471,7 @@
             <a:r>
               <a:rPr lang="en-US" sz="950" b="1" dirty="0">
                 <a:solidFill>
-                  <a:srgbClr val="FDE047"/>
+                  <a:srgbClr val="FFA726"/>
                 </a:solidFill>
               </a:rPr>
               <a:t>⚙  SYSTEM ARCHITECTURE</a:t>
@@ -18536,7 +18536,7 @@
           <a:noFill/>
           <a:ln w="19050">
             <a:solidFill>
-              <a:srgbClr val="E06528"/>
+              <a:srgbClr val="1E293B"/>
             </a:solidFill>
             <a:prstDash val="solid"/>
           </a:ln>
@@ -18551,7 +18551,7 @@
         <p:spPr>
           <a:xfrm>
             <a:off x="731520" y="1234440"/>
-            <a:ext cx="2560320" cy="0"/>
+            <a:ext cx="2286000" cy="0"/>
           </a:xfrm>
           <a:prstGeom prst="line">
             <a:avLst/>
@@ -18559,7 +18559,7 @@
           <a:noFill/>
           <a:ln w="31750">
             <a:solidFill>
-              <a:srgbClr val="FFFFFF"/>
+              <a:srgbClr val="FF6B00"/>
             </a:solidFill>
             <a:prstDash val="solid"/>
           </a:ln>
@@ -18582,7 +18582,7 @@
           <a:noFill/>
           <a:ln w="12700">
             <a:solidFill>
-              <a:srgbClr val="E06528"/>
+              <a:srgbClr val="1E293B"/>
             </a:solidFill>
             <a:prstDash val="solid"/>
           </a:ln>
@@ -18615,7 +18615,7 @@
             <a:r>
               <a:rPr lang="en-US" sz="900" dirty="0">
                 <a:solidFill>
-                  <a:srgbClr val="FED7AA"/>
+                  <a:srgbClr val="94A3B8"/>
                 </a:solidFill>
                 <a:latin typeface="Segoe UI" pitchFamily="34" charset="0"/>
                 <a:ea typeface="Segoe UI" pitchFamily="34" charset="-122"/>
@@ -18654,7 +18654,7 @@
             <a:r>
               <a:rPr lang="en-US" sz="950" b="1" dirty="0">
                 <a:solidFill>
-                  <a:srgbClr val="FFFFFF"/>
+                  <a:srgbClr val="FF6B00"/>
                 </a:solidFill>
                 <a:latin typeface="Segoe UI" pitchFamily="34" charset="0"/>
                 <a:ea typeface="Segoe UI" pitchFamily="34" charset="-122"/>
@@ -18683,11 +18683,11 @@
             </a:avLst>
           </a:prstGeom>
           <a:solidFill>
-            <a:srgbClr val="6B2006"/>
+            <a:srgbClr val="121826"/>
           </a:solidFill>
           <a:ln w="15240">
             <a:solidFill>
-              <a:srgbClr val="E06528"/>
+              <a:srgbClr val="1E293B"/>
             </a:solidFill>
             <a:prstDash val="solid"/>
           </a:ln>
@@ -18720,7 +18720,7 @@
             <a:r>
               <a:rPr lang="en-US" sz="1200" b="1" dirty="0">
                 <a:solidFill>
-                  <a:srgbClr val="FDE047"/>
+                  <a:srgbClr val="FF8C38"/>
                 </a:solidFill>
               </a:rPr>
               <a:t>Tiers 1 to 3: Core Physics &amp; SCADA Streaming</a:t>
@@ -18756,7 +18756,7 @@
             <a:r>
               <a:rPr lang="en-US" sz="1000" dirty="0">
                 <a:solidFill>
-                  <a:srgbClr val="FFF7ED"/>
+                  <a:srgbClr val="F1F5F9"/>
                 </a:solidFill>
                 <a:latin typeface="Segoe UI" pitchFamily="34" charset="0"/>
                 <a:ea typeface="Segoe UI" pitchFamily="34" charset="-122"/>
@@ -18795,7 +18795,7 @@
             <a:r>
               <a:rPr lang="en-US" sz="1000" dirty="0">
                 <a:solidFill>
-                  <a:srgbClr val="FFF7ED"/>
+                  <a:srgbClr val="F1F5F9"/>
                 </a:solidFill>
                 <a:latin typeface="Segoe UI" pitchFamily="34" charset="0"/>
                 <a:ea typeface="Segoe UI" pitchFamily="34" charset="-122"/>
@@ -18834,7 +18834,7 @@
             <a:r>
               <a:rPr lang="en-US" sz="1000" dirty="0">
                 <a:solidFill>
-                  <a:srgbClr val="FFF7ED"/>
+                  <a:srgbClr val="F1F5F9"/>
                 </a:solidFill>
                 <a:latin typeface="Segoe UI" pitchFamily="34" charset="0"/>
                 <a:ea typeface="Segoe UI" pitchFamily="34" charset="-122"/>
@@ -18863,11 +18863,11 @@
             </a:avLst>
           </a:prstGeom>
           <a:solidFill>
-            <a:srgbClr val="6B2006"/>
+            <a:srgbClr val="121826"/>
           </a:solidFill>
           <a:ln w="15240">
             <a:solidFill>
-              <a:srgbClr val="E06528"/>
+              <a:srgbClr val="1E293B"/>
             </a:solidFill>
             <a:prstDash val="solid"/>
           </a:ln>
@@ -18900,7 +18900,7 @@
             <a:r>
               <a:rPr lang="en-US" sz="1200" b="1" dirty="0">
                 <a:solidFill>
-                  <a:srgbClr val="FDE047"/>
+                  <a:srgbClr val="FF8C38"/>
                 </a:solidFill>
               </a:rPr>
               <a:t>Tiers 4 &amp; 5: SCADA Visualizers &amp; AI Copilot</a:t>
@@ -18936,7 +18936,7 @@
             <a:r>
               <a:rPr lang="en-US" sz="1000" dirty="0">
                 <a:solidFill>
-                  <a:srgbClr val="FFF7ED"/>
+                  <a:srgbClr val="F1F5F9"/>
                 </a:solidFill>
                 <a:latin typeface="Segoe UI" pitchFamily="34" charset="0"/>
                 <a:ea typeface="Segoe UI" pitchFamily="34" charset="-122"/>
@@ -18975,7 +18975,7 @@
             <a:r>
               <a:rPr lang="en-US" sz="1000" dirty="0">
                 <a:solidFill>
-                  <a:srgbClr val="FFF7ED"/>
+                  <a:srgbClr val="F1F5F9"/>
                 </a:solidFill>
                 <a:latin typeface="Segoe UI" pitchFamily="34" charset="0"/>
                 <a:ea typeface="Segoe UI" pitchFamily="34" charset="-122"/>
@@ -19014,7 +19014,7 @@
             <a:r>
               <a:rPr lang="en-US" sz="1000" dirty="0">
                 <a:solidFill>
-                  <a:srgbClr val="FFF7ED"/>
+                  <a:srgbClr val="F1F5F9"/>
                 </a:solidFill>
                 <a:latin typeface="Segoe UI" pitchFamily="34" charset="0"/>
                 <a:ea typeface="Segoe UI" pitchFamily="34" charset="-122"/>
@@ -19040,7 +19040,7 @@
     <p:bg>
       <p:bgPr>
         <a:solidFill>
-          <a:srgbClr val="C2410C"/>
+          <a:srgbClr val="0B0F19"/>
         </a:solidFill>
       </p:bgPr>
     </p:bg>
@@ -19067,17 +19067,17 @@
         <p:spPr>
           <a:xfrm>
             <a:off x="0" y="0"/>
-            <a:ext cx="12191695" cy="91440"/>
+            <a:ext cx="12191695" cy="73152"/>
           </a:xfrm>
           <a:prstGeom prst="rect">
             <a:avLst/>
           </a:prstGeom>
           <a:solidFill>
-            <a:srgbClr val="FFFFFF"/>
+            <a:srgbClr val="FF6B00"/>
           </a:solidFill>
           <a:ln w="12700">
             <a:solidFill>
-              <a:srgbClr val="FFFFFF"/>
+              <a:srgbClr val="FF6B00"/>
             </a:solidFill>
             <a:prstDash val="solid"/>
           </a:ln>
@@ -19100,11 +19100,11 @@
             </a:avLst>
           </a:prstGeom>
           <a:solidFill>
-            <a:srgbClr val="451203"/>
+            <a:srgbClr val="2A1708"/>
           </a:solidFill>
           <a:ln w="15240">
             <a:solidFill>
-              <a:srgbClr val="FFFFFF"/>
+              <a:srgbClr val="FF6B00"/>
             </a:solidFill>
             <a:prstDash val="solid"/>
           </a:ln>
@@ -19137,7 +19137,7 @@
             <a:r>
               <a:rPr lang="en-US" sz="950" b="1" dirty="0">
                 <a:solidFill>
-                  <a:srgbClr val="FDE047"/>
+                  <a:srgbClr val="FFA726"/>
                 </a:solidFill>
               </a:rPr>
               <a:t>⚙  SPECIFICATIONS &amp; TECH STACK</a:t>
@@ -19202,7 +19202,7 @@
           <a:noFill/>
           <a:ln w="19050">
             <a:solidFill>
-              <a:srgbClr val="E06528"/>
+              <a:srgbClr val="1E293B"/>
             </a:solidFill>
             <a:prstDash val="solid"/>
           </a:ln>
@@ -19217,7 +19217,7 @@
         <p:spPr>
           <a:xfrm>
             <a:off x="731520" y="1234440"/>
-            <a:ext cx="2560320" cy="0"/>
+            <a:ext cx="2286000" cy="0"/>
           </a:xfrm>
           <a:prstGeom prst="line">
             <a:avLst/>
@@ -19225,7 +19225,7 @@
           <a:noFill/>
           <a:ln w="31750">
             <a:solidFill>
-              <a:srgbClr val="FFFFFF"/>
+              <a:srgbClr val="FF6B00"/>
             </a:solidFill>
             <a:prstDash val="solid"/>
           </a:ln>
@@ -19248,7 +19248,7 @@
           <a:noFill/>
           <a:ln w="12700">
             <a:solidFill>
-              <a:srgbClr val="E06528"/>
+              <a:srgbClr val="1E293B"/>
             </a:solidFill>
             <a:prstDash val="solid"/>
           </a:ln>
@@ -19281,7 +19281,7 @@
             <a:r>
               <a:rPr lang="en-US" sz="900" dirty="0">
                 <a:solidFill>
-                  <a:srgbClr val="FED7AA"/>
+                  <a:srgbClr val="94A3B8"/>
                 </a:solidFill>
                 <a:latin typeface="Segoe UI" pitchFamily="34" charset="0"/>
                 <a:ea typeface="Segoe UI" pitchFamily="34" charset="-122"/>
@@ -19320,7 +19320,7 @@
             <a:r>
               <a:rPr lang="en-US" sz="950" b="1" dirty="0">
                 <a:solidFill>
-                  <a:srgbClr val="FFFFFF"/>
+                  <a:srgbClr val="FF6B00"/>
                 </a:solidFill>
                 <a:latin typeface="Segoe UI" pitchFamily="34" charset="0"/>
                 <a:ea typeface="Segoe UI" pitchFamily="34" charset="-122"/>
@@ -19349,7 +19349,226 @@
             </a:avLst>
           </a:prstGeom>
           <a:solidFill>
-            <a:srgbClr val="6B2006"/>
+            <a:srgbClr val="121826"/>
+          </a:solidFill>
+          <a:ln w="15240">
+            <a:solidFill>
+              <a:srgbClr val="1E293B"/>
+            </a:solidFill>
+            <a:prstDash val="solid"/>
+          </a:ln>
+        </p:spPr>
+      </p:sp>
+      <p:sp>
+        <p:nvSpPr>
+          <p:cNvPr id="12" name="Text 10"/>
+          <p:cNvSpPr/>
+          <p:nvPr/>
+        </p:nvSpPr>
+        <p:spPr>
+          <a:xfrm>
+            <a:off x="1005840" y="1645920"/>
+            <a:ext cx="4663440" cy="320040"/>
+          </a:xfrm>
+          <a:prstGeom prst="rect">
+            <a:avLst/>
+          </a:prstGeom>
+          <a:noFill/>
+          <a:ln/>
+        </p:spPr>
+        <p:txBody>
+          <a:bodyPr wrap="square" rtlCol="0" anchor="ctr"/>
+          <a:lstStyle/>
+          <a:p>
+            <a:pPr indent="0" marL="0">
+              <a:buNone/>
+            </a:pPr>
+            <a:r>
+              <a:rPr lang="en-US" sz="1200" b="1" dirty="0">
+                <a:solidFill>
+                  <a:srgbClr val="FF8C38"/>
+                </a:solidFill>
+              </a:rPr>
+              <a:t>Hardware Requirements &amp; Industrial Specs</a:t>
+            </a:r>
+            <a:endParaRPr lang="en-US" sz="1200" dirty="0"/>
+          </a:p>
+        </p:txBody>
+      </p:sp>
+      <p:sp>
+        <p:nvSpPr>
+          <p:cNvPr id="13" name="Text 11"/>
+          <p:cNvSpPr/>
+          <p:nvPr/>
+        </p:nvSpPr>
+        <p:spPr>
+          <a:xfrm>
+            <a:off x="1005840" y="2057400"/>
+            <a:ext cx="4663440" cy="822960"/>
+          </a:xfrm>
+          <a:prstGeom prst="rect">
+            <a:avLst/>
+          </a:prstGeom>
+          <a:noFill/>
+          <a:ln/>
+        </p:spPr>
+        <p:txBody>
+          <a:bodyPr wrap="square" rtlCol="0" anchor="ctr"/>
+          <a:lstStyle/>
+          <a:p>
+            <a:pPr indent="0" marL="0">
+              <a:buNone/>
+            </a:pPr>
+            <a:r>
+              <a:rPr lang="en-US" sz="1000" dirty="0">
+                <a:solidFill>
+                  <a:srgbClr val="F1F5F9"/>
+                </a:solidFill>
+                <a:latin typeface="Segoe UI" pitchFamily="34" charset="0"/>
+                <a:ea typeface="Segoe UI" pitchFamily="34" charset="-122"/>
+                <a:cs typeface="Segoe UI" pitchFamily="34" charset="-120"/>
+              </a:rPr>
+              <a:t>• Workstation CPU: Intel Core i5 / Ryzen 5 minimum (Intel Core i7 8-Core recommended for multi-well ODE solving).</a:t>
+            </a:r>
+            <a:endParaRPr lang="en-US" sz="1000" dirty="0"/>
+          </a:p>
+        </p:txBody>
+      </p:sp>
+      <p:sp>
+        <p:nvSpPr>
+          <p:cNvPr id="14" name="Text 12"/>
+          <p:cNvSpPr/>
+          <p:nvPr/>
+        </p:nvSpPr>
+        <p:spPr>
+          <a:xfrm>
+            <a:off x="1005840" y="2926080"/>
+            <a:ext cx="4663440" cy="822960"/>
+          </a:xfrm>
+          <a:prstGeom prst="rect">
+            <a:avLst/>
+          </a:prstGeom>
+          <a:noFill/>
+          <a:ln/>
+        </p:spPr>
+        <p:txBody>
+          <a:bodyPr wrap="square" rtlCol="0" anchor="ctr"/>
+          <a:lstStyle/>
+          <a:p>
+            <a:pPr indent="0" marL="0">
+              <a:buNone/>
+            </a:pPr>
+            <a:r>
+              <a:rPr lang="en-US" sz="1000" dirty="0">
+                <a:solidFill>
+                  <a:srgbClr val="F1F5F9"/>
+                </a:solidFill>
+                <a:latin typeface="Segoe UI" pitchFamily="34" charset="0"/>
+                <a:ea typeface="Segoe UI" pitchFamily="34" charset="-122"/>
+                <a:cs typeface="Segoe UI" pitchFamily="34" charset="-120"/>
+              </a:rPr>
+              <a:t>• Memory: 8 GB minimum (16 GB recommended for high-frequency telemetry streaming).</a:t>
+            </a:r>
+            <a:endParaRPr lang="en-US" sz="1000" dirty="0"/>
+          </a:p>
+        </p:txBody>
+      </p:sp>
+      <p:sp>
+        <p:nvSpPr>
+          <p:cNvPr id="15" name="Text 13"/>
+          <p:cNvSpPr/>
+          <p:nvPr/>
+        </p:nvSpPr>
+        <p:spPr>
+          <a:xfrm>
+            <a:off x="1005840" y="3794760"/>
+            <a:ext cx="4663440" cy="822960"/>
+          </a:xfrm>
+          <a:prstGeom prst="rect">
+            <a:avLst/>
+          </a:prstGeom>
+          <a:noFill/>
+          <a:ln/>
+        </p:spPr>
+        <p:txBody>
+          <a:bodyPr wrap="square" rtlCol="0" anchor="ctr"/>
+          <a:lstStyle/>
+          <a:p>
+            <a:pPr indent="0" marL="0">
+              <a:buNone/>
+            </a:pPr>
+            <a:r>
+              <a:rPr lang="en-US" sz="1000" dirty="0">
+                <a:solidFill>
+                  <a:srgbClr val="F1F5F9"/>
+                </a:solidFill>
+                <a:latin typeface="Segoe UI" pitchFamily="34" charset="0"/>
+                <a:ea typeface="Segoe UI" pitchFamily="34" charset="-122"/>
+                <a:cs typeface="Segoe UI" pitchFamily="34" charset="-120"/>
+              </a:rPr>
+              <a:t>• Display: 1920×1080 FHD resolution with Canvas 2D/WebGL GPU hardware acceleration.</a:t>
+            </a:r>
+            <a:endParaRPr lang="en-US" sz="1000" dirty="0"/>
+          </a:p>
+        </p:txBody>
+      </p:sp>
+      <p:sp>
+        <p:nvSpPr>
+          <p:cNvPr id="16" name="Text 14"/>
+          <p:cNvSpPr/>
+          <p:nvPr/>
+        </p:nvSpPr>
+        <p:spPr>
+          <a:xfrm>
+            <a:off x="1005840" y="4663440"/>
+            <a:ext cx="4663440" cy="822960"/>
+          </a:xfrm>
+          <a:prstGeom prst="rect">
+            <a:avLst/>
+          </a:prstGeom>
+          <a:noFill/>
+          <a:ln/>
+        </p:spPr>
+        <p:txBody>
+          <a:bodyPr wrap="square" rtlCol="0" anchor="ctr"/>
+          <a:lstStyle/>
+          <a:p>
+            <a:pPr indent="0" marL="0">
+              <a:buNone/>
+            </a:pPr>
+            <a:r>
+              <a:rPr lang="en-US" sz="1000" dirty="0">
+                <a:solidFill>
+                  <a:srgbClr val="F1F5F9"/>
+                </a:solidFill>
+                <a:latin typeface="Segoe UI" pitchFamily="34" charset="0"/>
+                <a:ea typeface="Segoe UI" pitchFamily="34" charset="-122"/>
+                <a:cs typeface="Segoe UI" pitchFamily="34" charset="-120"/>
+              </a:rPr>
+              <a:t>• Edge SCADA Gateway: ARM Cortex-A53 / Moxa Industrial IoT RTU for field sensor integration.</a:t>
+            </a:r>
+            <a:endParaRPr lang="en-US" sz="1000" dirty="0"/>
+          </a:p>
+        </p:txBody>
+      </p:sp>
+      <p:sp>
+        <p:nvSpPr>
+          <p:cNvPr id="17" name="Shape 15"/>
+          <p:cNvSpPr/>
+          <p:nvPr/>
+        </p:nvSpPr>
+        <p:spPr>
+          <a:xfrm>
+            <a:off x="6217920" y="1463040"/>
+            <a:ext cx="5212080" cy="4754880"/>
+          </a:xfrm>
+          <a:prstGeom prst="roundRect">
+            <a:avLst>
+              <a:gd name="adj" fmla="val 1923"/>
+            </a:avLst>
+          </a:prstGeom>
+          <a:solidFill>
+            <a:srgbClr val="172033"/>
           </a:solidFill>
           <a:ln w="15240">
             <a:solidFill>
@@ -19361,13 +19580,13 @@
       </p:sp>
       <p:sp>
         <p:nvSpPr>
-          <p:cNvPr id="12" name="Text 10"/>
-          <p:cNvSpPr/>
-          <p:nvPr/>
-        </p:nvSpPr>
-        <p:spPr>
-          <a:xfrm>
-            <a:off x="1005840" y="1645920"/>
+          <p:cNvPr id="18" name="Text 16"/>
+          <p:cNvSpPr/>
+          <p:nvPr/>
+        </p:nvSpPr>
+        <p:spPr>
+          <a:xfrm>
+            <a:off x="6492240" y="1645920"/>
             <a:ext cx="4663440" cy="320040"/>
           </a:xfrm>
           <a:prstGeom prst="rect">
@@ -19386,10 +19605,10 @@
             <a:r>
               <a:rPr lang="en-US" sz="1200" b="1" dirty="0">
                 <a:solidFill>
-                  <a:srgbClr val="FDE047"/>
-                </a:solidFill>
-              </a:rPr>
-              <a:t>Hardware Requirements &amp; Industrial Specs</a:t>
+                  <a:srgbClr val="FFFFFF"/>
+                </a:solidFill>
+              </a:rPr>
+              <a:t>Software &amp; Framework Stack</a:t>
             </a:r>
             <a:endParaRPr lang="en-US" sz="1200" dirty="0"/>
           </a:p>
@@ -19397,13 +19616,13 @@
       </p:sp>
       <p:sp>
         <p:nvSpPr>
-          <p:cNvPr id="13" name="Text 11"/>
-          <p:cNvSpPr/>
-          <p:nvPr/>
-        </p:nvSpPr>
-        <p:spPr>
-          <a:xfrm>
-            <a:off x="1005840" y="2057400"/>
+          <p:cNvPr id="19" name="Text 17"/>
+          <p:cNvSpPr/>
+          <p:nvPr/>
+        </p:nvSpPr>
+        <p:spPr>
+          <a:xfrm>
+            <a:off x="6492240" y="2057400"/>
             <a:ext cx="4663440" cy="822960"/>
           </a:xfrm>
           <a:prstGeom prst="rect">
@@ -19422,13 +19641,13 @@
             <a:r>
               <a:rPr lang="en-US" sz="1000" dirty="0">
                 <a:solidFill>
-                  <a:srgbClr val="FFF7ED"/>
+                  <a:srgbClr val="F1F5F9"/>
                 </a:solidFill>
                 <a:latin typeface="Segoe UI" pitchFamily="34" charset="0"/>
                 <a:ea typeface="Segoe UI" pitchFamily="34" charset="-122"/>
                 <a:cs typeface="Segoe UI" pitchFamily="34" charset="-120"/>
               </a:rPr>
-              <a:t>• Workstation CPU: Intel Core i5 / Ryzen 5 minimum (Intel Core i7 8-Core recommended for multi-well ODE solving).</a:t>
+              <a:t>• Core Framework: React 18.3 + TypeScript (Strict type safety, zero runtime errors).</a:t>
             </a:r>
             <a:endParaRPr lang="en-US" sz="1000" dirty="0"/>
           </a:p>
@@ -19436,13 +19655,13 @@
       </p:sp>
       <p:sp>
         <p:nvSpPr>
-          <p:cNvPr id="14" name="Text 12"/>
-          <p:cNvSpPr/>
-          <p:nvPr/>
-        </p:nvSpPr>
-        <p:spPr>
-          <a:xfrm>
-            <a:off x="1005840" y="2926080"/>
+          <p:cNvPr id="20" name="Text 18"/>
+          <p:cNvSpPr/>
+          <p:nvPr/>
+        </p:nvSpPr>
+        <p:spPr>
+          <a:xfrm>
+            <a:off x="6492240" y="2926080"/>
             <a:ext cx="4663440" cy="822960"/>
           </a:xfrm>
           <a:prstGeom prst="rect">
@@ -19461,13 +19680,13 @@
             <a:r>
               <a:rPr lang="en-US" sz="1000" dirty="0">
                 <a:solidFill>
-                  <a:srgbClr val="FFF7ED"/>
+                  <a:srgbClr val="F1F5F9"/>
                 </a:solidFill>
                 <a:latin typeface="Segoe UI" pitchFamily="34" charset="0"/>
                 <a:ea typeface="Segoe UI" pitchFamily="34" charset="-122"/>
                 <a:cs typeface="Segoe UI" pitchFamily="34" charset="-120"/>
               </a:rPr>
-              <a:t>• Memory: 8 GB minimum (16 GB recommended for high-frequency telemetry streaming).</a:t>
+              <a:t>• UI Design System: Tailwind CSS + Custom Orange-White Industrial SCADA design tokens.</a:t>
             </a:r>
             <a:endParaRPr lang="en-US" sz="1000" dirty="0"/>
           </a:p>
@@ -19475,13 +19694,13 @@
       </p:sp>
       <p:sp>
         <p:nvSpPr>
-          <p:cNvPr id="15" name="Text 13"/>
-          <p:cNvSpPr/>
-          <p:nvPr/>
-        </p:nvSpPr>
-        <p:spPr>
-          <a:xfrm>
-            <a:off x="1005840" y="3794760"/>
+          <p:cNvPr id="21" name="Text 19"/>
+          <p:cNvSpPr/>
+          <p:nvPr/>
+        </p:nvSpPr>
+        <p:spPr>
+          <a:xfrm>
+            <a:off x="6492240" y="3794760"/>
             <a:ext cx="4663440" cy="822960"/>
           </a:xfrm>
           <a:prstGeom prst="rect">
@@ -19500,231 +19719,12 @@
             <a:r>
               <a:rPr lang="en-US" sz="1000" dirty="0">
                 <a:solidFill>
-                  <a:srgbClr val="FFF7ED"/>
+                  <a:srgbClr val="F1F5F9"/>
                 </a:solidFill>
                 <a:latin typeface="Segoe UI" pitchFamily="34" charset="0"/>
                 <a:ea typeface="Segoe UI" pitchFamily="34" charset="-122"/>
                 <a:cs typeface="Segoe UI" pitchFamily="34" charset="-120"/>
               </a:rPr>
-              <a:t>• Display: 1920×1080 FHD resolution with Canvas 2D/WebGL GPU hardware acceleration.</a:t>
-            </a:r>
-            <a:endParaRPr lang="en-US" sz="1000" dirty="0"/>
-          </a:p>
-        </p:txBody>
-      </p:sp>
-      <p:sp>
-        <p:nvSpPr>
-          <p:cNvPr id="16" name="Text 14"/>
-          <p:cNvSpPr/>
-          <p:nvPr/>
-        </p:nvSpPr>
-        <p:spPr>
-          <a:xfrm>
-            <a:off x="1005840" y="4663440"/>
-            <a:ext cx="4663440" cy="822960"/>
-          </a:xfrm>
-          <a:prstGeom prst="rect">
-            <a:avLst/>
-          </a:prstGeom>
-          <a:noFill/>
-          <a:ln/>
-        </p:spPr>
-        <p:txBody>
-          <a:bodyPr wrap="square" rtlCol="0" anchor="ctr"/>
-          <a:lstStyle/>
-          <a:p>
-            <a:pPr indent="0" marL="0">
-              <a:buNone/>
-            </a:pPr>
-            <a:r>
-              <a:rPr lang="en-US" sz="1000" dirty="0">
-                <a:solidFill>
-                  <a:srgbClr val="FFF7ED"/>
-                </a:solidFill>
-                <a:latin typeface="Segoe UI" pitchFamily="34" charset="0"/>
-                <a:ea typeface="Segoe UI" pitchFamily="34" charset="-122"/>
-                <a:cs typeface="Segoe UI" pitchFamily="34" charset="-120"/>
-              </a:rPr>
-              <a:t>• Edge SCADA Gateway: ARM Cortex-A53 / Moxa Industrial IoT RTU for field sensor integration.</a:t>
-            </a:r>
-            <a:endParaRPr lang="en-US" sz="1000" dirty="0"/>
-          </a:p>
-        </p:txBody>
-      </p:sp>
-      <p:sp>
-        <p:nvSpPr>
-          <p:cNvPr id="17" name="Shape 15"/>
-          <p:cNvSpPr/>
-          <p:nvPr/>
-        </p:nvSpPr>
-        <p:spPr>
-          <a:xfrm>
-            <a:off x="6217920" y="1463040"/>
-            <a:ext cx="5212080" cy="4754880"/>
-          </a:xfrm>
-          <a:prstGeom prst="roundRect">
-            <a:avLst>
-              <a:gd name="adj" fmla="val 1923"/>
-            </a:avLst>
-          </a:prstGeom>
-          <a:solidFill>
-            <a:srgbClr val="872808"/>
-          </a:solidFill>
-          <a:ln w="15240">
-            <a:solidFill>
-              <a:srgbClr val="FFFFFF"/>
-            </a:solidFill>
-            <a:prstDash val="solid"/>
-          </a:ln>
-        </p:spPr>
-      </p:sp>
-      <p:sp>
-        <p:nvSpPr>
-          <p:cNvPr id="18" name="Text 16"/>
-          <p:cNvSpPr/>
-          <p:nvPr/>
-        </p:nvSpPr>
-        <p:spPr>
-          <a:xfrm>
-            <a:off x="6492240" y="1645920"/>
-            <a:ext cx="4663440" cy="320040"/>
-          </a:xfrm>
-          <a:prstGeom prst="rect">
-            <a:avLst/>
-          </a:prstGeom>
-          <a:noFill/>
-          <a:ln/>
-        </p:spPr>
-        <p:txBody>
-          <a:bodyPr wrap="square" rtlCol="0" anchor="ctr"/>
-          <a:lstStyle/>
-          <a:p>
-            <a:pPr indent="0" marL="0">
-              <a:buNone/>
-            </a:pPr>
-            <a:r>
-              <a:rPr lang="en-US" sz="1200" b="1" dirty="0">
-                <a:solidFill>
-                  <a:srgbClr val="FFFFFF"/>
-                </a:solidFill>
-              </a:rPr>
-              <a:t>Software &amp; Framework Stack</a:t>
-            </a:r>
-            <a:endParaRPr lang="en-US" sz="1200" dirty="0"/>
-          </a:p>
-        </p:txBody>
-      </p:sp>
-      <p:sp>
-        <p:nvSpPr>
-          <p:cNvPr id="19" name="Text 17"/>
-          <p:cNvSpPr/>
-          <p:nvPr/>
-        </p:nvSpPr>
-        <p:spPr>
-          <a:xfrm>
-            <a:off x="6492240" y="2057400"/>
-            <a:ext cx="4663440" cy="822960"/>
-          </a:xfrm>
-          <a:prstGeom prst="rect">
-            <a:avLst/>
-          </a:prstGeom>
-          <a:noFill/>
-          <a:ln/>
-        </p:spPr>
-        <p:txBody>
-          <a:bodyPr wrap="square" rtlCol="0" anchor="ctr"/>
-          <a:lstStyle/>
-          <a:p>
-            <a:pPr indent="0" marL="0">
-              <a:buNone/>
-            </a:pPr>
-            <a:r>
-              <a:rPr lang="en-US" sz="1000" dirty="0">
-                <a:solidFill>
-                  <a:srgbClr val="FFF7ED"/>
-                </a:solidFill>
-                <a:latin typeface="Segoe UI" pitchFamily="34" charset="0"/>
-                <a:ea typeface="Segoe UI" pitchFamily="34" charset="-122"/>
-                <a:cs typeface="Segoe UI" pitchFamily="34" charset="-120"/>
-              </a:rPr>
-              <a:t>• Core Framework: React 18.3 + TypeScript (Strict type safety, zero runtime errors).</a:t>
-            </a:r>
-            <a:endParaRPr lang="en-US" sz="1000" dirty="0"/>
-          </a:p>
-        </p:txBody>
-      </p:sp>
-      <p:sp>
-        <p:nvSpPr>
-          <p:cNvPr id="20" name="Text 18"/>
-          <p:cNvSpPr/>
-          <p:nvPr/>
-        </p:nvSpPr>
-        <p:spPr>
-          <a:xfrm>
-            <a:off x="6492240" y="2926080"/>
-            <a:ext cx="4663440" cy="822960"/>
-          </a:xfrm>
-          <a:prstGeom prst="rect">
-            <a:avLst/>
-          </a:prstGeom>
-          <a:noFill/>
-          <a:ln/>
-        </p:spPr>
-        <p:txBody>
-          <a:bodyPr wrap="square" rtlCol="0" anchor="ctr"/>
-          <a:lstStyle/>
-          <a:p>
-            <a:pPr indent="0" marL="0">
-              <a:buNone/>
-            </a:pPr>
-            <a:r>
-              <a:rPr lang="en-US" sz="1000" dirty="0">
-                <a:solidFill>
-                  <a:srgbClr val="FFF7ED"/>
-                </a:solidFill>
-                <a:latin typeface="Segoe UI" pitchFamily="34" charset="0"/>
-                <a:ea typeface="Segoe UI" pitchFamily="34" charset="-122"/>
-                <a:cs typeface="Segoe UI" pitchFamily="34" charset="-120"/>
-              </a:rPr>
-              <a:t>• UI Design System: Tailwind CSS + Custom Orange-White Industrial SCADA design tokens.</a:t>
-            </a:r>
-            <a:endParaRPr lang="en-US" sz="1000" dirty="0"/>
-          </a:p>
-        </p:txBody>
-      </p:sp>
-      <p:sp>
-        <p:nvSpPr>
-          <p:cNvPr id="21" name="Text 19"/>
-          <p:cNvSpPr/>
-          <p:nvPr/>
-        </p:nvSpPr>
-        <p:spPr>
-          <a:xfrm>
-            <a:off x="6492240" y="3794760"/>
-            <a:ext cx="4663440" cy="822960"/>
-          </a:xfrm>
-          <a:prstGeom prst="rect">
-            <a:avLst/>
-          </a:prstGeom>
-          <a:noFill/>
-          <a:ln/>
-        </p:spPr>
-        <p:txBody>
-          <a:bodyPr wrap="square" rtlCol="0" anchor="ctr"/>
-          <a:lstStyle/>
-          <a:p>
-            <a:pPr indent="0" marL="0">
-              <a:buNone/>
-            </a:pPr>
-            <a:r>
-              <a:rPr lang="en-US" sz="1000" dirty="0">
-                <a:solidFill>
-                  <a:srgbClr val="FFF7ED"/>
-                </a:solidFill>
-                <a:latin typeface="Segoe UI" pitchFamily="34" charset="0"/>
-                <a:ea typeface="Segoe UI" pitchFamily="34" charset="-122"/>
-                <a:cs typeface="Segoe UI" pitchFamily="34" charset="-120"/>
-              </a:rPr>
               <a:t>• Rendering &amp; Audio: HTML5 Canvas 2D API (60 FPS) + Native Web Audio API Acoustic Synthesizer.</a:t>
             </a:r>
             <a:endParaRPr lang="en-US" sz="1000" dirty="0"/>
@@ -19758,7 +19758,7 @@
             <a:r>
               <a:rPr lang="en-US" sz="1000" dirty="0">
                 <a:solidFill>
-                  <a:srgbClr val="FFF7ED"/>
+                  <a:srgbClr val="F1F5F9"/>
                 </a:solidFill>
                 <a:latin typeface="Segoe UI" pitchFamily="34" charset="0"/>
                 <a:ea typeface="Segoe UI" pitchFamily="34" charset="-122"/>
